--- a/src/assets/downloads/example-deck-ember.pptx
+++ b/src/assets/downloads/example-deck-ember.pptx
@@ -16,9 +16,10 @@
     <p:sldId id="264" r:id="rId10"/>
     <p:sldId id="265" r:id="rId11"/>
     <p:sldId id="266" r:id="rId12"/>
+    <p:sldId id="267" r:id="rId13"/>
   </p:sldIdLst>
   <p:notesMasterIdLst>
-    <p:notesMasterId r:id="rId13"/>
+    <p:notesMasterId r:id="rId14"/>
   </p:notesMasterIdLst>
   <p:sldSz cx="12192000" cy="6858000"/>
   <p:notesSz cx="6858000" cy="12192000"/>
@@ -1228,6 +1229,94 @@
 </p:notes>
 </file>
 
+<file path=ppt/notesSlides/notesSlide12.xml><?xml version="1.0" encoding="utf-8"?>
+<p:notes xmlns:a="http://schemas.openxmlformats.org/drawingml/2006/main" xmlns:r="http://schemas.openxmlformats.org/officeDocument/2006/relationships" xmlns:p="http://schemas.openxmlformats.org/presentationml/2006/main">
+  <p:cSld>
+    <p:spTree>
+      <p:nvGrpSpPr>
+        <p:cNvPr id="1" name=""/>
+        <p:cNvGrpSpPr/>
+        <p:nvPr/>
+      </p:nvGrpSpPr>
+      <p:grpSpPr>
+        <a:xfrm>
+          <a:off x="0" y="0"/>
+          <a:ext cx="0" cy="0"/>
+          <a:chOff x="0" y="0"/>
+          <a:chExt cx="0" cy="0"/>
+        </a:xfrm>
+      </p:grpSpPr>
+      <p:sp>
+        <p:nvSpPr>
+          <p:cNvPr id="2" name="Slide Image Placeholder 1"/>
+          <p:cNvSpPr>
+            <a:spLocks noGrp="1" noRot="1" noChangeAspect="1"/>
+          </p:cNvSpPr>
+          <p:nvPr>
+            <p:ph type="sldImg"/>
+          </p:nvPr>
+        </p:nvSpPr>
+        <p:spPr/>
+      </p:sp>
+      <p:sp>
+        <p:nvSpPr>
+          <p:cNvPr id="3" name="Notes Placeholder 2"/>
+          <p:cNvSpPr>
+            <a:spLocks noGrp="1"/>
+          </p:cNvSpPr>
+          <p:nvPr>
+            <p:ph type="body" idx="1"/>
+          </p:nvPr>
+        </p:nvSpPr>
+        <p:spPr/>
+        <p:txBody>
+          <a:bodyPr/>
+          <a:lstStyle/>
+          <a:p>
+            <a:r>
+              <a:rPr lang="en-US" dirty="0"/>
+              <a:t/>
+            </a:r>
+            <a:endParaRPr lang="en-US" dirty="0"/>
+          </a:p>
+        </p:txBody>
+      </p:sp>
+      <p:sp>
+        <p:nvSpPr>
+          <p:cNvPr id="4" name="Slide Number Placeholder 3"/>
+          <p:cNvSpPr>
+            <a:spLocks noGrp="1"/>
+          </p:cNvSpPr>
+          <p:nvPr>
+            <p:ph type="sldNum" sz="quarter" idx="10"/>
+          </p:nvPr>
+        </p:nvSpPr>
+        <p:spPr/>
+        <p:txBody>
+          <a:bodyPr/>
+          <a:lstStyle/>
+          <a:p>
+            <a:fld id="{F7021451-1387-4CA6-816F-3879F97B5CBC}" type="slidenum">
+              <a:rPr lang="en-US"/>
+              <a:t>12</a:t>
+            </a:fld>
+            <a:endParaRPr lang="en-US"/>
+          </a:p>
+        </p:txBody>
+      </p:sp>
+    </p:spTree>
+    <p:extLst>
+      <p:ext uri="{BB962C8B-B14F-4D97-AF65-F5344CB8AC3E}">
+        <p14:creationId xmlns:p14="http://schemas.microsoft.com/office/powerpoint/2010/main" val="1024086991"/>
+      </p:ext>
+    </p:extLst>
+  </p:cSld>
+  <p:clrMapOvr>
+    <a:masterClrMapping/>
+  </p:clrMapOvr>
+</p:notes>
+</file>
+
 <file path=ppt/notesSlides/notesSlide2.xml><?xml version="1.0" encoding="utf-8"?>
 <p:notes xmlns:a="http://schemas.openxmlformats.org/drawingml/2006/main" xmlns:r="http://schemas.openxmlformats.org/officeDocument/2006/relationships" xmlns:p="http://schemas.openxmlformats.org/presentationml/2006/main">
   <p:cSld>
@@ -2505,7 +2594,7 @@
       </p:sp>
       <p:pic>
         <p:nvPicPr>
-          <p:cNvPr id="14" name="Image 0" descr="/var/folders/lw/rmylcyvd5rjfxk9g1z9rrm8w0000gq/T/showship-deck-oVNQqv/logo_trimmed.png">    </p:cNvPr>
+          <p:cNvPr id="14" name="Image 0" descr="/var/folders/lw/rmylcyvd5rjfxk9g1z9rrm8w0000gq/T/showship-deck-EGIwvT/logo_trimmed.png">    </p:cNvPr>
           <p:cNvPicPr>
             <a:picLocks noChangeAspect="1"/>
           </p:cNvPicPr>
@@ -2995,7 +3084,7 @@
                 <a:ea typeface="Arial" pitchFamily="34" charset="-122"/>
                 <a:cs typeface="Arial" pitchFamily="34" charset="-120"/>
               </a:rPr>
-              <a:t>Looking Ahead</a:t>
+              <a:t>Engineering Activity · GitHub</a:t>
             </a:r>
             <a:endParaRPr lang="en-US" sz="1200" dirty="0"/>
           </a:p>
@@ -3075,7 +3164,7 @@
                 <a:ea typeface="Georgia" pitchFamily="34" charset="-122"/>
                 <a:cs typeface="Georgia" pitchFamily="34" charset="-120"/>
               </a:rPr>
-              <a:t>Next Week's Plan</a:t>
+              <a:t>Team Delivery Activity This Week</a:t>
             </a:r>
             <a:endParaRPr lang="en-US" sz="2600" dirty="0"/>
           </a:p>
@@ -3122,7 +3211,7 @@
       </p:sp>
       <p:pic>
         <p:nvPicPr>
-          <p:cNvPr id="8" name="Image 0" descr="/var/folders/lw/rmylcyvd5rjfxk9g1z9rrm8w0000gq/T/showship-deck-oVNQqv/paper_mark.png">    </p:cNvPr>
+          <p:cNvPr id="8" name="Image 0" descr="/var/folders/lw/rmylcyvd5rjfxk9g1z9rrm8w0000gq/T/showship-deck-EGIwvT/paper_mark.png">    </p:cNvPr>
           <p:cNvPicPr>
             <a:picLocks noChangeAspect="1"/>
           </p:cNvPicPr>
@@ -3206,13 +3295,13 @@
         <p:spPr>
           <a:xfrm>
             <a:off x="640080" y="1783080"/>
-            <a:ext cx="10908792" cy="457200"/>
+            <a:ext cx="3514344" cy="1051560"/>
           </a:xfrm>
           <a:prstGeom prst="rect">
             <a:avLst/>
           </a:prstGeom>
           <a:solidFill>
-            <a:srgbClr val="2E3237"/>
+            <a:srgbClr val="23262C"/>
           </a:solidFill>
           <a:ln/>
         </p:spPr>
@@ -3225,8 +3314,8 @@
         </p:nvSpPr>
         <p:spPr>
           <a:xfrm>
-            <a:off x="822960" y="1783080"/>
-            <a:ext cx="2377440" cy="457200"/>
+            <a:off x="868680" y="1856232"/>
+            <a:ext cx="3057144" cy="594360"/>
           </a:xfrm>
           <a:prstGeom prst="rect">
             <a:avLst/>
@@ -3238,11 +3327,50 @@
           <a:bodyPr wrap="square" lIns="0" tIns="0" rIns="0" bIns="0" rtlCol="0" anchor="ctr"/>
           <a:lstStyle/>
           <a:p>
-            <a:pPr algn="l" indent="0" marL="0">
-              <a:buNone/>
-            </a:pPr>
-            <a:r>
-              <a:rPr lang="en-US" sz="1100" b="1" dirty="0">
+            <a:pPr indent="0" marL="0">
+              <a:buNone/>
+            </a:pPr>
+            <a:r>
+              <a:rPr lang="en-US" sz="3400" b="1" dirty="0">
+                <a:solidFill>
+                  <a:srgbClr val="F2B134"/>
+                </a:solidFill>
+                <a:latin typeface="Georgia" pitchFamily="34" charset="0"/>
+                <a:ea typeface="Georgia" pitchFamily="34" charset="-122"/>
+                <a:cs typeface="Georgia" pitchFamily="34" charset="-120"/>
+              </a:rPr>
+              <a:t>3</a:t>
+            </a:r>
+            <a:endParaRPr lang="en-US" sz="3400" dirty="0"/>
+          </a:p>
+        </p:txBody>
+      </p:sp>
+      <p:sp>
+        <p:nvSpPr>
+          <p:cNvPr id="12" name="Text 9"/>
+          <p:cNvSpPr/>
+          <p:nvPr/>
+        </p:nvSpPr>
+        <p:spPr>
+          <a:xfrm>
+            <a:off x="868680" y="2459736"/>
+            <a:ext cx="3057144" cy="274320"/>
+          </a:xfrm>
+          <a:prstGeom prst="rect">
+            <a:avLst/>
+          </a:prstGeom>
+          <a:noFill/>
+          <a:ln/>
+        </p:spPr>
+        <p:txBody>
+          <a:bodyPr wrap="square" lIns="0" tIns="0" rIns="0" bIns="0" rtlCol="0" anchor="ctr"/>
+          <a:lstStyle/>
+          <a:p>
+            <a:pPr indent="0" marL="0">
+              <a:buNone/>
+            </a:pPr>
+            <a:r>
+              <a:rPr lang="en-US" sz="1200" dirty="0">
                 <a:solidFill>
                   <a:srgbClr val="B9BFC9"/>
                 </a:solidFill>
@@ -3250,22 +3378,42 @@
                 <a:ea typeface="Arial" pitchFamily="34" charset="-122"/>
                 <a:cs typeface="Arial" pitchFamily="34" charset="-120"/>
               </a:rPr>
-              <a:t>Project / track</a:t>
-            </a:r>
-            <a:endParaRPr lang="en-US" sz="1100" dirty="0"/>
-          </a:p>
-        </p:txBody>
-      </p:sp>
-      <p:sp>
-        <p:nvSpPr>
-          <p:cNvPr id="12" name="Text 9"/>
-          <p:cNvSpPr/>
-          <p:nvPr/>
-        </p:nvSpPr>
-        <p:spPr>
-          <a:xfrm>
-            <a:off x="3566160" y="1783080"/>
-            <a:ext cx="1371600" cy="457200"/>
+              <a:t>Features approved</a:t>
+            </a:r>
+            <a:endParaRPr lang="en-US" sz="1200" dirty="0"/>
+          </a:p>
+        </p:txBody>
+      </p:sp>
+      <p:sp>
+        <p:nvSpPr>
+          <p:cNvPr id="13" name="Shape 10"/>
+          <p:cNvSpPr/>
+          <p:nvPr/>
+        </p:nvSpPr>
+        <p:spPr>
+          <a:xfrm>
+            <a:off x="4337304" y="1783080"/>
+            <a:ext cx="3514344" cy="1051560"/>
+          </a:xfrm>
+          <a:prstGeom prst="rect">
+            <a:avLst/>
+          </a:prstGeom>
+          <a:solidFill>
+            <a:srgbClr val="23262C"/>
+          </a:solidFill>
+          <a:ln/>
+        </p:spPr>
+      </p:sp>
+      <p:sp>
+        <p:nvSpPr>
+          <p:cNvPr id="14" name="Text 11"/>
+          <p:cNvSpPr/>
+          <p:nvPr/>
+        </p:nvSpPr>
+        <p:spPr>
+          <a:xfrm>
+            <a:off x="4565904" y="1856232"/>
+            <a:ext cx="3057144" cy="594360"/>
           </a:xfrm>
           <a:prstGeom prst="rect">
             <a:avLst/>
@@ -3277,11 +3425,50 @@
           <a:bodyPr wrap="square" lIns="0" tIns="0" rIns="0" bIns="0" rtlCol="0" anchor="ctr"/>
           <a:lstStyle/>
           <a:p>
-            <a:pPr algn="l" indent="0" marL="0">
-              <a:buNone/>
-            </a:pPr>
-            <a:r>
-              <a:rPr lang="en-US" sz="1100" b="1" dirty="0">
+            <a:pPr indent="0" marL="0">
+              <a:buNone/>
+            </a:pPr>
+            <a:r>
+              <a:rPr lang="en-US" sz="3400" b="1" dirty="0">
+                <a:solidFill>
+                  <a:srgbClr val="F4F0E8"/>
+                </a:solidFill>
+                <a:latin typeface="Georgia" pitchFamily="34" charset="0"/>
+                <a:ea typeface="Georgia" pitchFamily="34" charset="-122"/>
+                <a:cs typeface="Georgia" pitchFamily="34" charset="-120"/>
+              </a:rPr>
+              <a:t>2</a:t>
+            </a:r>
+            <a:endParaRPr lang="en-US" sz="3400" dirty="0"/>
+          </a:p>
+        </p:txBody>
+      </p:sp>
+      <p:sp>
+        <p:nvSpPr>
+          <p:cNvPr id="15" name="Text 12"/>
+          <p:cNvSpPr/>
+          <p:nvPr/>
+        </p:nvSpPr>
+        <p:spPr>
+          <a:xfrm>
+            <a:off x="4565904" y="2459736"/>
+            <a:ext cx="3057144" cy="274320"/>
+          </a:xfrm>
+          <a:prstGeom prst="rect">
+            <a:avLst/>
+          </a:prstGeom>
+          <a:noFill/>
+          <a:ln/>
+        </p:spPr>
+        <p:txBody>
+          <a:bodyPr wrap="square" lIns="0" tIns="0" rIns="0" bIns="0" rtlCol="0" anchor="ctr"/>
+          <a:lstStyle/>
+          <a:p>
+            <a:pPr indent="0" marL="0">
+              <a:buNone/>
+            </a:pPr>
+            <a:r>
+              <a:rPr lang="en-US" sz="1200" dirty="0">
                 <a:solidFill>
                   <a:srgbClr val="B9BFC9"/>
                 </a:solidFill>
@@ -3289,22 +3476,42 @@
                 <a:ea typeface="Arial" pitchFamily="34" charset="-122"/>
                 <a:cs typeface="Arial" pitchFamily="34" charset="-120"/>
               </a:rPr>
-              <a:t>Owner</a:t>
-            </a:r>
-            <a:endParaRPr lang="en-US" sz="1100" dirty="0"/>
-          </a:p>
-        </p:txBody>
-      </p:sp>
-      <p:sp>
-        <p:nvSpPr>
-          <p:cNvPr id="13" name="Text 10"/>
-          <p:cNvSpPr/>
-          <p:nvPr/>
-        </p:nvSpPr>
-        <p:spPr>
-          <a:xfrm>
-            <a:off x="5303520" y="1783080"/>
-            <a:ext cx="3593592" cy="457200"/>
+              <a:t>In final review</a:t>
+            </a:r>
+            <a:endParaRPr lang="en-US" sz="1200" dirty="0"/>
+          </a:p>
+        </p:txBody>
+      </p:sp>
+      <p:sp>
+        <p:nvSpPr>
+          <p:cNvPr id="16" name="Shape 13"/>
+          <p:cNvSpPr/>
+          <p:nvPr/>
+        </p:nvSpPr>
+        <p:spPr>
+          <a:xfrm>
+            <a:off x="8034528" y="1783080"/>
+            <a:ext cx="3514344" cy="1051560"/>
+          </a:xfrm>
+          <a:prstGeom prst="rect">
+            <a:avLst/>
+          </a:prstGeom>
+          <a:solidFill>
+            <a:srgbClr val="23262C"/>
+          </a:solidFill>
+          <a:ln/>
+        </p:spPr>
+      </p:sp>
+      <p:sp>
+        <p:nvSpPr>
+          <p:cNvPr id="17" name="Text 14"/>
+          <p:cNvSpPr/>
+          <p:nvPr/>
+        </p:nvSpPr>
+        <p:spPr>
+          <a:xfrm>
+            <a:off x="8263128" y="1856232"/>
+            <a:ext cx="3057144" cy="594360"/>
           </a:xfrm>
           <a:prstGeom prst="rect">
             <a:avLst/>
@@ -3316,11 +3523,50 @@
           <a:bodyPr wrap="square" lIns="0" tIns="0" rIns="0" bIns="0" rtlCol="0" anchor="ctr"/>
           <a:lstStyle/>
           <a:p>
-            <a:pPr algn="l" indent="0" marL="0">
-              <a:buNone/>
-            </a:pPr>
-            <a:r>
-              <a:rPr lang="en-US" sz="1100" b="1" dirty="0">
+            <a:pPr indent="0" marL="0">
+              <a:buNone/>
+            </a:pPr>
+            <a:r>
+              <a:rPr lang="en-US" sz="3400" b="1" dirty="0">
+                <a:solidFill>
+                  <a:srgbClr val="F4F0E8"/>
+                </a:solidFill>
+                <a:latin typeface="Georgia" pitchFamily="34" charset="0"/>
+                <a:ea typeface="Georgia" pitchFamily="34" charset="-122"/>
+                <a:cs typeface="Georgia" pitchFamily="34" charset="-120"/>
+              </a:rPr>
+              <a:t>7</a:t>
+            </a:r>
+            <a:endParaRPr lang="en-US" sz="3400" dirty="0"/>
+          </a:p>
+        </p:txBody>
+      </p:sp>
+      <p:sp>
+        <p:nvSpPr>
+          <p:cNvPr id="18" name="Text 15"/>
+          <p:cNvSpPr/>
+          <p:nvPr/>
+        </p:nvSpPr>
+        <p:spPr>
+          <a:xfrm>
+            <a:off x="8263128" y="2459736"/>
+            <a:ext cx="3057144" cy="274320"/>
+          </a:xfrm>
+          <a:prstGeom prst="rect">
+            <a:avLst/>
+          </a:prstGeom>
+          <a:noFill/>
+          <a:ln/>
+        </p:spPr>
+        <p:txBody>
+          <a:bodyPr wrap="square" lIns="0" tIns="0" rIns="0" bIns="0" rtlCol="0" anchor="ctr"/>
+          <a:lstStyle/>
+          <a:p>
+            <a:pPr indent="0" marL="0">
+              <a:buNone/>
+            </a:pPr>
+            <a:r>
+              <a:rPr lang="en-US" sz="1200" dirty="0">
                 <a:solidFill>
                   <a:srgbClr val="B9BFC9"/>
                 </a:solidFill>
@@ -3328,22 +3574,38 @@
                 <a:ea typeface="Arial" pitchFamily="34" charset="-122"/>
                 <a:cs typeface="Arial" pitchFamily="34" charset="-120"/>
               </a:rPr>
-              <a:t>Next focus</a:t>
-            </a:r>
-            <a:endParaRPr lang="en-US" sz="1100" dirty="0"/>
-          </a:p>
-        </p:txBody>
-      </p:sp>
-      <p:sp>
-        <p:nvSpPr>
-          <p:cNvPr id="14" name="Text 11"/>
-          <p:cNvSpPr/>
-          <p:nvPr/>
-        </p:nvSpPr>
-        <p:spPr>
-          <a:xfrm>
-            <a:off x="9262872" y="1783080"/>
-            <a:ext cx="2103120" cy="457200"/>
+              <a:t>Code reviews completed</a:t>
+            </a:r>
+            <a:endParaRPr lang="en-US" sz="1200" dirty="0"/>
+          </a:p>
+        </p:txBody>
+      </p:sp>
+      <p:graphicFrame>
+        <p:nvGraphicFramePr>
+          <p:cNvPr id="19" name="Chart 0" descr=""/>
+          <p:cNvGraphicFramePr/>
+          <p:nvPr/>
+        </p:nvGraphicFramePr>
+        <p:xfrm>
+          <a:off x="640080" y="3017520"/>
+          <a:ext cx="10908792" cy="2880360"/>
+        </p:xfrm>
+        <a:graphic xmlns:a="http://schemas.openxmlformats.org/drawingml/2006/main">
+          <a:graphicData uri="http://schemas.openxmlformats.org/drawingml/2006/chart">
+            <c:chart xmlns:c="http://schemas.openxmlformats.org/drawingml/2006/chart" r:id="rId2"/>
+          </a:graphicData>
+        </a:graphic>
+      </p:graphicFrame>
+      <p:sp>
+        <p:nvSpPr>
+          <p:cNvPr id="20" name="Text 16"/>
+          <p:cNvSpPr/>
+          <p:nvPr/>
+        </p:nvSpPr>
+        <p:spPr>
+          <a:xfrm>
+            <a:off x="640080" y="5943600"/>
+            <a:ext cx="10908792" cy="274320"/>
           </a:xfrm>
           <a:prstGeom prst="rect">
             <a:avLst/>
@@ -3355,809 +3617,19 @@
           <a:bodyPr wrap="square" lIns="0" tIns="0" rIns="0" bIns="0" rtlCol="0" anchor="ctr"/>
           <a:lstStyle/>
           <a:p>
-            <a:pPr algn="r" indent="0" marL="0">
-              <a:buNone/>
-            </a:pPr>
-            <a:r>
-              <a:rPr lang="en-US" sz="1100" b="1" dirty="0">
-                <a:solidFill>
-                  <a:srgbClr val="B9BFC9"/>
+            <a:pPr indent="0" marL="0">
+              <a:buNone/>
+            </a:pPr>
+            <a:r>
+              <a:rPr lang="en-US" sz="1100" i="1" dirty="0">
+                <a:solidFill>
+                  <a:srgbClr val="929AA8"/>
                 </a:solidFill>
                 <a:latin typeface="Arial" pitchFamily="34" charset="0"/>
                 <a:ea typeface="Arial" pitchFamily="34" charset="-122"/>
                 <a:cs typeface="Arial" pitchFamily="34" charset="-120"/>
               </a:rPr>
-              <a:t>Status</a:t>
-            </a:r>
-            <a:endParaRPr lang="en-US" sz="1100" dirty="0"/>
-          </a:p>
-        </p:txBody>
-      </p:sp>
-      <p:sp>
-        <p:nvSpPr>
-          <p:cNvPr id="15" name="Shape 12"/>
-          <p:cNvSpPr/>
-          <p:nvPr/>
-        </p:nvSpPr>
-        <p:spPr>
-          <a:xfrm>
-            <a:off x="640080" y="2240280"/>
-            <a:ext cx="10908792" cy="914400"/>
-          </a:xfrm>
-          <a:prstGeom prst="rect">
-            <a:avLst/>
-          </a:prstGeom>
-          <a:solidFill>
-            <a:srgbClr val="23262C"/>
-          </a:solidFill>
-          <a:ln/>
-        </p:spPr>
-      </p:sp>
-      <p:sp>
-        <p:nvSpPr>
-          <p:cNvPr id="16" name="Text 13"/>
-          <p:cNvSpPr/>
-          <p:nvPr/>
-        </p:nvSpPr>
-        <p:spPr>
-          <a:xfrm>
-            <a:off x="822960" y="2240280"/>
-            <a:ext cx="2331720" cy="914400"/>
-          </a:xfrm>
-          <a:prstGeom prst="rect">
-            <a:avLst/>
-          </a:prstGeom>
-          <a:noFill/>
-          <a:ln/>
-        </p:spPr>
-        <p:txBody>
-          <a:bodyPr wrap="square" lIns="0" tIns="0" rIns="0" bIns="0" rtlCol="0" anchor="ctr"/>
-          <a:lstStyle/>
-          <a:p>
-            <a:pPr indent="0" marL="0">
-              <a:buNone/>
-            </a:pPr>
-            <a:r>
-              <a:rPr lang="en-US" sz="1300" b="1" dirty="0">
-                <a:solidFill>
-                  <a:srgbClr val="5CC8D7"/>
-                </a:solidFill>
-                <a:latin typeface="Georgia" pitchFamily="34" charset="0"/>
-                <a:ea typeface="Georgia" pitchFamily="34" charset="-122"/>
-                <a:cs typeface="Georgia" pitchFamily="34" charset="-120"/>
-              </a:rPr>
-              <a:t>ClinicBook · Patient App</a:t>
-            </a:r>
-            <a:endParaRPr lang="en-US" sz="1300" dirty="0"/>
-          </a:p>
-        </p:txBody>
-      </p:sp>
-      <p:sp>
-        <p:nvSpPr>
-          <p:cNvPr id="17" name="Text 14"/>
-          <p:cNvSpPr/>
-          <p:nvPr/>
-        </p:nvSpPr>
-        <p:spPr>
-          <a:xfrm>
-            <a:off x="3566160" y="2240280"/>
-            <a:ext cx="1325880" cy="914400"/>
-          </a:xfrm>
-          <a:prstGeom prst="rect">
-            <a:avLst/>
-          </a:prstGeom>
-          <a:noFill/>
-          <a:ln/>
-        </p:spPr>
-        <p:txBody>
-          <a:bodyPr wrap="square" lIns="0" tIns="0" rIns="0" bIns="0" rtlCol="0" anchor="ctr"/>
-          <a:lstStyle/>
-          <a:p>
-            <a:pPr indent="0" marL="0">
-              <a:buNone/>
-            </a:pPr>
-            <a:r>
-              <a:rPr lang="en-US" sz="1150" dirty="0">
-                <a:solidFill>
-                  <a:srgbClr val="B9BFC9"/>
-                </a:solidFill>
-                <a:latin typeface="Arial" pitchFamily="34" charset="0"/>
-                <a:ea typeface="Arial" pitchFamily="34" charset="-122"/>
-                <a:cs typeface="Arial" pitchFamily="34" charset="-120"/>
-              </a:rPr>
-              <a:t>Leo Park @Leo</a:t>
-            </a:r>
-            <a:endParaRPr lang="en-US" sz="1150" dirty="0"/>
-          </a:p>
-        </p:txBody>
-      </p:sp>
-      <p:sp>
-        <p:nvSpPr>
-          <p:cNvPr id="18" name="Text 15"/>
-          <p:cNvSpPr/>
-          <p:nvPr/>
-        </p:nvSpPr>
-        <p:spPr>
-          <a:xfrm>
-            <a:off x="5303520" y="2240280"/>
-            <a:ext cx="3502152" cy="914400"/>
-          </a:xfrm>
-          <a:prstGeom prst="rect">
-            <a:avLst/>
-          </a:prstGeom>
-          <a:noFill/>
-          <a:ln/>
-        </p:spPr>
-        <p:txBody>
-          <a:bodyPr wrap="square" lIns="0" tIns="0" rIns="0" bIns="0" rtlCol="0" anchor="ctr"/>
-          <a:lstStyle/>
-          <a:p>
-            <a:pPr indent="0" marL="0">
-              <a:buNone/>
-            </a:pPr>
-            <a:r>
-              <a:rPr lang="en-US" sz="1150" dirty="0">
-                <a:solidFill>
-                  <a:srgbClr val="F4F0E8"/>
-                </a:solidFill>
-                <a:latin typeface="Arial" pitchFamily="34" charset="0"/>
-                <a:ea typeface="Arial" pitchFamily="34" charset="-122"/>
-                <a:cs typeface="Arial" pitchFamily="34" charset="-120"/>
-              </a:rPr>
-              <a:t>Finish the booking calendar, then start payments and receipts.</a:t>
-            </a:r>
-            <a:endParaRPr lang="en-US" sz="1150" dirty="0"/>
-          </a:p>
-        </p:txBody>
-      </p:sp>
-      <p:sp>
-        <p:nvSpPr>
-          <p:cNvPr id="19" name="Shape 16"/>
-          <p:cNvSpPr/>
-          <p:nvPr/>
-        </p:nvSpPr>
-        <p:spPr>
-          <a:xfrm>
-            <a:off x="10447934" y="2560320"/>
-            <a:ext cx="918058" cy="274320"/>
-          </a:xfrm>
-          <a:prstGeom prst="rect">
-            <a:avLst/>
-          </a:prstGeom>
-          <a:ln w="12700">
-            <a:solidFill>
-              <a:srgbClr val="5CC8D7"/>
-            </a:solidFill>
-            <a:prstDash val="solid"/>
-          </a:ln>
-        </p:spPr>
-      </p:sp>
-      <p:sp>
-        <p:nvSpPr>
-          <p:cNvPr id="20" name="Text 17"/>
-          <p:cNvSpPr/>
-          <p:nvPr/>
-        </p:nvSpPr>
-        <p:spPr>
-          <a:xfrm>
-            <a:off x="10447934" y="2560320"/>
-            <a:ext cx="918058" cy="274320"/>
-          </a:xfrm>
-          <a:prstGeom prst="rect">
-            <a:avLst/>
-          </a:prstGeom>
-          <a:noFill/>
-          <a:ln/>
-        </p:spPr>
-        <p:txBody>
-          <a:bodyPr wrap="square" lIns="0" tIns="0" rIns="0" bIns="0" rtlCol="0" anchor="ctr"/>
-          <a:lstStyle/>
-          <a:p>
-            <a:pPr algn="ctr" indent="0" marL="0">
-              <a:buNone/>
-            </a:pPr>
-            <a:r>
-              <a:rPr lang="en-US" sz="1100" b="1" dirty="0">
-                <a:solidFill>
-                  <a:srgbClr val="5CC8D7"/>
-                </a:solidFill>
-                <a:latin typeface="Arial" pitchFamily="34" charset="0"/>
-                <a:ea typeface="Arial" pitchFamily="34" charset="-122"/>
-                <a:cs typeface="Arial" pitchFamily="34" charset="-120"/>
-              </a:rPr>
-              <a:t>P3 · 40%</a:t>
-            </a:r>
-            <a:endParaRPr lang="en-US" sz="1100" dirty="0"/>
-          </a:p>
-        </p:txBody>
-      </p:sp>
-      <p:sp>
-        <p:nvSpPr>
-          <p:cNvPr id="21" name="Shape 18"/>
-          <p:cNvSpPr/>
-          <p:nvPr/>
-        </p:nvSpPr>
-        <p:spPr>
-          <a:xfrm>
-            <a:off x="640080" y="3154680"/>
-            <a:ext cx="10908792" cy="914400"/>
-          </a:xfrm>
-          <a:prstGeom prst="rect">
-            <a:avLst/>
-          </a:prstGeom>
-          <a:solidFill>
-            <a:srgbClr val="12161C"/>
-          </a:solidFill>
-          <a:ln/>
-        </p:spPr>
-      </p:sp>
-      <p:sp>
-        <p:nvSpPr>
-          <p:cNvPr id="22" name="Text 19"/>
-          <p:cNvSpPr/>
-          <p:nvPr/>
-        </p:nvSpPr>
-        <p:spPr>
-          <a:xfrm>
-            <a:off x="822960" y="3154680"/>
-            <a:ext cx="2331720" cy="914400"/>
-          </a:xfrm>
-          <a:prstGeom prst="rect">
-            <a:avLst/>
-          </a:prstGeom>
-          <a:noFill/>
-          <a:ln/>
-        </p:spPr>
-        <p:txBody>
-          <a:bodyPr wrap="square" lIns="0" tIns="0" rIns="0" bIns="0" rtlCol="0" anchor="ctr"/>
-          <a:lstStyle/>
-          <a:p>
-            <a:pPr indent="0" marL="0">
-              <a:buNone/>
-            </a:pPr>
-            <a:r>
-              <a:rPr lang="en-US" sz="1300" b="1" dirty="0">
-                <a:solidFill>
-                  <a:srgbClr val="5CC8D7"/>
-                </a:solidFill>
-                <a:latin typeface="Georgia" pitchFamily="34" charset="0"/>
-                <a:ea typeface="Georgia" pitchFamily="34" charset="-122"/>
-                <a:cs typeface="Georgia" pitchFamily="34" charset="-120"/>
-              </a:rPr>
-              <a:t>ClinicBook · Clinic Dashboard</a:t>
-            </a:r>
-            <a:endParaRPr lang="en-US" sz="1300" dirty="0"/>
-          </a:p>
-        </p:txBody>
-      </p:sp>
-      <p:sp>
-        <p:nvSpPr>
-          <p:cNvPr id="23" name="Text 20"/>
-          <p:cNvSpPr/>
-          <p:nvPr/>
-        </p:nvSpPr>
-        <p:spPr>
-          <a:xfrm>
-            <a:off x="3566160" y="3154680"/>
-            <a:ext cx="1325880" cy="914400"/>
-          </a:xfrm>
-          <a:prstGeom prst="rect">
-            <a:avLst/>
-          </a:prstGeom>
-          <a:noFill/>
-          <a:ln/>
-        </p:spPr>
-        <p:txBody>
-          <a:bodyPr wrap="square" lIns="0" tIns="0" rIns="0" bIns="0" rtlCol="0" anchor="ctr"/>
-          <a:lstStyle/>
-          <a:p>
-            <a:pPr indent="0" marL="0">
-              <a:buNone/>
-            </a:pPr>
-            <a:r>
-              <a:rPr lang="en-US" sz="1150" dirty="0">
-                <a:solidFill>
-                  <a:srgbClr val="B9BFC9"/>
-                </a:solidFill>
-                <a:latin typeface="Arial" pitchFamily="34" charset="0"/>
-                <a:ea typeface="Arial" pitchFamily="34" charset="-122"/>
-                <a:cs typeface="Arial" pitchFamily="34" charset="-120"/>
-              </a:rPr>
-              <a:t>Nina Rao @Nina</a:t>
-            </a:r>
-            <a:endParaRPr lang="en-US" sz="1150" dirty="0"/>
-          </a:p>
-        </p:txBody>
-      </p:sp>
-      <p:sp>
-        <p:nvSpPr>
-          <p:cNvPr id="24" name="Text 21"/>
-          <p:cNvSpPr/>
-          <p:nvPr/>
-        </p:nvSpPr>
-        <p:spPr>
-          <a:xfrm>
-            <a:off x="5303520" y="3154680"/>
-            <a:ext cx="3502152" cy="914400"/>
-          </a:xfrm>
-          <a:prstGeom prst="rect">
-            <a:avLst/>
-          </a:prstGeom>
-          <a:noFill/>
-          <a:ln/>
-        </p:spPr>
-        <p:txBody>
-          <a:bodyPr wrap="square" lIns="0" tIns="0" rIns="0" bIns="0" rtlCol="0" anchor="ctr"/>
-          <a:lstStyle/>
-          <a:p>
-            <a:pPr indent="0" marL="0">
-              <a:buNone/>
-            </a:pPr>
-            <a:r>
-              <a:rPr lang="en-US" sz="1150" dirty="0">
-                <a:solidFill>
-                  <a:srgbClr val="F4F0E8"/>
-                </a:solidFill>
-                <a:latin typeface="Arial" pitchFamily="34" charset="0"/>
-                <a:ea typeface="Arial" pitchFamily="34" charset="-122"/>
-                <a:cs typeface="Arial" pitchFamily="34" charset="-120"/>
-              </a:rPr>
-              <a:t>Apply the duplicate-reminder fix and release reminders; start reports and exports.</a:t>
-            </a:r>
-            <a:endParaRPr lang="en-US" sz="1150" dirty="0"/>
-          </a:p>
-        </p:txBody>
-      </p:sp>
-      <p:sp>
-        <p:nvSpPr>
-          <p:cNvPr id="25" name="Shape 22"/>
-          <p:cNvSpPr/>
-          <p:nvPr/>
-        </p:nvSpPr>
-        <p:spPr>
-          <a:xfrm>
-            <a:off x="10447934" y="3474720"/>
-            <a:ext cx="918058" cy="274320"/>
-          </a:xfrm>
-          <a:prstGeom prst="rect">
-            <a:avLst/>
-          </a:prstGeom>
-          <a:ln w="12700">
-            <a:solidFill>
-              <a:srgbClr val="5CC8D7"/>
-            </a:solidFill>
-            <a:prstDash val="solid"/>
-          </a:ln>
-        </p:spPr>
-      </p:sp>
-      <p:sp>
-        <p:nvSpPr>
-          <p:cNvPr id="26" name="Text 23"/>
-          <p:cNvSpPr/>
-          <p:nvPr/>
-        </p:nvSpPr>
-        <p:spPr>
-          <a:xfrm>
-            <a:off x="10447934" y="3474720"/>
-            <a:ext cx="918058" cy="274320"/>
-          </a:xfrm>
-          <a:prstGeom prst="rect">
-            <a:avLst/>
-          </a:prstGeom>
-          <a:noFill/>
-          <a:ln/>
-        </p:spPr>
-        <p:txBody>
-          <a:bodyPr wrap="square" lIns="0" tIns="0" rIns="0" bIns="0" rtlCol="0" anchor="ctr"/>
-          <a:lstStyle/>
-          <a:p>
-            <a:pPr algn="ctr" indent="0" marL="0">
-              <a:buNone/>
-            </a:pPr>
-            <a:r>
-              <a:rPr lang="en-US" sz="1100" b="1" dirty="0">
-                <a:solidFill>
-                  <a:srgbClr val="5CC8D7"/>
-                </a:solidFill>
-                <a:latin typeface="Arial" pitchFamily="34" charset="0"/>
-                <a:ea typeface="Arial" pitchFamily="34" charset="-122"/>
-                <a:cs typeface="Arial" pitchFamily="34" charset="-120"/>
-              </a:rPr>
-              <a:t>P4 · 80%</a:t>
-            </a:r>
-            <a:endParaRPr lang="en-US" sz="1100" dirty="0"/>
-          </a:p>
-        </p:txBody>
-      </p:sp>
-      <p:sp>
-        <p:nvSpPr>
-          <p:cNvPr id="27" name="Shape 24"/>
-          <p:cNvSpPr/>
-          <p:nvPr/>
-        </p:nvSpPr>
-        <p:spPr>
-          <a:xfrm>
-            <a:off x="640080" y="4069080"/>
-            <a:ext cx="10908792" cy="914400"/>
-          </a:xfrm>
-          <a:prstGeom prst="rect">
-            <a:avLst/>
-          </a:prstGeom>
-          <a:solidFill>
-            <a:srgbClr val="23262C"/>
-          </a:solidFill>
-          <a:ln/>
-        </p:spPr>
-      </p:sp>
-      <p:sp>
-        <p:nvSpPr>
-          <p:cNvPr id="28" name="Text 25"/>
-          <p:cNvSpPr/>
-          <p:nvPr/>
-        </p:nvSpPr>
-        <p:spPr>
-          <a:xfrm>
-            <a:off x="822960" y="4069080"/>
-            <a:ext cx="2331720" cy="914400"/>
-          </a:xfrm>
-          <a:prstGeom prst="rect">
-            <a:avLst/>
-          </a:prstGeom>
-          <a:noFill/>
-          <a:ln/>
-        </p:spPr>
-        <p:txBody>
-          <a:bodyPr wrap="square" lIns="0" tIns="0" rIns="0" bIns="0" rtlCol="0" anchor="ctr"/>
-          <a:lstStyle/>
-          <a:p>
-            <a:pPr indent="0" marL="0">
-              <a:buNone/>
-            </a:pPr>
-            <a:r>
-              <a:rPr lang="en-US" sz="1300" b="1" dirty="0">
-                <a:solidFill>
-                  <a:srgbClr val="A99BFF"/>
-                </a:solidFill>
-                <a:latin typeface="Georgia" pitchFamily="34" charset="0"/>
-                <a:ea typeface="Georgia" pitchFamily="34" charset="-122"/>
-                <a:cs typeface="Georgia" pitchFamily="34" charset="-120"/>
-              </a:rPr>
-              <a:t>PulseBoard · Usage Tracking</a:t>
-            </a:r>
-            <a:endParaRPr lang="en-US" sz="1300" dirty="0"/>
-          </a:p>
-        </p:txBody>
-      </p:sp>
-      <p:sp>
-        <p:nvSpPr>
-          <p:cNvPr id="29" name="Text 26"/>
-          <p:cNvSpPr/>
-          <p:nvPr/>
-        </p:nvSpPr>
-        <p:spPr>
-          <a:xfrm>
-            <a:off x="3566160" y="4069080"/>
-            <a:ext cx="1325880" cy="914400"/>
-          </a:xfrm>
-          <a:prstGeom prst="rect">
-            <a:avLst/>
-          </a:prstGeom>
-          <a:noFill/>
-          <a:ln/>
-        </p:spPr>
-        <p:txBody>
-          <a:bodyPr wrap="square" lIns="0" tIns="0" rIns="0" bIns="0" rtlCol="0" anchor="ctr"/>
-          <a:lstStyle/>
-          <a:p>
-            <a:pPr indent="0" marL="0">
-              <a:buNone/>
-            </a:pPr>
-            <a:r>
-              <a:rPr lang="en-US" sz="1150" dirty="0">
-                <a:solidFill>
-                  <a:srgbClr val="B9BFC9"/>
-                </a:solidFill>
-                <a:latin typeface="Arial" pitchFamily="34" charset="0"/>
-                <a:ea typeface="Arial" pitchFamily="34" charset="-122"/>
-                <a:cs typeface="Arial" pitchFamily="34" charset="-120"/>
-              </a:rPr>
-              <a:t>Maya Lin @Maya</a:t>
-            </a:r>
-            <a:endParaRPr lang="en-US" sz="1150" dirty="0"/>
-          </a:p>
-        </p:txBody>
-      </p:sp>
-      <p:sp>
-        <p:nvSpPr>
-          <p:cNvPr id="30" name="Text 27"/>
-          <p:cNvSpPr/>
-          <p:nvPr/>
-        </p:nvSpPr>
-        <p:spPr>
-          <a:xfrm>
-            <a:off x="5303520" y="4069080"/>
-            <a:ext cx="3502152" cy="914400"/>
-          </a:xfrm>
-          <a:prstGeom prst="rect">
-            <a:avLst/>
-          </a:prstGeom>
-          <a:noFill/>
-          <a:ln/>
-        </p:spPr>
-        <p:txBody>
-          <a:bodyPr wrap="square" lIns="0" tIns="0" rIns="0" bIns="0" rtlCol="0" anchor="ctr"/>
-          <a:lstStyle/>
-          <a:p>
-            <a:pPr indent="0" marL="0">
-              <a:buNone/>
-            </a:pPr>
-            <a:r>
-              <a:rPr lang="en-US" sz="1150" dirty="0">
-                <a:solidFill>
-                  <a:srgbClr val="F4F0E8"/>
-                </a:solidFill>
-                <a:latin typeface="Arial" pitchFamily="34" charset="0"/>
-                <a:ea typeface="Arial" pitchFamily="34" charset="-122"/>
-                <a:cs typeface="Arial" pitchFamily="34" charset="-120"/>
-              </a:rPr>
-              <a:t>Finish adding usage tracking to the web app, then open the first dashboard to managers.</a:t>
-            </a:r>
-            <a:endParaRPr lang="en-US" sz="1150" dirty="0"/>
-          </a:p>
-        </p:txBody>
-      </p:sp>
-      <p:sp>
-        <p:nvSpPr>
-          <p:cNvPr id="31" name="Shape 28"/>
-          <p:cNvSpPr/>
-          <p:nvPr/>
-        </p:nvSpPr>
-        <p:spPr>
-          <a:xfrm>
-            <a:off x="10206533" y="4389120"/>
-            <a:ext cx="1159459" cy="274320"/>
-          </a:xfrm>
-          <a:prstGeom prst="rect">
-            <a:avLst/>
-          </a:prstGeom>
-          <a:ln w="12700">
-            <a:solidFill>
-              <a:srgbClr val="A99BFF"/>
-            </a:solidFill>
-            <a:prstDash val="solid"/>
-          </a:ln>
-        </p:spPr>
-      </p:sp>
-      <p:sp>
-        <p:nvSpPr>
-          <p:cNvPr id="32" name="Text 29"/>
-          <p:cNvSpPr/>
-          <p:nvPr/>
-        </p:nvSpPr>
-        <p:spPr>
-          <a:xfrm>
-            <a:off x="10206533" y="4389120"/>
-            <a:ext cx="1159459" cy="274320"/>
-          </a:xfrm>
-          <a:prstGeom prst="rect">
-            <a:avLst/>
-          </a:prstGeom>
-          <a:noFill/>
-          <a:ln/>
-        </p:spPr>
-        <p:txBody>
-          <a:bodyPr wrap="square" lIns="0" tIns="0" rIns="0" bIns="0" rtlCol="0" anchor="ctr"/>
-          <a:lstStyle/>
-          <a:p>
-            <a:pPr algn="ctr" indent="0" marL="0">
-              <a:buNone/>
-            </a:pPr>
-            <a:r>
-              <a:rPr lang="en-US" sz="1100" b="1" dirty="0">
-                <a:solidFill>
-                  <a:srgbClr val="A99BFF"/>
-                </a:solidFill>
-                <a:latin typeface="Arial" pitchFamily="34" charset="0"/>
-                <a:ea typeface="Arial" pitchFamily="34" charset="-122"/>
-                <a:cs typeface="Arial" pitchFamily="34" charset="-120"/>
-              </a:rPr>
-              <a:t>In progress</a:t>
-            </a:r>
-            <a:endParaRPr lang="en-US" sz="1100" dirty="0"/>
-          </a:p>
-        </p:txBody>
-      </p:sp>
-      <p:sp>
-        <p:nvSpPr>
-          <p:cNvPr id="33" name="Shape 30"/>
-          <p:cNvSpPr/>
-          <p:nvPr/>
-        </p:nvSpPr>
-        <p:spPr>
-          <a:xfrm>
-            <a:off x="640080" y="4983480"/>
-            <a:ext cx="10908792" cy="914400"/>
-          </a:xfrm>
-          <a:prstGeom prst="rect">
-            <a:avLst/>
-          </a:prstGeom>
-          <a:solidFill>
-            <a:srgbClr val="12161C"/>
-          </a:solidFill>
-          <a:ln/>
-        </p:spPr>
-      </p:sp>
-      <p:sp>
-        <p:nvSpPr>
-          <p:cNvPr id="34" name="Text 31"/>
-          <p:cNvSpPr/>
-          <p:nvPr/>
-        </p:nvSpPr>
-        <p:spPr>
-          <a:xfrm>
-            <a:off x="822960" y="4983480"/>
-            <a:ext cx="2331720" cy="914400"/>
-          </a:xfrm>
-          <a:prstGeom prst="rect">
-            <a:avLst/>
-          </a:prstGeom>
-          <a:noFill/>
-          <a:ln/>
-        </p:spPr>
-        <p:txBody>
-          <a:bodyPr wrap="square" lIns="0" tIns="0" rIns="0" bIns="0" rtlCol="0" anchor="ctr"/>
-          <a:lstStyle/>
-          <a:p>
-            <a:pPr indent="0" marL="0">
-              <a:buNone/>
-            </a:pPr>
-            <a:r>
-              <a:rPr lang="en-US" sz="1300" b="1" dirty="0">
-                <a:solidFill>
-                  <a:srgbClr val="F2B134"/>
-                </a:solidFill>
-                <a:latin typeface="Georgia" pitchFamily="34" charset="0"/>
-                <a:ea typeface="Georgia" pitchFamily="34" charset="-122"/>
-                <a:cs typeface="Georgia" pitchFamily="34" charset="-120"/>
-              </a:rPr>
-              <a:t>App Store Release</a:t>
-            </a:r>
-            <a:endParaRPr lang="en-US" sz="1300" dirty="0"/>
-          </a:p>
-        </p:txBody>
-      </p:sp>
-      <p:sp>
-        <p:nvSpPr>
-          <p:cNvPr id="35" name="Text 32"/>
-          <p:cNvSpPr/>
-          <p:nvPr/>
-        </p:nvSpPr>
-        <p:spPr>
-          <a:xfrm>
-            <a:off x="3566160" y="4983480"/>
-            <a:ext cx="1325880" cy="914400"/>
-          </a:xfrm>
-          <a:prstGeom prst="rect">
-            <a:avLst/>
-          </a:prstGeom>
-          <a:noFill/>
-          <a:ln/>
-        </p:spPr>
-        <p:txBody>
-          <a:bodyPr wrap="square" lIns="0" tIns="0" rIns="0" bIns="0" rtlCol="0" anchor="ctr"/>
-          <a:lstStyle/>
-          <a:p>
-            <a:pPr indent="0" marL="0">
-              <a:buNone/>
-            </a:pPr>
-            <a:r>
-              <a:rPr lang="en-US" sz="1150" dirty="0">
-                <a:solidFill>
-                  <a:srgbClr val="B9BFC9"/>
-                </a:solidFill>
-                <a:latin typeface="Arial" pitchFamily="34" charset="0"/>
-                <a:ea typeface="Arial" pitchFamily="34" charset="-122"/>
-                <a:cs typeface="Arial" pitchFamily="34" charset="-120"/>
-              </a:rPr>
-              <a:t>Maya Lin @Maya</a:t>
-            </a:r>
-            <a:endParaRPr lang="en-US" sz="1150" dirty="0"/>
-          </a:p>
-        </p:txBody>
-      </p:sp>
-      <p:sp>
-        <p:nvSpPr>
-          <p:cNvPr id="36" name="Text 33"/>
-          <p:cNvSpPr/>
-          <p:nvPr/>
-        </p:nvSpPr>
-        <p:spPr>
-          <a:xfrm>
-            <a:off x="5303520" y="4983480"/>
-            <a:ext cx="3502152" cy="914400"/>
-          </a:xfrm>
-          <a:prstGeom prst="rect">
-            <a:avLst/>
-          </a:prstGeom>
-          <a:noFill/>
-          <a:ln/>
-        </p:spPr>
-        <p:txBody>
-          <a:bodyPr wrap="square" lIns="0" tIns="0" rIns="0" bIns="0" rtlCol="0" anchor="ctr"/>
-          <a:lstStyle/>
-          <a:p>
-            <a:pPr indent="0" marL="0">
-              <a:buNone/>
-            </a:pPr>
-            <a:r>
-              <a:rPr lang="en-US" sz="1150" dirty="0">
-                <a:solidFill>
-                  <a:srgbClr val="F4F0E8"/>
-                </a:solidFill>
-                <a:latin typeface="Arial" pitchFamily="34" charset="0"/>
-                <a:ea typeface="Arial" pitchFamily="34" charset="-122"/>
-                <a:cs typeface="Arial" pitchFamily="34" charset="-120"/>
-              </a:rPr>
-              <a:t>Invite the first 20 clinic staff to TestFlight.</a:t>
-            </a:r>
-            <a:endParaRPr lang="en-US" sz="1150" dirty="0"/>
-          </a:p>
-        </p:txBody>
-      </p:sp>
-      <p:sp>
-        <p:nvSpPr>
-          <p:cNvPr id="37" name="Shape 34"/>
-          <p:cNvSpPr/>
-          <p:nvPr/>
-        </p:nvSpPr>
-        <p:spPr>
-          <a:xfrm>
-            <a:off x="10769803" y="5303520"/>
-            <a:ext cx="596189" cy="274320"/>
-          </a:xfrm>
-          <a:prstGeom prst="rect">
-            <a:avLst/>
-          </a:prstGeom>
-          <a:solidFill>
-            <a:srgbClr val="F2B134"/>
-          </a:solidFill>
-          <a:ln/>
-        </p:spPr>
-      </p:sp>
-      <p:sp>
-        <p:nvSpPr>
-          <p:cNvPr id="38" name="Text 35"/>
-          <p:cNvSpPr/>
-          <p:nvPr/>
-        </p:nvSpPr>
-        <p:spPr>
-          <a:xfrm>
-            <a:off x="10769803" y="5303520"/>
-            <a:ext cx="596189" cy="274320"/>
-          </a:xfrm>
-          <a:prstGeom prst="rect">
-            <a:avLst/>
-          </a:prstGeom>
-          <a:noFill/>
-          <a:ln/>
-        </p:spPr>
-        <p:txBody>
-          <a:bodyPr wrap="square" lIns="0" tIns="0" rIns="0" bIns="0" rtlCol="0" anchor="ctr"/>
-          <a:lstStyle/>
-          <a:p>
-            <a:pPr algn="ctr" indent="0" marL="0">
-              <a:buNone/>
-            </a:pPr>
-            <a:r>
-              <a:rPr lang="en-US" sz="1100" b="1" dirty="0">
-                <a:solidFill>
-                  <a:srgbClr val="12161C"/>
-                </a:solidFill>
-                <a:latin typeface="Arial" pitchFamily="34" charset="0"/>
-                <a:ea typeface="Arial" pitchFamily="34" charset="-122"/>
-                <a:cs typeface="Arial" pitchFamily="34" charset="-120"/>
-              </a:rPr>
-              <a:t>Done</a:t>
+              <a:t>Source: GitHub activity this week.</a:t>
             </a:r>
             <a:endParaRPr lang="en-US" sz="1100" dirty="0"/>
           </a:p>
@@ -4203,6 +3675,1279 @@
         </p:nvSpPr>
         <p:spPr>
           <a:xfrm>
+            <a:off x="0" y="0"/>
+            <a:ext cx="12191695" cy="1481328"/>
+          </a:xfrm>
+          <a:prstGeom prst="rect">
+            <a:avLst/>
+          </a:prstGeom>
+          <a:solidFill>
+            <a:srgbClr val="23262C"/>
+          </a:solidFill>
+          <a:ln/>
+        </p:spPr>
+      </p:sp>
+      <p:sp>
+        <p:nvSpPr>
+          <p:cNvPr id="3" name="Shape 1"/>
+          <p:cNvSpPr/>
+          <p:nvPr/>
+        </p:nvSpPr>
+        <p:spPr>
+          <a:xfrm>
+            <a:off x="0" y="1481328"/>
+            <a:ext cx="12191695" cy="36576"/>
+          </a:xfrm>
+          <a:prstGeom prst="rect">
+            <a:avLst/>
+          </a:prstGeom>
+          <a:solidFill>
+            <a:srgbClr val="F2B134"/>
+          </a:solidFill>
+          <a:ln/>
+        </p:spPr>
+      </p:sp>
+      <p:sp>
+        <p:nvSpPr>
+          <p:cNvPr id="4" name="Text 2"/>
+          <p:cNvSpPr/>
+          <p:nvPr/>
+        </p:nvSpPr>
+        <p:spPr>
+          <a:xfrm>
+            <a:off x="640080" y="365760"/>
+            <a:ext cx="8686800" cy="274320"/>
+          </a:xfrm>
+          <a:prstGeom prst="rect">
+            <a:avLst/>
+          </a:prstGeom>
+          <a:noFill/>
+          <a:ln/>
+        </p:spPr>
+        <p:txBody>
+          <a:bodyPr wrap="square" lIns="0" tIns="0" rIns="0" bIns="0" rtlCol="0" anchor="ctr"/>
+          <a:lstStyle/>
+          <a:p>
+            <a:pPr indent="0" marL="0">
+              <a:buNone/>
+            </a:pPr>
+            <a:r>
+              <a:rPr lang="en-US" sz="1200" b="1" dirty="0">
+                <a:solidFill>
+                  <a:srgbClr val="F2B134"/>
+                </a:solidFill>
+                <a:latin typeface="Arial" pitchFamily="34" charset="0"/>
+                <a:ea typeface="Arial" pitchFamily="34" charset="-122"/>
+                <a:cs typeface="Arial" pitchFamily="34" charset="-120"/>
+              </a:rPr>
+              <a:t>Looking Ahead</a:t>
+            </a:r>
+            <a:endParaRPr lang="en-US" sz="1200" dirty="0"/>
+          </a:p>
+        </p:txBody>
+      </p:sp>
+      <p:sp>
+        <p:nvSpPr>
+          <p:cNvPr id="5" name="Text 3"/>
+          <p:cNvSpPr/>
+          <p:nvPr/>
+        </p:nvSpPr>
+        <p:spPr>
+          <a:xfrm>
+            <a:off x="10177272" y="274320"/>
+            <a:ext cx="1371600" cy="457200"/>
+          </a:xfrm>
+          <a:prstGeom prst="rect">
+            <a:avLst/>
+          </a:prstGeom>
+          <a:noFill/>
+          <a:ln/>
+        </p:spPr>
+        <p:txBody>
+          <a:bodyPr wrap="square" lIns="0" tIns="0" rIns="0" bIns="0" rtlCol="0" anchor="ctr"/>
+          <a:lstStyle/>
+          <a:p>
+            <a:pPr algn="r" indent="0" marL="0">
+              <a:buNone/>
+            </a:pPr>
+            <a:r>
+              <a:rPr lang="en-US" sz="2800" i="1" dirty="0">
+                <a:solidFill>
+                  <a:srgbClr val="929AA8"/>
+                </a:solidFill>
+                <a:latin typeface="Georgia" pitchFamily="34" charset="0"/>
+                <a:ea typeface="Georgia" pitchFamily="34" charset="-122"/>
+                <a:cs typeface="Georgia" pitchFamily="34" charset="-120"/>
+              </a:rPr>
+              <a:t>11</a:t>
+            </a:r>
+            <a:endParaRPr lang="en-US" sz="2800" dirty="0"/>
+          </a:p>
+        </p:txBody>
+      </p:sp>
+      <p:sp>
+        <p:nvSpPr>
+          <p:cNvPr id="6" name="Text 4"/>
+          <p:cNvSpPr/>
+          <p:nvPr/>
+        </p:nvSpPr>
+        <p:spPr>
+          <a:xfrm>
+            <a:off x="640080" y="731520"/>
+            <a:ext cx="10908792" cy="640080"/>
+          </a:xfrm>
+          <a:prstGeom prst="rect">
+            <a:avLst/>
+          </a:prstGeom>
+          <a:noFill/>
+          <a:ln/>
+        </p:spPr>
+        <p:txBody>
+          <a:bodyPr wrap="square" lIns="0" tIns="0" rIns="0" bIns="0" rtlCol="0" anchor="ctr">
+            <a:normAutofit/>
+          </a:bodyPr>
+          <a:lstStyle/>
+          <a:p>
+            <a:pPr indent="0" marL="0">
+              <a:buNone/>
+            </a:pPr>
+            <a:r>
+              <a:rPr lang="en-US" sz="2600" dirty="0">
+                <a:solidFill>
+                  <a:srgbClr val="F4F0E8"/>
+                </a:solidFill>
+                <a:latin typeface="Georgia" pitchFamily="34" charset="0"/>
+                <a:ea typeface="Georgia" pitchFamily="34" charset="-122"/>
+                <a:cs typeface="Georgia" pitchFamily="34" charset="-120"/>
+              </a:rPr>
+              <a:t>Next Week's Plan</a:t>
+            </a:r>
+            <a:endParaRPr lang="en-US" sz="2600" dirty="0"/>
+          </a:p>
+        </p:txBody>
+      </p:sp>
+      <p:sp>
+        <p:nvSpPr>
+          <p:cNvPr id="7" name="Text 5"/>
+          <p:cNvSpPr/>
+          <p:nvPr/>
+        </p:nvSpPr>
+        <p:spPr>
+          <a:xfrm>
+            <a:off x="640080" y="6446520"/>
+            <a:ext cx="6400800" cy="237744"/>
+          </a:xfrm>
+          <a:prstGeom prst="rect">
+            <a:avLst/>
+          </a:prstGeom>
+          <a:noFill/>
+          <a:ln/>
+        </p:spPr>
+        <p:txBody>
+          <a:bodyPr wrap="square" lIns="0" tIns="0" rIns="0" bIns="0" rtlCol="0" anchor="ctr"/>
+          <a:lstStyle/>
+          <a:p>
+            <a:pPr indent="0" marL="0">
+              <a:buNone/>
+            </a:pPr>
+            <a:r>
+              <a:rPr lang="en-US" sz="1100" dirty="0">
+                <a:solidFill>
+                  <a:srgbClr val="929AA8"/>
+                </a:solidFill>
+                <a:latin typeface="Arial" pitchFamily="34" charset="0"/>
+                <a:ea typeface="Arial" pitchFamily="34" charset="-122"/>
+                <a:cs typeface="Arial" pitchFamily="34" charset="-120"/>
+              </a:rPr>
+              <a:t>October 9, 2026</a:t>
+            </a:r>
+            <a:endParaRPr lang="en-US" sz="1100" dirty="0"/>
+          </a:p>
+        </p:txBody>
+      </p:sp>
+      <p:pic>
+        <p:nvPicPr>
+          <p:cNvPr id="8" name="Image 0" descr="/var/folders/lw/rmylcyvd5rjfxk9g1z9rrm8w0000gq/T/showship-deck-EGIwvT/paper_mark.png">    </p:cNvPr>
+          <p:cNvPicPr>
+            <a:picLocks noChangeAspect="1"/>
+          </p:cNvPicPr>
+          <p:nvPr/>
+        </p:nvPicPr>
+        <p:blipFill>
+          <a:blip r:embed="rId1"/>
+          <a:stretch>
+            <a:fillRect/>
+          </a:stretch>
+        </p:blipFill>
+        <p:spPr>
+          <a:xfrm>
+            <a:off x="9710928" y="6464808"/>
+            <a:ext cx="201168" cy="201168"/>
+          </a:xfrm>
+          <a:prstGeom prst="rect">
+            <a:avLst/>
+          </a:prstGeom>
+        </p:spPr>
+      </p:pic>
+      <p:sp>
+        <p:nvSpPr>
+          <p:cNvPr id="9" name="Text 6"/>
+          <p:cNvSpPr/>
+          <p:nvPr/>
+        </p:nvSpPr>
+        <p:spPr>
+          <a:xfrm>
+            <a:off x="9966960" y="6446520"/>
+            <a:ext cx="1581912" cy="237744"/>
+          </a:xfrm>
+          <a:prstGeom prst="rect">
+            <a:avLst/>
+          </a:prstGeom>
+          <a:noFill/>
+          <a:ln/>
+        </p:spPr>
+        <p:txBody>
+          <a:bodyPr wrap="square" lIns="0" tIns="0" rIns="0" bIns="0" rtlCol="0" anchor="ctr"/>
+          <a:lstStyle/>
+          <a:p>
+            <a:pPr indent="0" marL="0">
+              <a:buNone/>
+            </a:pPr>
+            <a:r>
+              <a:rPr lang="en-US" sz="1100" dirty="0">
+                <a:solidFill>
+                  <a:srgbClr val="929AA8"/>
+                </a:solidFill>
+                <a:latin typeface="Georgia" pitchFamily="34" charset="0"/>
+                <a:ea typeface="Georgia" pitchFamily="34" charset="-122"/>
+                <a:cs typeface="Georgia" pitchFamily="34" charset="-120"/>
+              </a:rPr>
+              <a:t>Shipped with </a:t>
+            </a:r>
+            <a:pPr indent="0" marL="0">
+              <a:buNone/>
+            </a:pPr>
+            <a:r>
+              <a:rPr lang="en-US" sz="1100" b="1" dirty="0">
+                <a:solidFill>
+                  <a:srgbClr val="F4F0E8"/>
+                </a:solidFill>
+                <a:latin typeface="Georgia" pitchFamily="34" charset="0"/>
+                <a:ea typeface="Georgia" pitchFamily="34" charset="-122"/>
+                <a:cs typeface="Georgia" pitchFamily="34" charset="-120"/>
+              </a:rPr>
+              <a:t>Showship</a:t>
+            </a:r>
+            <a:endParaRPr lang="en-US" sz="1100" dirty="0"/>
+          </a:p>
+        </p:txBody>
+      </p:sp>
+      <p:sp>
+        <p:nvSpPr>
+          <p:cNvPr id="10" name="Shape 7"/>
+          <p:cNvSpPr/>
+          <p:nvPr/>
+        </p:nvSpPr>
+        <p:spPr>
+          <a:xfrm>
+            <a:off x="640080" y="1783080"/>
+            <a:ext cx="10908792" cy="457200"/>
+          </a:xfrm>
+          <a:prstGeom prst="rect">
+            <a:avLst/>
+          </a:prstGeom>
+          <a:solidFill>
+            <a:srgbClr val="2E3237"/>
+          </a:solidFill>
+          <a:ln/>
+        </p:spPr>
+      </p:sp>
+      <p:sp>
+        <p:nvSpPr>
+          <p:cNvPr id="11" name="Text 8"/>
+          <p:cNvSpPr/>
+          <p:nvPr/>
+        </p:nvSpPr>
+        <p:spPr>
+          <a:xfrm>
+            <a:off x="822960" y="1783080"/>
+            <a:ext cx="2377440" cy="457200"/>
+          </a:xfrm>
+          <a:prstGeom prst="rect">
+            <a:avLst/>
+          </a:prstGeom>
+          <a:noFill/>
+          <a:ln/>
+        </p:spPr>
+        <p:txBody>
+          <a:bodyPr wrap="square" lIns="0" tIns="0" rIns="0" bIns="0" rtlCol="0" anchor="ctr"/>
+          <a:lstStyle/>
+          <a:p>
+            <a:pPr algn="l" indent="0" marL="0">
+              <a:buNone/>
+            </a:pPr>
+            <a:r>
+              <a:rPr lang="en-US" sz="1100" b="1" dirty="0">
+                <a:solidFill>
+                  <a:srgbClr val="B9BFC9"/>
+                </a:solidFill>
+                <a:latin typeface="Arial" pitchFamily="34" charset="0"/>
+                <a:ea typeface="Arial" pitchFamily="34" charset="-122"/>
+                <a:cs typeface="Arial" pitchFamily="34" charset="-120"/>
+              </a:rPr>
+              <a:t>Project / track</a:t>
+            </a:r>
+            <a:endParaRPr lang="en-US" sz="1100" dirty="0"/>
+          </a:p>
+        </p:txBody>
+      </p:sp>
+      <p:sp>
+        <p:nvSpPr>
+          <p:cNvPr id="12" name="Text 9"/>
+          <p:cNvSpPr/>
+          <p:nvPr/>
+        </p:nvSpPr>
+        <p:spPr>
+          <a:xfrm>
+            <a:off x="3566160" y="1783080"/>
+            <a:ext cx="1371600" cy="457200"/>
+          </a:xfrm>
+          <a:prstGeom prst="rect">
+            <a:avLst/>
+          </a:prstGeom>
+          <a:noFill/>
+          <a:ln/>
+        </p:spPr>
+        <p:txBody>
+          <a:bodyPr wrap="square" lIns="0" tIns="0" rIns="0" bIns="0" rtlCol="0" anchor="ctr"/>
+          <a:lstStyle/>
+          <a:p>
+            <a:pPr algn="l" indent="0" marL="0">
+              <a:buNone/>
+            </a:pPr>
+            <a:r>
+              <a:rPr lang="en-US" sz="1100" b="1" dirty="0">
+                <a:solidFill>
+                  <a:srgbClr val="B9BFC9"/>
+                </a:solidFill>
+                <a:latin typeface="Arial" pitchFamily="34" charset="0"/>
+                <a:ea typeface="Arial" pitchFamily="34" charset="-122"/>
+                <a:cs typeface="Arial" pitchFamily="34" charset="-120"/>
+              </a:rPr>
+              <a:t>Owner</a:t>
+            </a:r>
+            <a:endParaRPr lang="en-US" sz="1100" dirty="0"/>
+          </a:p>
+        </p:txBody>
+      </p:sp>
+      <p:sp>
+        <p:nvSpPr>
+          <p:cNvPr id="13" name="Text 10"/>
+          <p:cNvSpPr/>
+          <p:nvPr/>
+        </p:nvSpPr>
+        <p:spPr>
+          <a:xfrm>
+            <a:off x="5303520" y="1783080"/>
+            <a:ext cx="3593592" cy="457200"/>
+          </a:xfrm>
+          <a:prstGeom prst="rect">
+            <a:avLst/>
+          </a:prstGeom>
+          <a:noFill/>
+          <a:ln/>
+        </p:spPr>
+        <p:txBody>
+          <a:bodyPr wrap="square" lIns="0" tIns="0" rIns="0" bIns="0" rtlCol="0" anchor="ctr"/>
+          <a:lstStyle/>
+          <a:p>
+            <a:pPr algn="l" indent="0" marL="0">
+              <a:buNone/>
+            </a:pPr>
+            <a:r>
+              <a:rPr lang="en-US" sz="1100" b="1" dirty="0">
+                <a:solidFill>
+                  <a:srgbClr val="B9BFC9"/>
+                </a:solidFill>
+                <a:latin typeface="Arial" pitchFamily="34" charset="0"/>
+                <a:ea typeface="Arial" pitchFamily="34" charset="-122"/>
+                <a:cs typeface="Arial" pitchFamily="34" charset="-120"/>
+              </a:rPr>
+              <a:t>Next focus</a:t>
+            </a:r>
+            <a:endParaRPr lang="en-US" sz="1100" dirty="0"/>
+          </a:p>
+        </p:txBody>
+      </p:sp>
+      <p:sp>
+        <p:nvSpPr>
+          <p:cNvPr id="14" name="Text 11"/>
+          <p:cNvSpPr/>
+          <p:nvPr/>
+        </p:nvSpPr>
+        <p:spPr>
+          <a:xfrm>
+            <a:off x="9262872" y="1783080"/>
+            <a:ext cx="2103120" cy="457200"/>
+          </a:xfrm>
+          <a:prstGeom prst="rect">
+            <a:avLst/>
+          </a:prstGeom>
+          <a:noFill/>
+          <a:ln/>
+        </p:spPr>
+        <p:txBody>
+          <a:bodyPr wrap="square" lIns="0" tIns="0" rIns="0" bIns="0" rtlCol="0" anchor="ctr"/>
+          <a:lstStyle/>
+          <a:p>
+            <a:pPr algn="r" indent="0" marL="0">
+              <a:buNone/>
+            </a:pPr>
+            <a:r>
+              <a:rPr lang="en-US" sz="1100" b="1" dirty="0">
+                <a:solidFill>
+                  <a:srgbClr val="B9BFC9"/>
+                </a:solidFill>
+                <a:latin typeface="Arial" pitchFamily="34" charset="0"/>
+                <a:ea typeface="Arial" pitchFamily="34" charset="-122"/>
+                <a:cs typeface="Arial" pitchFamily="34" charset="-120"/>
+              </a:rPr>
+              <a:t>Status</a:t>
+            </a:r>
+            <a:endParaRPr lang="en-US" sz="1100" dirty="0"/>
+          </a:p>
+        </p:txBody>
+      </p:sp>
+      <p:sp>
+        <p:nvSpPr>
+          <p:cNvPr id="15" name="Shape 12"/>
+          <p:cNvSpPr/>
+          <p:nvPr/>
+        </p:nvSpPr>
+        <p:spPr>
+          <a:xfrm>
+            <a:off x="640080" y="2240280"/>
+            <a:ext cx="10908792" cy="914400"/>
+          </a:xfrm>
+          <a:prstGeom prst="rect">
+            <a:avLst/>
+          </a:prstGeom>
+          <a:solidFill>
+            <a:srgbClr val="23262C"/>
+          </a:solidFill>
+          <a:ln/>
+        </p:spPr>
+      </p:sp>
+      <p:sp>
+        <p:nvSpPr>
+          <p:cNvPr id="16" name="Text 13"/>
+          <p:cNvSpPr/>
+          <p:nvPr/>
+        </p:nvSpPr>
+        <p:spPr>
+          <a:xfrm>
+            <a:off x="822960" y="2240280"/>
+            <a:ext cx="2331720" cy="914400"/>
+          </a:xfrm>
+          <a:prstGeom prst="rect">
+            <a:avLst/>
+          </a:prstGeom>
+          <a:noFill/>
+          <a:ln/>
+        </p:spPr>
+        <p:txBody>
+          <a:bodyPr wrap="square" lIns="0" tIns="0" rIns="0" bIns="0" rtlCol="0" anchor="ctr"/>
+          <a:lstStyle/>
+          <a:p>
+            <a:pPr indent="0" marL="0">
+              <a:buNone/>
+            </a:pPr>
+            <a:r>
+              <a:rPr lang="en-US" sz="1300" b="1" dirty="0">
+                <a:solidFill>
+                  <a:srgbClr val="5CC8D7"/>
+                </a:solidFill>
+                <a:latin typeface="Georgia" pitchFamily="34" charset="0"/>
+                <a:ea typeface="Georgia" pitchFamily="34" charset="-122"/>
+                <a:cs typeface="Georgia" pitchFamily="34" charset="-120"/>
+              </a:rPr>
+              <a:t>ClinicBook · Patient App</a:t>
+            </a:r>
+            <a:endParaRPr lang="en-US" sz="1300" dirty="0"/>
+          </a:p>
+        </p:txBody>
+      </p:sp>
+      <p:sp>
+        <p:nvSpPr>
+          <p:cNvPr id="17" name="Text 14"/>
+          <p:cNvSpPr/>
+          <p:nvPr/>
+        </p:nvSpPr>
+        <p:spPr>
+          <a:xfrm>
+            <a:off x="3566160" y="2240280"/>
+            <a:ext cx="1325880" cy="914400"/>
+          </a:xfrm>
+          <a:prstGeom prst="rect">
+            <a:avLst/>
+          </a:prstGeom>
+          <a:noFill/>
+          <a:ln/>
+        </p:spPr>
+        <p:txBody>
+          <a:bodyPr wrap="square" lIns="0" tIns="0" rIns="0" bIns="0" rtlCol="0" anchor="ctr"/>
+          <a:lstStyle/>
+          <a:p>
+            <a:pPr indent="0" marL="0">
+              <a:buNone/>
+            </a:pPr>
+            <a:r>
+              <a:rPr lang="en-US" sz="1150" dirty="0">
+                <a:solidFill>
+                  <a:srgbClr val="B9BFC9"/>
+                </a:solidFill>
+                <a:latin typeface="Arial" pitchFamily="34" charset="0"/>
+                <a:ea typeface="Arial" pitchFamily="34" charset="-122"/>
+                <a:cs typeface="Arial" pitchFamily="34" charset="-120"/>
+              </a:rPr>
+              <a:t>Leo Park @Leo</a:t>
+            </a:r>
+            <a:endParaRPr lang="en-US" sz="1150" dirty="0"/>
+          </a:p>
+        </p:txBody>
+      </p:sp>
+      <p:sp>
+        <p:nvSpPr>
+          <p:cNvPr id="18" name="Text 15"/>
+          <p:cNvSpPr/>
+          <p:nvPr/>
+        </p:nvSpPr>
+        <p:spPr>
+          <a:xfrm>
+            <a:off x="5303520" y="2240280"/>
+            <a:ext cx="3502152" cy="914400"/>
+          </a:xfrm>
+          <a:prstGeom prst="rect">
+            <a:avLst/>
+          </a:prstGeom>
+          <a:noFill/>
+          <a:ln/>
+        </p:spPr>
+        <p:txBody>
+          <a:bodyPr wrap="square" lIns="0" tIns="0" rIns="0" bIns="0" rtlCol="0" anchor="ctr"/>
+          <a:lstStyle/>
+          <a:p>
+            <a:pPr indent="0" marL="0">
+              <a:buNone/>
+            </a:pPr>
+            <a:r>
+              <a:rPr lang="en-US" sz="1150" dirty="0">
+                <a:solidFill>
+                  <a:srgbClr val="F4F0E8"/>
+                </a:solidFill>
+                <a:latin typeface="Arial" pitchFamily="34" charset="0"/>
+                <a:ea typeface="Arial" pitchFamily="34" charset="-122"/>
+                <a:cs typeface="Arial" pitchFamily="34" charset="-120"/>
+              </a:rPr>
+              <a:t>Finish the booking calendar, then start payments and receipts.</a:t>
+            </a:r>
+            <a:endParaRPr lang="en-US" sz="1150" dirty="0"/>
+          </a:p>
+        </p:txBody>
+      </p:sp>
+      <p:sp>
+        <p:nvSpPr>
+          <p:cNvPr id="19" name="Shape 16"/>
+          <p:cNvSpPr/>
+          <p:nvPr/>
+        </p:nvSpPr>
+        <p:spPr>
+          <a:xfrm>
+            <a:off x="10447934" y="2560320"/>
+            <a:ext cx="918058" cy="274320"/>
+          </a:xfrm>
+          <a:prstGeom prst="rect">
+            <a:avLst/>
+          </a:prstGeom>
+          <a:ln w="12700">
+            <a:solidFill>
+              <a:srgbClr val="5CC8D7"/>
+            </a:solidFill>
+            <a:prstDash val="solid"/>
+          </a:ln>
+        </p:spPr>
+      </p:sp>
+      <p:sp>
+        <p:nvSpPr>
+          <p:cNvPr id="20" name="Text 17"/>
+          <p:cNvSpPr/>
+          <p:nvPr/>
+        </p:nvSpPr>
+        <p:spPr>
+          <a:xfrm>
+            <a:off x="10447934" y="2560320"/>
+            <a:ext cx="918058" cy="274320"/>
+          </a:xfrm>
+          <a:prstGeom prst="rect">
+            <a:avLst/>
+          </a:prstGeom>
+          <a:noFill/>
+          <a:ln/>
+        </p:spPr>
+        <p:txBody>
+          <a:bodyPr wrap="square" lIns="0" tIns="0" rIns="0" bIns="0" rtlCol="0" anchor="ctr"/>
+          <a:lstStyle/>
+          <a:p>
+            <a:pPr algn="ctr" indent="0" marL="0">
+              <a:buNone/>
+            </a:pPr>
+            <a:r>
+              <a:rPr lang="en-US" sz="1100" b="1" dirty="0">
+                <a:solidFill>
+                  <a:srgbClr val="5CC8D7"/>
+                </a:solidFill>
+                <a:latin typeface="Arial" pitchFamily="34" charset="0"/>
+                <a:ea typeface="Arial" pitchFamily="34" charset="-122"/>
+                <a:cs typeface="Arial" pitchFamily="34" charset="-120"/>
+              </a:rPr>
+              <a:t>P3 · 40%</a:t>
+            </a:r>
+            <a:endParaRPr lang="en-US" sz="1100" dirty="0"/>
+          </a:p>
+        </p:txBody>
+      </p:sp>
+      <p:sp>
+        <p:nvSpPr>
+          <p:cNvPr id="21" name="Shape 18"/>
+          <p:cNvSpPr/>
+          <p:nvPr/>
+        </p:nvSpPr>
+        <p:spPr>
+          <a:xfrm>
+            <a:off x="640080" y="3154680"/>
+            <a:ext cx="10908792" cy="914400"/>
+          </a:xfrm>
+          <a:prstGeom prst="rect">
+            <a:avLst/>
+          </a:prstGeom>
+          <a:solidFill>
+            <a:srgbClr val="12161C"/>
+          </a:solidFill>
+          <a:ln/>
+        </p:spPr>
+      </p:sp>
+      <p:sp>
+        <p:nvSpPr>
+          <p:cNvPr id="22" name="Text 19"/>
+          <p:cNvSpPr/>
+          <p:nvPr/>
+        </p:nvSpPr>
+        <p:spPr>
+          <a:xfrm>
+            <a:off x="822960" y="3154680"/>
+            <a:ext cx="2331720" cy="914400"/>
+          </a:xfrm>
+          <a:prstGeom prst="rect">
+            <a:avLst/>
+          </a:prstGeom>
+          <a:noFill/>
+          <a:ln/>
+        </p:spPr>
+        <p:txBody>
+          <a:bodyPr wrap="square" lIns="0" tIns="0" rIns="0" bIns="0" rtlCol="0" anchor="ctr"/>
+          <a:lstStyle/>
+          <a:p>
+            <a:pPr indent="0" marL="0">
+              <a:buNone/>
+            </a:pPr>
+            <a:r>
+              <a:rPr lang="en-US" sz="1300" b="1" dirty="0">
+                <a:solidFill>
+                  <a:srgbClr val="5CC8D7"/>
+                </a:solidFill>
+                <a:latin typeface="Georgia" pitchFamily="34" charset="0"/>
+                <a:ea typeface="Georgia" pitchFamily="34" charset="-122"/>
+                <a:cs typeface="Georgia" pitchFamily="34" charset="-120"/>
+              </a:rPr>
+              <a:t>ClinicBook · Clinic Dashboard</a:t>
+            </a:r>
+            <a:endParaRPr lang="en-US" sz="1300" dirty="0"/>
+          </a:p>
+        </p:txBody>
+      </p:sp>
+      <p:sp>
+        <p:nvSpPr>
+          <p:cNvPr id="23" name="Text 20"/>
+          <p:cNvSpPr/>
+          <p:nvPr/>
+        </p:nvSpPr>
+        <p:spPr>
+          <a:xfrm>
+            <a:off x="3566160" y="3154680"/>
+            <a:ext cx="1325880" cy="914400"/>
+          </a:xfrm>
+          <a:prstGeom prst="rect">
+            <a:avLst/>
+          </a:prstGeom>
+          <a:noFill/>
+          <a:ln/>
+        </p:spPr>
+        <p:txBody>
+          <a:bodyPr wrap="square" lIns="0" tIns="0" rIns="0" bIns="0" rtlCol="0" anchor="ctr"/>
+          <a:lstStyle/>
+          <a:p>
+            <a:pPr indent="0" marL="0">
+              <a:buNone/>
+            </a:pPr>
+            <a:r>
+              <a:rPr lang="en-US" sz="1150" dirty="0">
+                <a:solidFill>
+                  <a:srgbClr val="B9BFC9"/>
+                </a:solidFill>
+                <a:latin typeface="Arial" pitchFamily="34" charset="0"/>
+                <a:ea typeface="Arial" pitchFamily="34" charset="-122"/>
+                <a:cs typeface="Arial" pitchFamily="34" charset="-120"/>
+              </a:rPr>
+              <a:t>Nina Rao @Nina</a:t>
+            </a:r>
+            <a:endParaRPr lang="en-US" sz="1150" dirty="0"/>
+          </a:p>
+        </p:txBody>
+      </p:sp>
+      <p:sp>
+        <p:nvSpPr>
+          <p:cNvPr id="24" name="Text 21"/>
+          <p:cNvSpPr/>
+          <p:nvPr/>
+        </p:nvSpPr>
+        <p:spPr>
+          <a:xfrm>
+            <a:off x="5303520" y="3154680"/>
+            <a:ext cx="3502152" cy="914400"/>
+          </a:xfrm>
+          <a:prstGeom prst="rect">
+            <a:avLst/>
+          </a:prstGeom>
+          <a:noFill/>
+          <a:ln/>
+        </p:spPr>
+        <p:txBody>
+          <a:bodyPr wrap="square" lIns="0" tIns="0" rIns="0" bIns="0" rtlCol="0" anchor="ctr"/>
+          <a:lstStyle/>
+          <a:p>
+            <a:pPr indent="0" marL="0">
+              <a:buNone/>
+            </a:pPr>
+            <a:r>
+              <a:rPr lang="en-US" sz="1150" dirty="0">
+                <a:solidFill>
+                  <a:srgbClr val="F4F0E8"/>
+                </a:solidFill>
+                <a:latin typeface="Arial" pitchFamily="34" charset="0"/>
+                <a:ea typeface="Arial" pitchFamily="34" charset="-122"/>
+                <a:cs typeface="Arial" pitchFamily="34" charset="-120"/>
+              </a:rPr>
+              <a:t>Apply the duplicate-reminder fix and release reminders; start reports and exports.</a:t>
+            </a:r>
+            <a:endParaRPr lang="en-US" sz="1150" dirty="0"/>
+          </a:p>
+        </p:txBody>
+      </p:sp>
+      <p:sp>
+        <p:nvSpPr>
+          <p:cNvPr id="25" name="Shape 22"/>
+          <p:cNvSpPr/>
+          <p:nvPr/>
+        </p:nvSpPr>
+        <p:spPr>
+          <a:xfrm>
+            <a:off x="10447934" y="3474720"/>
+            <a:ext cx="918058" cy="274320"/>
+          </a:xfrm>
+          <a:prstGeom prst="rect">
+            <a:avLst/>
+          </a:prstGeom>
+          <a:ln w="12700">
+            <a:solidFill>
+              <a:srgbClr val="5CC8D7"/>
+            </a:solidFill>
+            <a:prstDash val="solid"/>
+          </a:ln>
+        </p:spPr>
+      </p:sp>
+      <p:sp>
+        <p:nvSpPr>
+          <p:cNvPr id="26" name="Text 23"/>
+          <p:cNvSpPr/>
+          <p:nvPr/>
+        </p:nvSpPr>
+        <p:spPr>
+          <a:xfrm>
+            <a:off x="10447934" y="3474720"/>
+            <a:ext cx="918058" cy="274320"/>
+          </a:xfrm>
+          <a:prstGeom prst="rect">
+            <a:avLst/>
+          </a:prstGeom>
+          <a:noFill/>
+          <a:ln/>
+        </p:spPr>
+        <p:txBody>
+          <a:bodyPr wrap="square" lIns="0" tIns="0" rIns="0" bIns="0" rtlCol="0" anchor="ctr"/>
+          <a:lstStyle/>
+          <a:p>
+            <a:pPr algn="ctr" indent="0" marL="0">
+              <a:buNone/>
+            </a:pPr>
+            <a:r>
+              <a:rPr lang="en-US" sz="1100" b="1" dirty="0">
+                <a:solidFill>
+                  <a:srgbClr val="5CC8D7"/>
+                </a:solidFill>
+                <a:latin typeface="Arial" pitchFamily="34" charset="0"/>
+                <a:ea typeface="Arial" pitchFamily="34" charset="-122"/>
+                <a:cs typeface="Arial" pitchFamily="34" charset="-120"/>
+              </a:rPr>
+              <a:t>P4 · 80%</a:t>
+            </a:r>
+            <a:endParaRPr lang="en-US" sz="1100" dirty="0"/>
+          </a:p>
+        </p:txBody>
+      </p:sp>
+      <p:sp>
+        <p:nvSpPr>
+          <p:cNvPr id="27" name="Shape 24"/>
+          <p:cNvSpPr/>
+          <p:nvPr/>
+        </p:nvSpPr>
+        <p:spPr>
+          <a:xfrm>
+            <a:off x="640080" y="4069080"/>
+            <a:ext cx="10908792" cy="914400"/>
+          </a:xfrm>
+          <a:prstGeom prst="rect">
+            <a:avLst/>
+          </a:prstGeom>
+          <a:solidFill>
+            <a:srgbClr val="23262C"/>
+          </a:solidFill>
+          <a:ln/>
+        </p:spPr>
+      </p:sp>
+      <p:sp>
+        <p:nvSpPr>
+          <p:cNvPr id="28" name="Text 25"/>
+          <p:cNvSpPr/>
+          <p:nvPr/>
+        </p:nvSpPr>
+        <p:spPr>
+          <a:xfrm>
+            <a:off x="822960" y="4069080"/>
+            <a:ext cx="2331720" cy="914400"/>
+          </a:xfrm>
+          <a:prstGeom prst="rect">
+            <a:avLst/>
+          </a:prstGeom>
+          <a:noFill/>
+          <a:ln/>
+        </p:spPr>
+        <p:txBody>
+          <a:bodyPr wrap="square" lIns="0" tIns="0" rIns="0" bIns="0" rtlCol="0" anchor="ctr"/>
+          <a:lstStyle/>
+          <a:p>
+            <a:pPr indent="0" marL="0">
+              <a:buNone/>
+            </a:pPr>
+            <a:r>
+              <a:rPr lang="en-US" sz="1300" b="1" dirty="0">
+                <a:solidFill>
+                  <a:srgbClr val="A99BFF"/>
+                </a:solidFill>
+                <a:latin typeface="Georgia" pitchFamily="34" charset="0"/>
+                <a:ea typeface="Georgia" pitchFamily="34" charset="-122"/>
+                <a:cs typeface="Georgia" pitchFamily="34" charset="-120"/>
+              </a:rPr>
+              <a:t>PulseBoard · Usage Tracking</a:t>
+            </a:r>
+            <a:endParaRPr lang="en-US" sz="1300" dirty="0"/>
+          </a:p>
+        </p:txBody>
+      </p:sp>
+      <p:sp>
+        <p:nvSpPr>
+          <p:cNvPr id="29" name="Text 26"/>
+          <p:cNvSpPr/>
+          <p:nvPr/>
+        </p:nvSpPr>
+        <p:spPr>
+          <a:xfrm>
+            <a:off x="3566160" y="4069080"/>
+            <a:ext cx="1325880" cy="914400"/>
+          </a:xfrm>
+          <a:prstGeom prst="rect">
+            <a:avLst/>
+          </a:prstGeom>
+          <a:noFill/>
+          <a:ln/>
+        </p:spPr>
+        <p:txBody>
+          <a:bodyPr wrap="square" lIns="0" tIns="0" rIns="0" bIns="0" rtlCol="0" anchor="ctr"/>
+          <a:lstStyle/>
+          <a:p>
+            <a:pPr indent="0" marL="0">
+              <a:buNone/>
+            </a:pPr>
+            <a:r>
+              <a:rPr lang="en-US" sz="1150" dirty="0">
+                <a:solidFill>
+                  <a:srgbClr val="B9BFC9"/>
+                </a:solidFill>
+                <a:latin typeface="Arial" pitchFamily="34" charset="0"/>
+                <a:ea typeface="Arial" pitchFamily="34" charset="-122"/>
+                <a:cs typeface="Arial" pitchFamily="34" charset="-120"/>
+              </a:rPr>
+              <a:t>Maya Lin @Maya</a:t>
+            </a:r>
+            <a:endParaRPr lang="en-US" sz="1150" dirty="0"/>
+          </a:p>
+        </p:txBody>
+      </p:sp>
+      <p:sp>
+        <p:nvSpPr>
+          <p:cNvPr id="30" name="Text 27"/>
+          <p:cNvSpPr/>
+          <p:nvPr/>
+        </p:nvSpPr>
+        <p:spPr>
+          <a:xfrm>
+            <a:off x="5303520" y="4069080"/>
+            <a:ext cx="3502152" cy="914400"/>
+          </a:xfrm>
+          <a:prstGeom prst="rect">
+            <a:avLst/>
+          </a:prstGeom>
+          <a:noFill/>
+          <a:ln/>
+        </p:spPr>
+        <p:txBody>
+          <a:bodyPr wrap="square" lIns="0" tIns="0" rIns="0" bIns="0" rtlCol="0" anchor="ctr"/>
+          <a:lstStyle/>
+          <a:p>
+            <a:pPr indent="0" marL="0">
+              <a:buNone/>
+            </a:pPr>
+            <a:r>
+              <a:rPr lang="en-US" sz="1150" dirty="0">
+                <a:solidFill>
+                  <a:srgbClr val="F4F0E8"/>
+                </a:solidFill>
+                <a:latin typeface="Arial" pitchFamily="34" charset="0"/>
+                <a:ea typeface="Arial" pitchFamily="34" charset="-122"/>
+                <a:cs typeface="Arial" pitchFamily="34" charset="-120"/>
+              </a:rPr>
+              <a:t>Finish adding usage tracking to the web app, then open the first dashboard to managers.</a:t>
+            </a:r>
+            <a:endParaRPr lang="en-US" sz="1150" dirty="0"/>
+          </a:p>
+        </p:txBody>
+      </p:sp>
+      <p:sp>
+        <p:nvSpPr>
+          <p:cNvPr id="31" name="Shape 28"/>
+          <p:cNvSpPr/>
+          <p:nvPr/>
+        </p:nvSpPr>
+        <p:spPr>
+          <a:xfrm>
+            <a:off x="10206533" y="4389120"/>
+            <a:ext cx="1159459" cy="274320"/>
+          </a:xfrm>
+          <a:prstGeom prst="rect">
+            <a:avLst/>
+          </a:prstGeom>
+          <a:ln w="12700">
+            <a:solidFill>
+              <a:srgbClr val="A99BFF"/>
+            </a:solidFill>
+            <a:prstDash val="solid"/>
+          </a:ln>
+        </p:spPr>
+      </p:sp>
+      <p:sp>
+        <p:nvSpPr>
+          <p:cNvPr id="32" name="Text 29"/>
+          <p:cNvSpPr/>
+          <p:nvPr/>
+        </p:nvSpPr>
+        <p:spPr>
+          <a:xfrm>
+            <a:off x="10206533" y="4389120"/>
+            <a:ext cx="1159459" cy="274320"/>
+          </a:xfrm>
+          <a:prstGeom prst="rect">
+            <a:avLst/>
+          </a:prstGeom>
+          <a:noFill/>
+          <a:ln/>
+        </p:spPr>
+        <p:txBody>
+          <a:bodyPr wrap="square" lIns="0" tIns="0" rIns="0" bIns="0" rtlCol="0" anchor="ctr"/>
+          <a:lstStyle/>
+          <a:p>
+            <a:pPr algn="ctr" indent="0" marL="0">
+              <a:buNone/>
+            </a:pPr>
+            <a:r>
+              <a:rPr lang="en-US" sz="1100" b="1" dirty="0">
+                <a:solidFill>
+                  <a:srgbClr val="A99BFF"/>
+                </a:solidFill>
+                <a:latin typeface="Arial" pitchFamily="34" charset="0"/>
+                <a:ea typeface="Arial" pitchFamily="34" charset="-122"/>
+                <a:cs typeface="Arial" pitchFamily="34" charset="-120"/>
+              </a:rPr>
+              <a:t>In progress</a:t>
+            </a:r>
+            <a:endParaRPr lang="en-US" sz="1100" dirty="0"/>
+          </a:p>
+        </p:txBody>
+      </p:sp>
+      <p:sp>
+        <p:nvSpPr>
+          <p:cNvPr id="33" name="Shape 30"/>
+          <p:cNvSpPr/>
+          <p:nvPr/>
+        </p:nvSpPr>
+        <p:spPr>
+          <a:xfrm>
+            <a:off x="640080" y="4983480"/>
+            <a:ext cx="10908792" cy="914400"/>
+          </a:xfrm>
+          <a:prstGeom prst="rect">
+            <a:avLst/>
+          </a:prstGeom>
+          <a:solidFill>
+            <a:srgbClr val="12161C"/>
+          </a:solidFill>
+          <a:ln/>
+        </p:spPr>
+      </p:sp>
+      <p:sp>
+        <p:nvSpPr>
+          <p:cNvPr id="34" name="Text 31"/>
+          <p:cNvSpPr/>
+          <p:nvPr/>
+        </p:nvSpPr>
+        <p:spPr>
+          <a:xfrm>
+            <a:off x="822960" y="4983480"/>
+            <a:ext cx="2331720" cy="914400"/>
+          </a:xfrm>
+          <a:prstGeom prst="rect">
+            <a:avLst/>
+          </a:prstGeom>
+          <a:noFill/>
+          <a:ln/>
+        </p:spPr>
+        <p:txBody>
+          <a:bodyPr wrap="square" lIns="0" tIns="0" rIns="0" bIns="0" rtlCol="0" anchor="ctr"/>
+          <a:lstStyle/>
+          <a:p>
+            <a:pPr indent="0" marL="0">
+              <a:buNone/>
+            </a:pPr>
+            <a:r>
+              <a:rPr lang="en-US" sz="1300" b="1" dirty="0">
+                <a:solidFill>
+                  <a:srgbClr val="F2B134"/>
+                </a:solidFill>
+                <a:latin typeface="Georgia" pitchFamily="34" charset="0"/>
+                <a:ea typeface="Georgia" pitchFamily="34" charset="-122"/>
+                <a:cs typeface="Georgia" pitchFamily="34" charset="-120"/>
+              </a:rPr>
+              <a:t>App Store Release</a:t>
+            </a:r>
+            <a:endParaRPr lang="en-US" sz="1300" dirty="0"/>
+          </a:p>
+        </p:txBody>
+      </p:sp>
+      <p:sp>
+        <p:nvSpPr>
+          <p:cNvPr id="35" name="Text 32"/>
+          <p:cNvSpPr/>
+          <p:nvPr/>
+        </p:nvSpPr>
+        <p:spPr>
+          <a:xfrm>
+            <a:off x="3566160" y="4983480"/>
+            <a:ext cx="1325880" cy="914400"/>
+          </a:xfrm>
+          <a:prstGeom prst="rect">
+            <a:avLst/>
+          </a:prstGeom>
+          <a:noFill/>
+          <a:ln/>
+        </p:spPr>
+        <p:txBody>
+          <a:bodyPr wrap="square" lIns="0" tIns="0" rIns="0" bIns="0" rtlCol="0" anchor="ctr"/>
+          <a:lstStyle/>
+          <a:p>
+            <a:pPr indent="0" marL="0">
+              <a:buNone/>
+            </a:pPr>
+            <a:r>
+              <a:rPr lang="en-US" sz="1150" dirty="0">
+                <a:solidFill>
+                  <a:srgbClr val="B9BFC9"/>
+                </a:solidFill>
+                <a:latin typeface="Arial" pitchFamily="34" charset="0"/>
+                <a:ea typeface="Arial" pitchFamily="34" charset="-122"/>
+                <a:cs typeface="Arial" pitchFamily="34" charset="-120"/>
+              </a:rPr>
+              <a:t>Maya Lin @Maya</a:t>
+            </a:r>
+            <a:endParaRPr lang="en-US" sz="1150" dirty="0"/>
+          </a:p>
+        </p:txBody>
+      </p:sp>
+      <p:sp>
+        <p:nvSpPr>
+          <p:cNvPr id="36" name="Text 33"/>
+          <p:cNvSpPr/>
+          <p:nvPr/>
+        </p:nvSpPr>
+        <p:spPr>
+          <a:xfrm>
+            <a:off x="5303520" y="4983480"/>
+            <a:ext cx="3502152" cy="914400"/>
+          </a:xfrm>
+          <a:prstGeom prst="rect">
+            <a:avLst/>
+          </a:prstGeom>
+          <a:noFill/>
+          <a:ln/>
+        </p:spPr>
+        <p:txBody>
+          <a:bodyPr wrap="square" lIns="0" tIns="0" rIns="0" bIns="0" rtlCol="0" anchor="ctr"/>
+          <a:lstStyle/>
+          <a:p>
+            <a:pPr indent="0" marL="0">
+              <a:buNone/>
+            </a:pPr>
+            <a:r>
+              <a:rPr lang="en-US" sz="1150" dirty="0">
+                <a:solidFill>
+                  <a:srgbClr val="F4F0E8"/>
+                </a:solidFill>
+                <a:latin typeface="Arial" pitchFamily="34" charset="0"/>
+                <a:ea typeface="Arial" pitchFamily="34" charset="-122"/>
+                <a:cs typeface="Arial" pitchFamily="34" charset="-120"/>
+              </a:rPr>
+              <a:t>Invite the first 20 clinic staff to TestFlight.</a:t>
+            </a:r>
+            <a:endParaRPr lang="en-US" sz="1150" dirty="0"/>
+          </a:p>
+        </p:txBody>
+      </p:sp>
+      <p:sp>
+        <p:nvSpPr>
+          <p:cNvPr id="37" name="Shape 34"/>
+          <p:cNvSpPr/>
+          <p:nvPr/>
+        </p:nvSpPr>
+        <p:spPr>
+          <a:xfrm>
+            <a:off x="10769803" y="5303520"/>
+            <a:ext cx="596189" cy="274320"/>
+          </a:xfrm>
+          <a:prstGeom prst="rect">
+            <a:avLst/>
+          </a:prstGeom>
+          <a:solidFill>
+            <a:srgbClr val="F2B134"/>
+          </a:solidFill>
+          <a:ln/>
+        </p:spPr>
+      </p:sp>
+      <p:sp>
+        <p:nvSpPr>
+          <p:cNvPr id="38" name="Text 35"/>
+          <p:cNvSpPr/>
+          <p:nvPr/>
+        </p:nvSpPr>
+        <p:spPr>
+          <a:xfrm>
+            <a:off x="10769803" y="5303520"/>
+            <a:ext cx="596189" cy="274320"/>
+          </a:xfrm>
+          <a:prstGeom prst="rect">
+            <a:avLst/>
+          </a:prstGeom>
+          <a:noFill/>
+          <a:ln/>
+        </p:spPr>
+        <p:txBody>
+          <a:bodyPr wrap="square" lIns="0" tIns="0" rIns="0" bIns="0" rtlCol="0" anchor="ctr"/>
+          <a:lstStyle/>
+          <a:p>
+            <a:pPr algn="ctr" indent="0" marL="0">
+              <a:buNone/>
+            </a:pPr>
+            <a:r>
+              <a:rPr lang="en-US" sz="1100" b="1" dirty="0">
+                <a:solidFill>
+                  <a:srgbClr val="12161C"/>
+                </a:solidFill>
+                <a:latin typeface="Arial" pitchFamily="34" charset="0"/>
+                <a:ea typeface="Arial" pitchFamily="34" charset="-122"/>
+                <a:cs typeface="Arial" pitchFamily="34" charset="-120"/>
+              </a:rPr>
+              <a:t>Done</a:t>
+            </a:r>
+            <a:endParaRPr lang="en-US" sz="1100" dirty="0"/>
+          </a:p>
+        </p:txBody>
+      </p:sp>
+    </p:spTree>
+  </p:cSld>
+  <p:clrMapOvr>
+    <a:masterClrMapping/>
+  </p:clrMapOvr>
+</p:sld>
+</file>
+
+<file path=ppt/slides/slide12.xml><?xml version="1.0" encoding="utf-8"?>
+<p:sld xmlns:a="http://schemas.openxmlformats.org/drawingml/2006/main" xmlns:r="http://schemas.openxmlformats.org/officeDocument/2006/relationships" xmlns:p="http://schemas.openxmlformats.org/presentationml/2006/main">
+  <p:cSld name="Slide 12">
+    <p:bg>
+      <p:bgPr>
+        <a:solidFill>
+          <a:srgbClr val="12161C"/>
+        </a:solidFill>
+      </p:bgPr>
+    </p:bg>
+    <p:spTree>
+      <p:nvGrpSpPr>
+        <p:cNvPr id="1" name=""/>
+        <p:cNvGrpSpPr/>
+        <p:nvPr/>
+      </p:nvGrpSpPr>
+      <p:grpSpPr>
+        <a:xfrm>
+          <a:off x="0" y="0"/>
+          <a:ext cx="0" cy="0"/>
+          <a:chOff x="0" y="0"/>
+          <a:chExt cx="0" cy="0"/>
+        </a:xfrm>
+      </p:grpSpPr>
+      <p:sp>
+        <p:nvSpPr>
+          <p:cNvPr id="2" name="Shape 0"/>
+          <p:cNvSpPr/>
+          <p:nvPr/>
+        </p:nvSpPr>
+        <p:spPr>
+          <a:xfrm>
             <a:off x="7863840" y="1097280"/>
             <a:ext cx="3685032" cy="274320"/>
           </a:xfrm>
@@ -4437,7 +5182,7 @@
       </p:sp>
       <p:pic>
         <p:nvPicPr>
-          <p:cNvPr id="14" name="Image 0" descr="/var/folders/lw/rmylcyvd5rjfxk9g1z9rrm8w0000gq/T/showship-deck-oVNQqv/logo_trimmed.png">    </p:cNvPr>
+          <p:cNvPr id="14" name="Image 0" descr="/var/folders/lw/rmylcyvd5rjfxk9g1z9rrm8w0000gq/T/showship-deck-EGIwvT/logo_trimmed.png">    </p:cNvPr>
           <p:cNvPicPr>
             <a:picLocks noChangeAspect="1"/>
           </p:cNvPicPr>
@@ -4976,7 +5721,7 @@
       </p:sp>
       <p:pic>
         <p:nvPicPr>
-          <p:cNvPr id="8" name="Image 0" descr="/var/folders/lw/rmylcyvd5rjfxk9g1z9rrm8w0000gq/T/showship-deck-oVNQqv/paper_mark.png">    </p:cNvPr>
+          <p:cNvPr id="8" name="Image 0" descr="/var/folders/lw/rmylcyvd5rjfxk9g1z9rrm8w0000gq/T/showship-deck-EGIwvT/paper_mark.png">    </p:cNvPr>
           <p:cNvPicPr>
             <a:picLocks noChangeAspect="1"/>
           </p:cNvPicPr>
@@ -6119,7 +6864,7 @@
       </p:sp>
       <p:pic>
         <p:nvPicPr>
-          <p:cNvPr id="8" name="Image 0" descr="/var/folders/lw/rmylcyvd5rjfxk9g1z9rrm8w0000gq/T/showship-deck-oVNQqv/paper_mark.png">    </p:cNvPr>
+          <p:cNvPr id="8" name="Image 0" descr="/var/folders/lw/rmylcyvd5rjfxk9g1z9rrm8w0000gq/T/showship-deck-EGIwvT/paper_mark.png">    </p:cNvPr>
           <p:cNvPicPr>
             <a:picLocks noChangeAspect="1"/>
           </p:cNvPicPr>
@@ -7225,7 +7970,7 @@
       </p:sp>
       <p:pic>
         <p:nvPicPr>
-          <p:cNvPr id="8" name="Image 0" descr="/var/folders/lw/rmylcyvd5rjfxk9g1z9rrm8w0000gq/T/showship-deck-oVNQqv/paper_mark.png">    </p:cNvPr>
+          <p:cNvPr id="8" name="Image 0" descr="/var/folders/lw/rmylcyvd5rjfxk9g1z9rrm8w0000gq/T/showship-deck-EGIwvT/paper_mark.png">    </p:cNvPr>
           <p:cNvPicPr>
             <a:picLocks noChangeAspect="1"/>
           </p:cNvPicPr>
@@ -8406,7 +9151,7 @@
       </p:sp>
       <p:pic>
         <p:nvPicPr>
-          <p:cNvPr id="8" name="Image 0" descr="/var/folders/lw/rmylcyvd5rjfxk9g1z9rrm8w0000gq/T/showship-deck-oVNQqv/paper_mark.png">    </p:cNvPr>
+          <p:cNvPr id="8" name="Image 0" descr="/var/folders/lw/rmylcyvd5rjfxk9g1z9rrm8w0000gq/T/showship-deck-EGIwvT/paper_mark.png">    </p:cNvPr>
           <p:cNvPicPr>
             <a:picLocks noChangeAspect="1"/>
           </p:cNvPicPr>
@@ -9864,13 +10609,13 @@
             <a:r>
               <a:rPr lang="en-US" sz="1200" b="1" dirty="0">
                 <a:solidFill>
-                  <a:srgbClr val="F2B134"/>
+                  <a:srgbClr val="5CC8D7"/>
                 </a:solidFill>
                 <a:latin typeface="Arial" pitchFamily="34" charset="0"/>
                 <a:ea typeface="Arial" pitchFamily="34" charset="-122"/>
                 <a:cs typeface="Arial" pitchFamily="34" charset="-120"/>
               </a:rPr>
-              <a:t>Quality · Code Review</a:t>
+              <a:t>ClinicBook · Patient App</a:t>
             </a:r>
             <a:endParaRPr lang="en-US" sz="1200" dirty="0"/>
           </a:p>
@@ -9950,7 +10695,7 @@
                 <a:ea typeface="Georgia" pitchFamily="34" charset="-122"/>
                 <a:cs typeface="Georgia" pitchFamily="34" charset="-120"/>
               </a:rPr>
-              <a:t>Quality Check: Issues Caught Before Release</a:t>
+              <a:t>ClinicBook: What Was Done on Each Task</a:t>
             </a:r>
             <a:endParaRPr lang="en-US" sz="2600" dirty="0"/>
           </a:p>
@@ -9997,7 +10742,7 @@
       </p:sp>
       <p:pic>
         <p:nvPicPr>
-          <p:cNvPr id="8" name="Image 0" descr="/var/folders/lw/rmylcyvd5rjfxk9g1z9rrm8w0000gq/T/showship-deck-oVNQqv/paper_mark.png">    </p:cNvPr>
+          <p:cNvPr id="8" name="Image 0" descr="/var/folders/lw/rmylcyvd5rjfxk9g1z9rrm8w0000gq/T/showship-deck-EGIwvT/paper_mark.png">    </p:cNvPr>
           <p:cNvPicPr>
             <a:picLocks noChangeAspect="1"/>
           </p:cNvPicPr>
@@ -10081,7 +10826,7 @@
         <p:spPr>
           <a:xfrm>
             <a:off x="640080" y="1783080"/>
-            <a:ext cx="2926080" cy="1203960"/>
+            <a:ext cx="3453384" cy="4160520"/>
           </a:xfrm>
           <a:prstGeom prst="rect">
             <a:avLst/>
@@ -10094,14 +10839,36 @@
       </p:sp>
       <p:sp>
         <p:nvSpPr>
-          <p:cNvPr id="11" name="Text 8"/>
-          <p:cNvSpPr/>
-          <p:nvPr/>
-        </p:nvSpPr>
-        <p:spPr>
-          <a:xfrm>
-            <a:off x="868680" y="1837944"/>
-            <a:ext cx="2468880" cy="601980"/>
+          <p:cNvPr id="11" name="Shape 8"/>
+          <p:cNvSpPr/>
+          <p:nvPr/>
+        </p:nvSpPr>
+        <p:spPr>
+          <a:xfrm>
+            <a:off x="868680" y="1965960"/>
+            <a:ext cx="1159459" cy="274320"/>
+          </a:xfrm>
+          <a:prstGeom prst="rect">
+            <a:avLst/>
+          </a:prstGeom>
+          <a:ln w="12700">
+            <a:solidFill>
+              <a:srgbClr val="5CC8D7"/>
+            </a:solidFill>
+            <a:prstDash val="solid"/>
+          </a:ln>
+        </p:spPr>
+      </p:sp>
+      <p:sp>
+        <p:nvSpPr>
+          <p:cNvPr id="12" name="Text 9"/>
+          <p:cNvSpPr/>
+          <p:nvPr/>
+        </p:nvSpPr>
+        <p:spPr>
+          <a:xfrm>
+            <a:off x="868680" y="1965960"/>
+            <a:ext cx="1159459" cy="274320"/>
           </a:xfrm>
           <a:prstGeom prst="rect">
             <a:avLst/>
@@ -10113,73 +10880,494 @@
           <a:bodyPr wrap="square" lIns="0" tIns="0" rIns="0" bIns="0" rtlCol="0" anchor="ctr"/>
           <a:lstStyle/>
           <a:p>
-            <a:pPr indent="0" marL="0">
-              <a:buNone/>
-            </a:pPr>
-            <a:r>
-              <a:rPr lang="en-US" sz="3400" b="1" dirty="0">
-                <a:solidFill>
-                  <a:srgbClr val="F2B134"/>
+            <a:pPr algn="ctr" indent="0" marL="0">
+              <a:buNone/>
+            </a:pPr>
+            <a:r>
+              <a:rPr lang="en-US" sz="1100" b="1" dirty="0">
+                <a:solidFill>
+                  <a:srgbClr val="5CC8D7"/>
+                </a:solidFill>
+                <a:latin typeface="Arial" pitchFamily="34" charset="0"/>
+                <a:ea typeface="Arial" pitchFamily="34" charset="-122"/>
+                <a:cs typeface="Arial" pitchFamily="34" charset="-120"/>
+              </a:rPr>
+              <a:t>In progress</a:t>
+            </a:r>
+            <a:endParaRPr lang="en-US" sz="1100" dirty="0"/>
+          </a:p>
+        </p:txBody>
+      </p:sp>
+      <p:sp>
+        <p:nvSpPr>
+          <p:cNvPr id="13" name="Text 10"/>
+          <p:cNvSpPr/>
+          <p:nvPr/>
+        </p:nvSpPr>
+        <p:spPr>
+          <a:xfrm>
+            <a:off x="868680" y="2313432"/>
+            <a:ext cx="2996184" cy="238125"/>
+          </a:xfrm>
+          <a:prstGeom prst="rect">
+            <a:avLst/>
+          </a:prstGeom>
+          <a:noFill/>
+          <a:ln/>
+        </p:spPr>
+        <p:txBody>
+          <a:bodyPr wrap="square" lIns="0" tIns="0" rIns="0" bIns="0" rtlCol="0" anchor="t"/>
+          <a:lstStyle/>
+          <a:p>
+            <a:pPr indent="0" marL="0">
+              <a:buNone/>
+            </a:pPr>
+            <a:r>
+              <a:rPr lang="en-US" sz="1500" b="1" dirty="0">
+                <a:solidFill>
+                  <a:srgbClr val="F4F0E8"/>
                 </a:solidFill>
                 <a:latin typeface="Georgia" pitchFamily="34" charset="0"/>
                 <a:ea typeface="Georgia" pitchFamily="34" charset="-122"/>
                 <a:cs typeface="Georgia" pitchFamily="34" charset="-120"/>
               </a:rPr>
-              <a:t>3</a:t>
-            </a:r>
-            <a:endParaRPr lang="en-US" sz="3400" dirty="0"/>
-          </a:p>
-        </p:txBody>
-      </p:sp>
-      <p:sp>
-        <p:nvSpPr>
-          <p:cNvPr id="12" name="Text 9"/>
-          <p:cNvSpPr/>
-          <p:nvPr/>
-        </p:nvSpPr>
-        <p:spPr>
-          <a:xfrm>
-            <a:off x="868680" y="2445258"/>
-            <a:ext cx="2468880" cy="481584"/>
-          </a:xfrm>
-          <a:prstGeom prst="rect">
-            <a:avLst/>
-          </a:prstGeom>
-          <a:noFill/>
-          <a:ln/>
-        </p:spPr>
-        <p:txBody>
-          <a:bodyPr wrap="square" lIns="0" tIns="0" rIns="0" bIns="0" rtlCol="0" anchor="t"/>
-          <a:lstStyle/>
-          <a:p>
-            <a:pPr indent="0" marL="0">
-              <a:buNone/>
-            </a:pPr>
-            <a:r>
-              <a:rPr lang="en-US" sz="1150" dirty="0">
-                <a:solidFill>
-                  <a:srgbClr val="B9BFC9"/>
+              <a:t>P3 · Booking Calendar</a:t>
+            </a:r>
+            <a:endParaRPr lang="en-US" sz="1500" dirty="0"/>
+          </a:p>
+        </p:txBody>
+      </p:sp>
+      <p:sp>
+        <p:nvSpPr>
+          <p:cNvPr id="14" name="Text 11"/>
+          <p:cNvSpPr/>
+          <p:nvPr/>
+        </p:nvSpPr>
+        <p:spPr>
+          <a:xfrm>
+            <a:off x="868680" y="2597277"/>
+            <a:ext cx="2996184" cy="228600"/>
+          </a:xfrm>
+          <a:prstGeom prst="rect">
+            <a:avLst/>
+          </a:prstGeom>
+          <a:noFill/>
+          <a:ln/>
+        </p:spPr>
+        <p:txBody>
+          <a:bodyPr wrap="square" lIns="0" tIns="0" rIns="0" bIns="0" rtlCol="0" anchor="ctr"/>
+          <a:lstStyle/>
+          <a:p>
+            <a:pPr indent="0" marL="0">
+              <a:buNone/>
+            </a:pPr>
+            <a:r>
+              <a:rPr lang="en-US" sz="1100" dirty="0">
+                <a:solidFill>
+                  <a:srgbClr val="929AA8"/>
                 </a:solidFill>
                 <a:latin typeface="Arial" pitchFamily="34" charset="0"/>
                 <a:ea typeface="Arial" pitchFamily="34" charset="-122"/>
                 <a:cs typeface="Arial" pitchFamily="34" charset="-120"/>
               </a:rPr>
-              <a:t>Features reviewed this week</a:t>
-            </a:r>
-            <a:endParaRPr lang="en-US" sz="1150" dirty="0"/>
-          </a:p>
-        </p:txBody>
-      </p:sp>
-      <p:sp>
-        <p:nvSpPr>
-          <p:cNvPr id="13" name="Shape 10"/>
-          <p:cNvSpPr/>
-          <p:nvPr/>
-        </p:nvSpPr>
-        <p:spPr>
-          <a:xfrm>
-            <a:off x="640080" y="3169920"/>
-            <a:ext cx="2926080" cy="1203960"/>
+              <a:t>Owner: Leo Park @Leo</a:t>
+            </a:r>
+            <a:endParaRPr lang="en-US" sz="1100" dirty="0"/>
+          </a:p>
+        </p:txBody>
+      </p:sp>
+      <p:sp>
+        <p:nvSpPr>
+          <p:cNvPr id="15" name="Text 12"/>
+          <p:cNvSpPr/>
+          <p:nvPr/>
+        </p:nvSpPr>
+        <p:spPr>
+          <a:xfrm>
+            <a:off x="868680" y="2871597"/>
+            <a:ext cx="2996184" cy="792480"/>
+          </a:xfrm>
+          <a:prstGeom prst="rect">
+            <a:avLst/>
+          </a:prstGeom>
+          <a:noFill/>
+          <a:ln/>
+        </p:spPr>
+        <p:txBody>
+          <a:bodyPr wrap="square" lIns="0" tIns="0" rIns="0" bIns="0" rtlCol="0" anchor="t"/>
+          <a:lstStyle/>
+          <a:p>
+            <a:pPr indent="0" marL="0">
+              <a:lnSpc>
+                <a:spcPct val="110000"/>
+              </a:lnSpc>
+              <a:buNone/>
+            </a:pPr>
+            <a:r>
+              <a:rPr lang="en-US" sz="1200" dirty="0">
+                <a:solidFill>
+                  <a:srgbClr val="B9BFC9"/>
+                </a:solidFill>
+                <a:latin typeface="Arial" pitchFamily="34" charset="0"/>
+                <a:ea typeface="Arial" pitchFamily="34" charset="-122"/>
+                <a:cs typeface="Arial" pitchFamily="34" charset="-120"/>
+              </a:rPr>
+              <a:t>Patients pick a doctor, a day and a time slot in one screen. Free slots update as other patients book, so nobody is offered a time that is already taken.</a:t>
+            </a:r>
+            <a:endParaRPr lang="en-US" sz="1200" dirty="0"/>
+          </a:p>
+        </p:txBody>
+      </p:sp>
+      <p:sp>
+        <p:nvSpPr>
+          <p:cNvPr id="16" name="Text 13"/>
+          <p:cNvSpPr/>
+          <p:nvPr/>
+        </p:nvSpPr>
+        <p:spPr>
+          <a:xfrm>
+            <a:off x="868680" y="3801237"/>
+            <a:ext cx="2996184" cy="228600"/>
+          </a:xfrm>
+          <a:prstGeom prst="rect">
+            <a:avLst/>
+          </a:prstGeom>
+          <a:noFill/>
+          <a:ln/>
+        </p:spPr>
+        <p:txBody>
+          <a:bodyPr wrap="square" lIns="0" tIns="0" rIns="0" bIns="0" rtlCol="0" anchor="ctr"/>
+          <a:lstStyle/>
+          <a:p>
+            <a:pPr indent="0" marL="0">
+              <a:buNone/>
+            </a:pPr>
+            <a:r>
+              <a:rPr lang="en-US" sz="1100" b="1" dirty="0">
+                <a:solidFill>
+                  <a:srgbClr val="929AA8"/>
+                </a:solidFill>
+                <a:latin typeface="Arial" pitchFamily="34" charset="0"/>
+                <a:ea typeface="Arial" pitchFamily="34" charset="-122"/>
+                <a:cs typeface="Arial" pitchFamily="34" charset="-120"/>
+              </a:rPr>
+              <a:t>Details</a:t>
+            </a:r>
+            <a:endParaRPr lang="en-US" sz="1100" dirty="0"/>
+          </a:p>
+        </p:txBody>
+      </p:sp>
+      <p:sp>
+        <p:nvSpPr>
+          <p:cNvPr id="17" name="Shape 14"/>
+          <p:cNvSpPr/>
+          <p:nvPr/>
+        </p:nvSpPr>
+        <p:spPr>
+          <a:xfrm>
+            <a:off x="868680" y="4130421"/>
+            <a:ext cx="118872" cy="118872"/>
+          </a:xfrm>
+          <a:prstGeom prst="ellipse">
+            <a:avLst/>
+          </a:prstGeom>
+          <a:solidFill>
+            <a:srgbClr val="5CC8D7"/>
+          </a:solidFill>
+          <a:ln/>
+        </p:spPr>
+      </p:sp>
+      <p:sp>
+        <p:nvSpPr>
+          <p:cNvPr id="18" name="Text 15"/>
+          <p:cNvSpPr/>
+          <p:nvPr/>
+        </p:nvSpPr>
+        <p:spPr>
+          <a:xfrm>
+            <a:off x="1115568" y="4075557"/>
+            <a:ext cx="2749296" cy="222504"/>
+          </a:xfrm>
+          <a:prstGeom prst="rect">
+            <a:avLst/>
+          </a:prstGeom>
+          <a:noFill/>
+          <a:ln/>
+        </p:spPr>
+        <p:txBody>
+          <a:bodyPr wrap="square" lIns="0" tIns="0" rIns="0" bIns="0" rtlCol="0" anchor="t"/>
+          <a:lstStyle/>
+          <a:p>
+            <a:pPr indent="0" marL="0">
+              <a:buNone/>
+            </a:pPr>
+            <a:r>
+              <a:rPr lang="en-US" sz="1100" dirty="0">
+                <a:solidFill>
+                  <a:srgbClr val="F4F0E8"/>
+                </a:solidFill>
+                <a:latin typeface="Arial" pitchFamily="34" charset="0"/>
+                <a:ea typeface="Arial" pitchFamily="34" charset="-122"/>
+                <a:cs typeface="Arial" pitchFamily="34" charset="-120"/>
+              </a:rPr>
+              <a:t>Doctor and day picker built</a:t>
+            </a:r>
+            <a:endParaRPr lang="en-US" sz="1100" dirty="0"/>
+          </a:p>
+        </p:txBody>
+      </p:sp>
+      <p:sp>
+        <p:nvSpPr>
+          <p:cNvPr id="19" name="Shape 16"/>
+          <p:cNvSpPr/>
+          <p:nvPr/>
+        </p:nvSpPr>
+        <p:spPr>
+          <a:xfrm>
+            <a:off x="868680" y="4352925"/>
+            <a:ext cx="118872" cy="118872"/>
+          </a:xfrm>
+          <a:prstGeom prst="ellipse">
+            <a:avLst/>
+          </a:prstGeom>
+          <a:solidFill>
+            <a:srgbClr val="5CC8D7"/>
+          </a:solidFill>
+          <a:ln/>
+        </p:spPr>
+      </p:sp>
+      <p:sp>
+        <p:nvSpPr>
+          <p:cNvPr id="20" name="Text 17"/>
+          <p:cNvSpPr/>
+          <p:nvPr/>
+        </p:nvSpPr>
+        <p:spPr>
+          <a:xfrm>
+            <a:off x="1115568" y="4298061"/>
+            <a:ext cx="2749296" cy="222504"/>
+          </a:xfrm>
+          <a:prstGeom prst="rect">
+            <a:avLst/>
+          </a:prstGeom>
+          <a:noFill/>
+          <a:ln/>
+        </p:spPr>
+        <p:txBody>
+          <a:bodyPr wrap="square" lIns="0" tIns="0" rIns="0" bIns="0" rtlCol="0" anchor="t"/>
+          <a:lstStyle/>
+          <a:p>
+            <a:pPr indent="0" marL="0">
+              <a:buNone/>
+            </a:pPr>
+            <a:r>
+              <a:rPr lang="en-US" sz="1100" dirty="0">
+                <a:solidFill>
+                  <a:srgbClr val="F4F0E8"/>
+                </a:solidFill>
+                <a:latin typeface="Arial" pitchFamily="34" charset="0"/>
+                <a:ea typeface="Arial" pitchFamily="34" charset="-122"/>
+                <a:cs typeface="Arial" pitchFamily="34" charset="-120"/>
+              </a:rPr>
+              <a:t>Free time slots shown live</a:t>
+            </a:r>
+            <a:endParaRPr lang="en-US" sz="1100" dirty="0"/>
+          </a:p>
+        </p:txBody>
+      </p:sp>
+      <p:sp>
+        <p:nvSpPr>
+          <p:cNvPr id="21" name="Shape 18"/>
+          <p:cNvSpPr/>
+          <p:nvPr/>
+        </p:nvSpPr>
+        <p:spPr>
+          <a:xfrm>
+            <a:off x="868680" y="4575429"/>
+            <a:ext cx="118872" cy="118872"/>
+          </a:xfrm>
+          <a:prstGeom prst="ellipse">
+            <a:avLst/>
+          </a:prstGeom>
+          <a:ln w="19050">
+            <a:solidFill>
+              <a:srgbClr val="5CC8D7"/>
+            </a:solidFill>
+            <a:prstDash val="solid"/>
+          </a:ln>
+        </p:spPr>
+      </p:sp>
+      <p:sp>
+        <p:nvSpPr>
+          <p:cNvPr id="22" name="Text 19"/>
+          <p:cNvSpPr/>
+          <p:nvPr/>
+        </p:nvSpPr>
+        <p:spPr>
+          <a:xfrm>
+            <a:off x="1115568" y="4520565"/>
+            <a:ext cx="2749296" cy="222504"/>
+          </a:xfrm>
+          <a:prstGeom prst="rect">
+            <a:avLst/>
+          </a:prstGeom>
+          <a:noFill/>
+          <a:ln/>
+        </p:spPr>
+        <p:txBody>
+          <a:bodyPr wrap="square" lIns="0" tIns="0" rIns="0" bIns="0" rtlCol="0" anchor="t"/>
+          <a:lstStyle/>
+          <a:p>
+            <a:pPr indent="0" marL="0">
+              <a:buNone/>
+            </a:pPr>
+            <a:r>
+              <a:rPr lang="en-US" sz="1100" dirty="0">
+                <a:solidFill>
+                  <a:srgbClr val="F4F0E8"/>
+                </a:solidFill>
+                <a:latin typeface="Arial" pitchFamily="34" charset="0"/>
+                <a:ea typeface="Arial" pitchFamily="34" charset="-122"/>
+                <a:cs typeface="Arial" pitchFamily="34" charset="-120"/>
+              </a:rPr>
+              <a:t>Booking confirmation screen</a:t>
+            </a:r>
+            <a:endParaRPr lang="en-US" sz="1100" dirty="0"/>
+          </a:p>
+        </p:txBody>
+      </p:sp>
+      <p:sp>
+        <p:nvSpPr>
+          <p:cNvPr id="23" name="Shape 20"/>
+          <p:cNvSpPr/>
+          <p:nvPr/>
+        </p:nvSpPr>
+        <p:spPr>
+          <a:xfrm>
+            <a:off x="868680" y="4797933"/>
+            <a:ext cx="118872" cy="118872"/>
+          </a:xfrm>
+          <a:prstGeom prst="ellipse">
+            <a:avLst/>
+          </a:prstGeom>
+          <a:ln w="19050">
+            <a:solidFill>
+              <a:srgbClr val="929AA8"/>
+            </a:solidFill>
+            <a:prstDash val="solid"/>
+          </a:ln>
+        </p:spPr>
+      </p:sp>
+      <p:sp>
+        <p:nvSpPr>
+          <p:cNvPr id="24" name="Text 21"/>
+          <p:cNvSpPr/>
+          <p:nvPr/>
+        </p:nvSpPr>
+        <p:spPr>
+          <a:xfrm>
+            <a:off x="1115568" y="4743069"/>
+            <a:ext cx="2749296" cy="222504"/>
+          </a:xfrm>
+          <a:prstGeom prst="rect">
+            <a:avLst/>
+          </a:prstGeom>
+          <a:noFill/>
+          <a:ln/>
+        </p:spPr>
+        <p:txBody>
+          <a:bodyPr wrap="square" lIns="0" tIns="0" rIns="0" bIns="0" rtlCol="0" anchor="t"/>
+          <a:lstStyle/>
+          <a:p>
+            <a:pPr indent="0" marL="0">
+              <a:buNone/>
+            </a:pPr>
+            <a:r>
+              <a:rPr lang="en-US" sz="1100" dirty="0">
+                <a:solidFill>
+                  <a:srgbClr val="929AA8"/>
+                </a:solidFill>
+                <a:latin typeface="Arial" pitchFamily="34" charset="0"/>
+                <a:ea typeface="Arial" pitchFamily="34" charset="-122"/>
+                <a:cs typeface="Arial" pitchFamily="34" charset="-120"/>
+              </a:rPr>
+              <a:t>Rescheduling an existing booking</a:t>
+            </a:r>
+            <a:endParaRPr lang="en-US" sz="1100" dirty="0"/>
+          </a:p>
+        </p:txBody>
+      </p:sp>
+      <p:sp>
+        <p:nvSpPr>
+          <p:cNvPr id="25" name="Shape 22"/>
+          <p:cNvSpPr/>
+          <p:nvPr/>
+        </p:nvSpPr>
+        <p:spPr>
+          <a:xfrm>
+            <a:off x="868680" y="5020437"/>
+            <a:ext cx="118872" cy="118872"/>
+          </a:xfrm>
+          <a:prstGeom prst="ellipse">
+            <a:avLst/>
+          </a:prstGeom>
+          <a:ln w="19050">
+            <a:solidFill>
+              <a:srgbClr val="929AA8"/>
+            </a:solidFill>
+            <a:prstDash val="solid"/>
+          </a:ln>
+        </p:spPr>
+      </p:sp>
+      <p:sp>
+        <p:nvSpPr>
+          <p:cNvPr id="26" name="Text 23"/>
+          <p:cNvSpPr/>
+          <p:nvPr/>
+        </p:nvSpPr>
+        <p:spPr>
+          <a:xfrm>
+            <a:off x="1115568" y="4965573"/>
+            <a:ext cx="2749296" cy="222504"/>
+          </a:xfrm>
+          <a:prstGeom prst="rect">
+            <a:avLst/>
+          </a:prstGeom>
+          <a:noFill/>
+          <a:ln/>
+        </p:spPr>
+        <p:txBody>
+          <a:bodyPr wrap="square" lIns="0" tIns="0" rIns="0" bIns="0" rtlCol="0" anchor="t"/>
+          <a:lstStyle/>
+          <a:p>
+            <a:pPr indent="0" marL="0">
+              <a:buNone/>
+            </a:pPr>
+            <a:r>
+              <a:rPr lang="en-US" sz="1100" dirty="0">
+                <a:solidFill>
+                  <a:srgbClr val="929AA8"/>
+                </a:solidFill>
+                <a:latin typeface="Arial" pitchFamily="34" charset="0"/>
+                <a:ea typeface="Arial" pitchFamily="34" charset="-122"/>
+                <a:cs typeface="Arial" pitchFamily="34" charset="-120"/>
+              </a:rPr>
+              <a:t>Cancellation with clinic notice</a:t>
+            </a:r>
+            <a:endParaRPr lang="en-US" sz="1100" dirty="0"/>
+          </a:p>
+        </p:txBody>
+      </p:sp>
+      <p:sp>
+        <p:nvSpPr>
+          <p:cNvPr id="27" name="Shape 24"/>
+          <p:cNvSpPr/>
+          <p:nvPr/>
+        </p:nvSpPr>
+        <p:spPr>
+          <a:xfrm>
+            <a:off x="4367784" y="1783080"/>
+            <a:ext cx="3453384" cy="4160520"/>
           </a:xfrm>
           <a:prstGeom prst="rect">
             <a:avLst/>
@@ -10192,14 +11380,34 @@
       </p:sp>
       <p:sp>
         <p:nvSpPr>
-          <p:cNvPr id="14" name="Text 11"/>
-          <p:cNvSpPr/>
-          <p:nvPr/>
-        </p:nvSpPr>
-        <p:spPr>
-          <a:xfrm>
-            <a:off x="868680" y="3224784"/>
-            <a:ext cx="2468880" cy="601980"/>
+          <p:cNvPr id="28" name="Shape 25"/>
+          <p:cNvSpPr/>
+          <p:nvPr/>
+        </p:nvSpPr>
+        <p:spPr>
+          <a:xfrm>
+            <a:off x="4596384" y="1965960"/>
+            <a:ext cx="998525" cy="274320"/>
+          </a:xfrm>
+          <a:prstGeom prst="rect">
+            <a:avLst/>
+          </a:prstGeom>
+          <a:solidFill>
+            <a:srgbClr val="5CC8D7"/>
+          </a:solidFill>
+          <a:ln/>
+        </p:spPr>
+      </p:sp>
+      <p:sp>
+        <p:nvSpPr>
+          <p:cNvPr id="29" name="Text 26"/>
+          <p:cNvSpPr/>
+          <p:nvPr/>
+        </p:nvSpPr>
+        <p:spPr>
+          <a:xfrm>
+            <a:off x="4596384" y="1965960"/>
+            <a:ext cx="998525" cy="274320"/>
           </a:xfrm>
           <a:prstGeom prst="rect">
             <a:avLst/>
@@ -10211,11 +11419,50 @@
           <a:bodyPr wrap="square" lIns="0" tIns="0" rIns="0" bIns="0" rtlCol="0" anchor="ctr"/>
           <a:lstStyle/>
           <a:p>
-            <a:pPr indent="0" marL="0">
-              <a:buNone/>
-            </a:pPr>
-            <a:r>
-              <a:rPr lang="en-US" sz="3400" b="1" dirty="0">
+            <a:pPr algn="ctr" indent="0" marL="0">
+              <a:buNone/>
+            </a:pPr>
+            <a:r>
+              <a:rPr lang="en-US" sz="1100" b="1" dirty="0">
+                <a:solidFill>
+                  <a:srgbClr val="12161C"/>
+                </a:solidFill>
+                <a:latin typeface="Arial" pitchFamily="34" charset="0"/>
+                <a:ea typeface="Arial" pitchFamily="34" charset="-122"/>
+                <a:cs typeface="Arial" pitchFamily="34" charset="-120"/>
+              </a:rPr>
+              <a:t>Completed</a:t>
+            </a:r>
+            <a:endParaRPr lang="en-US" sz="1100" dirty="0"/>
+          </a:p>
+        </p:txBody>
+      </p:sp>
+      <p:sp>
+        <p:nvSpPr>
+          <p:cNvPr id="30" name="Text 27"/>
+          <p:cNvSpPr/>
+          <p:nvPr/>
+        </p:nvSpPr>
+        <p:spPr>
+          <a:xfrm>
+            <a:off x="4596384" y="2313432"/>
+            <a:ext cx="2996184" cy="476250"/>
+          </a:xfrm>
+          <a:prstGeom prst="rect">
+            <a:avLst/>
+          </a:prstGeom>
+          <a:noFill/>
+          <a:ln/>
+        </p:spPr>
+        <p:txBody>
+          <a:bodyPr wrap="square" lIns="0" tIns="0" rIns="0" bIns="0" rtlCol="0" anchor="t"/>
+          <a:lstStyle/>
+          <a:p>
+            <a:pPr indent="0" marL="0">
+              <a:buNone/>
+            </a:pPr>
+            <a:r>
+              <a:rPr lang="en-US" sz="1500" b="1" dirty="0">
                 <a:solidFill>
                   <a:srgbClr val="F4F0E8"/>
                 </a:solidFill>
@@ -10223,61 +11470,378 @@
                 <a:ea typeface="Georgia" pitchFamily="34" charset="-122"/>
                 <a:cs typeface="Georgia" pitchFamily="34" charset="-120"/>
               </a:rPr>
-              <a:t>2</a:t>
-            </a:r>
-            <a:endParaRPr lang="en-US" sz="3400" dirty="0"/>
-          </a:p>
-        </p:txBody>
-      </p:sp>
-      <p:sp>
-        <p:nvSpPr>
-          <p:cNvPr id="15" name="Text 12"/>
-          <p:cNvSpPr/>
-          <p:nvPr/>
-        </p:nvSpPr>
-        <p:spPr>
-          <a:xfrm>
-            <a:off x="868680" y="3832098"/>
-            <a:ext cx="2468880" cy="481584"/>
-          </a:xfrm>
-          <a:prstGeom prst="rect">
-            <a:avLst/>
-          </a:prstGeom>
-          <a:noFill/>
-          <a:ln/>
-        </p:spPr>
-        <p:txBody>
-          <a:bodyPr wrap="square" lIns="0" tIns="0" rIns="0" bIns="0" rtlCol="0" anchor="t"/>
-          <a:lstStyle/>
-          <a:p>
-            <a:pPr indent="0" marL="0">
-              <a:buNone/>
-            </a:pPr>
-            <a:r>
-              <a:rPr lang="en-US" sz="1150" dirty="0">
-                <a:solidFill>
-                  <a:srgbClr val="B9BFC9"/>
+              <a:t>P2 · Clinic Search and Maps</a:t>
+            </a:r>
+            <a:endParaRPr lang="en-US" sz="1500" dirty="0"/>
+          </a:p>
+        </p:txBody>
+      </p:sp>
+      <p:sp>
+        <p:nvSpPr>
+          <p:cNvPr id="31" name="Text 28"/>
+          <p:cNvSpPr/>
+          <p:nvPr/>
+        </p:nvSpPr>
+        <p:spPr>
+          <a:xfrm>
+            <a:off x="4596384" y="2835402"/>
+            <a:ext cx="2996184" cy="228600"/>
+          </a:xfrm>
+          <a:prstGeom prst="rect">
+            <a:avLst/>
+          </a:prstGeom>
+          <a:noFill/>
+          <a:ln/>
+        </p:spPr>
+        <p:txBody>
+          <a:bodyPr wrap="square" lIns="0" tIns="0" rIns="0" bIns="0" rtlCol="0" anchor="ctr"/>
+          <a:lstStyle/>
+          <a:p>
+            <a:pPr indent="0" marL="0">
+              <a:buNone/>
+            </a:pPr>
+            <a:r>
+              <a:rPr lang="en-US" sz="1100" dirty="0">
+                <a:solidFill>
+                  <a:srgbClr val="929AA8"/>
                 </a:solidFill>
                 <a:latin typeface="Arial" pitchFamily="34" charset="0"/>
                 <a:ea typeface="Arial" pitchFamily="34" charset="-122"/>
                 <a:cs typeface="Arial" pitchFamily="34" charset="-120"/>
               </a:rPr>
-              <a:t>Approved for release</a:t>
-            </a:r>
-            <a:endParaRPr lang="en-US" sz="1150" dirty="0"/>
-          </a:p>
-        </p:txBody>
-      </p:sp>
-      <p:sp>
-        <p:nvSpPr>
-          <p:cNvPr id="16" name="Shape 13"/>
-          <p:cNvSpPr/>
-          <p:nvPr/>
-        </p:nvSpPr>
-        <p:spPr>
-          <a:xfrm>
-            <a:off x="640080" y="4556760"/>
-            <a:ext cx="2926080" cy="1203960"/>
+              <a:t>Owner: Leo Park @Leo</a:t>
+            </a:r>
+            <a:endParaRPr lang="en-US" sz="1100" dirty="0"/>
+          </a:p>
+        </p:txBody>
+      </p:sp>
+      <p:sp>
+        <p:nvSpPr>
+          <p:cNvPr id="32" name="Text 29"/>
+          <p:cNvSpPr/>
+          <p:nvPr/>
+        </p:nvSpPr>
+        <p:spPr>
+          <a:xfrm>
+            <a:off x="4596384" y="3109722"/>
+            <a:ext cx="2996184" cy="792480"/>
+          </a:xfrm>
+          <a:prstGeom prst="rect">
+            <a:avLst/>
+          </a:prstGeom>
+          <a:noFill/>
+          <a:ln/>
+        </p:spPr>
+        <p:txBody>
+          <a:bodyPr wrap="square" lIns="0" tIns="0" rIns="0" bIns="0" rtlCol="0" anchor="t"/>
+          <a:lstStyle/>
+          <a:p>
+            <a:pPr indent="0" marL="0">
+              <a:lnSpc>
+                <a:spcPct val="110000"/>
+              </a:lnSpc>
+              <a:buNone/>
+            </a:pPr>
+            <a:r>
+              <a:rPr lang="en-US" sz="1200" dirty="0">
+                <a:solidFill>
+                  <a:srgbClr val="B9BFC9"/>
+                </a:solidFill>
+                <a:latin typeface="Arial" pitchFamily="34" charset="0"/>
+                <a:ea typeface="Arial" pitchFamily="34" charset="-122"/>
+                <a:cs typeface="Arial" pitchFamily="34" charset="-120"/>
+              </a:rPr>
+              <a:t>Patients find nearby clinics by name, specialty or distance and open directions in their maps app. Reviewed and approved this week.</a:t>
+            </a:r>
+            <a:endParaRPr lang="en-US" sz="1200" dirty="0"/>
+          </a:p>
+        </p:txBody>
+      </p:sp>
+      <p:sp>
+        <p:nvSpPr>
+          <p:cNvPr id="33" name="Text 30"/>
+          <p:cNvSpPr/>
+          <p:nvPr/>
+        </p:nvSpPr>
+        <p:spPr>
+          <a:xfrm>
+            <a:off x="4596384" y="4039362"/>
+            <a:ext cx="2996184" cy="228600"/>
+          </a:xfrm>
+          <a:prstGeom prst="rect">
+            <a:avLst/>
+          </a:prstGeom>
+          <a:noFill/>
+          <a:ln/>
+        </p:spPr>
+        <p:txBody>
+          <a:bodyPr wrap="square" lIns="0" tIns="0" rIns="0" bIns="0" rtlCol="0" anchor="ctr"/>
+          <a:lstStyle/>
+          <a:p>
+            <a:pPr indent="0" marL="0">
+              <a:buNone/>
+            </a:pPr>
+            <a:r>
+              <a:rPr lang="en-US" sz="1100" b="1" dirty="0">
+                <a:solidFill>
+                  <a:srgbClr val="929AA8"/>
+                </a:solidFill>
+                <a:latin typeface="Arial" pitchFamily="34" charset="0"/>
+                <a:ea typeface="Arial" pitchFamily="34" charset="-122"/>
+                <a:cs typeface="Arial" pitchFamily="34" charset="-120"/>
+              </a:rPr>
+              <a:t>Details</a:t>
+            </a:r>
+            <a:endParaRPr lang="en-US" sz="1100" dirty="0"/>
+          </a:p>
+        </p:txBody>
+      </p:sp>
+      <p:sp>
+        <p:nvSpPr>
+          <p:cNvPr id="34" name="Shape 31"/>
+          <p:cNvSpPr/>
+          <p:nvPr/>
+        </p:nvSpPr>
+        <p:spPr>
+          <a:xfrm>
+            <a:off x="4596384" y="4368546"/>
+            <a:ext cx="118872" cy="118872"/>
+          </a:xfrm>
+          <a:prstGeom prst="ellipse">
+            <a:avLst/>
+          </a:prstGeom>
+          <a:solidFill>
+            <a:srgbClr val="5CC8D7"/>
+          </a:solidFill>
+          <a:ln/>
+        </p:spPr>
+      </p:sp>
+      <p:sp>
+        <p:nvSpPr>
+          <p:cNvPr id="35" name="Text 32"/>
+          <p:cNvSpPr/>
+          <p:nvPr/>
+        </p:nvSpPr>
+        <p:spPr>
+          <a:xfrm>
+            <a:off x="4843272" y="4313682"/>
+            <a:ext cx="2749296" cy="222504"/>
+          </a:xfrm>
+          <a:prstGeom prst="rect">
+            <a:avLst/>
+          </a:prstGeom>
+          <a:noFill/>
+          <a:ln/>
+        </p:spPr>
+        <p:txBody>
+          <a:bodyPr wrap="square" lIns="0" tIns="0" rIns="0" bIns="0" rtlCol="0" anchor="t"/>
+          <a:lstStyle/>
+          <a:p>
+            <a:pPr indent="0" marL="0">
+              <a:buNone/>
+            </a:pPr>
+            <a:r>
+              <a:rPr lang="en-US" sz="1100" dirty="0">
+                <a:solidFill>
+                  <a:srgbClr val="F4F0E8"/>
+                </a:solidFill>
+                <a:latin typeface="Arial" pitchFamily="34" charset="0"/>
+                <a:ea typeface="Arial" pitchFamily="34" charset="-122"/>
+                <a:cs typeface="Arial" pitchFamily="34" charset="-120"/>
+              </a:rPr>
+              <a:t>Search by name and specialty</a:t>
+            </a:r>
+            <a:endParaRPr lang="en-US" sz="1100" dirty="0"/>
+          </a:p>
+        </p:txBody>
+      </p:sp>
+      <p:sp>
+        <p:nvSpPr>
+          <p:cNvPr id="36" name="Shape 33"/>
+          <p:cNvSpPr/>
+          <p:nvPr/>
+        </p:nvSpPr>
+        <p:spPr>
+          <a:xfrm>
+            <a:off x="4596384" y="4591050"/>
+            <a:ext cx="118872" cy="118872"/>
+          </a:xfrm>
+          <a:prstGeom prst="ellipse">
+            <a:avLst/>
+          </a:prstGeom>
+          <a:solidFill>
+            <a:srgbClr val="5CC8D7"/>
+          </a:solidFill>
+          <a:ln/>
+        </p:spPr>
+      </p:sp>
+      <p:sp>
+        <p:nvSpPr>
+          <p:cNvPr id="37" name="Text 34"/>
+          <p:cNvSpPr/>
+          <p:nvPr/>
+        </p:nvSpPr>
+        <p:spPr>
+          <a:xfrm>
+            <a:off x="4843272" y="4536186"/>
+            <a:ext cx="2749296" cy="390144"/>
+          </a:xfrm>
+          <a:prstGeom prst="rect">
+            <a:avLst/>
+          </a:prstGeom>
+          <a:noFill/>
+          <a:ln/>
+        </p:spPr>
+        <p:txBody>
+          <a:bodyPr wrap="square" lIns="0" tIns="0" rIns="0" bIns="0" rtlCol="0" anchor="t"/>
+          <a:lstStyle/>
+          <a:p>
+            <a:pPr indent="0" marL="0">
+              <a:buNone/>
+            </a:pPr>
+            <a:r>
+              <a:rPr lang="en-US" sz="1100" dirty="0">
+                <a:solidFill>
+                  <a:srgbClr val="F4F0E8"/>
+                </a:solidFill>
+                <a:latin typeface="Arial" pitchFamily="34" charset="0"/>
+                <a:ea typeface="Arial" pitchFamily="34" charset="-122"/>
+                <a:cs typeface="Arial" pitchFamily="34" charset="-120"/>
+              </a:rPr>
+              <a:t>Distance sorting from the patient's location</a:t>
+            </a:r>
+            <a:endParaRPr lang="en-US" sz="1100" dirty="0"/>
+          </a:p>
+        </p:txBody>
+      </p:sp>
+      <p:sp>
+        <p:nvSpPr>
+          <p:cNvPr id="38" name="Shape 35"/>
+          <p:cNvSpPr/>
+          <p:nvPr/>
+        </p:nvSpPr>
+        <p:spPr>
+          <a:xfrm>
+            <a:off x="4596384" y="4981194"/>
+            <a:ext cx="118872" cy="118872"/>
+          </a:xfrm>
+          <a:prstGeom prst="ellipse">
+            <a:avLst/>
+          </a:prstGeom>
+          <a:solidFill>
+            <a:srgbClr val="5CC8D7"/>
+          </a:solidFill>
+          <a:ln/>
+        </p:spPr>
+      </p:sp>
+      <p:sp>
+        <p:nvSpPr>
+          <p:cNvPr id="39" name="Text 36"/>
+          <p:cNvSpPr/>
+          <p:nvPr/>
+        </p:nvSpPr>
+        <p:spPr>
+          <a:xfrm>
+            <a:off x="4843272" y="4926330"/>
+            <a:ext cx="2749296" cy="222504"/>
+          </a:xfrm>
+          <a:prstGeom prst="rect">
+            <a:avLst/>
+          </a:prstGeom>
+          <a:noFill/>
+          <a:ln/>
+        </p:spPr>
+        <p:txBody>
+          <a:bodyPr wrap="square" lIns="0" tIns="0" rIns="0" bIns="0" rtlCol="0" anchor="t"/>
+          <a:lstStyle/>
+          <a:p>
+            <a:pPr indent="0" marL="0">
+              <a:buNone/>
+            </a:pPr>
+            <a:r>
+              <a:rPr lang="en-US" sz="1100" dirty="0">
+                <a:solidFill>
+                  <a:srgbClr val="F4F0E8"/>
+                </a:solidFill>
+                <a:latin typeface="Arial" pitchFamily="34" charset="0"/>
+                <a:ea typeface="Arial" pitchFamily="34" charset="-122"/>
+                <a:cs typeface="Arial" pitchFamily="34" charset="-120"/>
+              </a:rPr>
+              <a:t>Directions open in the maps app</a:t>
+            </a:r>
+            <a:endParaRPr lang="en-US" sz="1100" dirty="0"/>
+          </a:p>
+        </p:txBody>
+      </p:sp>
+      <p:sp>
+        <p:nvSpPr>
+          <p:cNvPr id="40" name="Shape 37"/>
+          <p:cNvSpPr/>
+          <p:nvPr/>
+        </p:nvSpPr>
+        <p:spPr>
+          <a:xfrm>
+            <a:off x="4596384" y="5203698"/>
+            <a:ext cx="118872" cy="118872"/>
+          </a:xfrm>
+          <a:prstGeom prst="ellipse">
+            <a:avLst/>
+          </a:prstGeom>
+          <a:solidFill>
+            <a:srgbClr val="5CC8D7"/>
+          </a:solidFill>
+          <a:ln/>
+        </p:spPr>
+      </p:sp>
+      <p:sp>
+        <p:nvSpPr>
+          <p:cNvPr id="41" name="Text 38"/>
+          <p:cNvSpPr/>
+          <p:nvPr/>
+        </p:nvSpPr>
+        <p:spPr>
+          <a:xfrm>
+            <a:off x="4843272" y="5148834"/>
+            <a:ext cx="2749296" cy="222504"/>
+          </a:xfrm>
+          <a:prstGeom prst="rect">
+            <a:avLst/>
+          </a:prstGeom>
+          <a:noFill/>
+          <a:ln/>
+        </p:spPr>
+        <p:txBody>
+          <a:bodyPr wrap="square" lIns="0" tIns="0" rIns="0" bIns="0" rtlCol="0" anchor="t"/>
+          <a:lstStyle/>
+          <a:p>
+            <a:pPr indent="0" marL="0">
+              <a:buNone/>
+            </a:pPr>
+            <a:r>
+              <a:rPr lang="en-US" sz="1100" dirty="0">
+                <a:solidFill>
+                  <a:srgbClr val="F4F0E8"/>
+                </a:solidFill>
+                <a:latin typeface="Arial" pitchFamily="34" charset="0"/>
+                <a:ea typeface="Arial" pitchFamily="34" charset="-122"/>
+                <a:cs typeface="Arial" pitchFamily="34" charset="-120"/>
+              </a:rPr>
+              <a:t>Works offline for recent searches</a:t>
+            </a:r>
+            <a:endParaRPr lang="en-US" sz="1100" dirty="0"/>
+          </a:p>
+        </p:txBody>
+      </p:sp>
+      <p:sp>
+        <p:nvSpPr>
+          <p:cNvPr id="42" name="Shape 39"/>
+          <p:cNvSpPr/>
+          <p:nvPr/>
+        </p:nvSpPr>
+        <p:spPr>
+          <a:xfrm>
+            <a:off x="8095488" y="1783080"/>
+            <a:ext cx="3453384" cy="4160520"/>
           </a:xfrm>
           <a:prstGeom prst="rect">
             <a:avLst/>
@@ -10290,14 +11854,36 @@
       </p:sp>
       <p:sp>
         <p:nvSpPr>
-          <p:cNvPr id="17" name="Text 14"/>
-          <p:cNvSpPr/>
-          <p:nvPr/>
-        </p:nvSpPr>
-        <p:spPr>
-          <a:xfrm>
-            <a:off x="868680" y="4611624"/>
-            <a:ext cx="2468880" cy="601980"/>
+          <p:cNvPr id="43" name="Shape 40"/>
+          <p:cNvSpPr/>
+          <p:nvPr/>
+        </p:nvSpPr>
+        <p:spPr>
+          <a:xfrm>
+            <a:off x="8324088" y="1965960"/>
+            <a:ext cx="1159459" cy="274320"/>
+          </a:xfrm>
+          <a:prstGeom prst="rect">
+            <a:avLst/>
+          </a:prstGeom>
+          <a:ln w="12700">
+            <a:solidFill>
+              <a:srgbClr val="929AA8"/>
+            </a:solidFill>
+            <a:prstDash val="solid"/>
+          </a:ln>
+        </p:spPr>
+      </p:sp>
+      <p:sp>
+        <p:nvSpPr>
+          <p:cNvPr id="44" name="Text 41"/>
+          <p:cNvSpPr/>
+          <p:nvPr/>
+        </p:nvSpPr>
+        <p:spPr>
+          <a:xfrm>
+            <a:off x="8324088" y="1965960"/>
+            <a:ext cx="1159459" cy="274320"/>
           </a:xfrm>
           <a:prstGeom prst="rect">
             <a:avLst/>
@@ -10309,11 +11895,50 @@
           <a:bodyPr wrap="square" lIns="0" tIns="0" rIns="0" bIns="0" rtlCol="0" anchor="ctr"/>
           <a:lstStyle/>
           <a:p>
-            <a:pPr indent="0" marL="0">
-              <a:buNone/>
-            </a:pPr>
-            <a:r>
-              <a:rPr lang="en-US" sz="3400" b="1" dirty="0">
+            <a:pPr algn="ctr" indent="0" marL="0">
+              <a:buNone/>
+            </a:pPr>
+            <a:r>
+              <a:rPr lang="en-US" sz="1100" b="1" dirty="0">
+                <a:solidFill>
+                  <a:srgbClr val="929AA8"/>
+                </a:solidFill>
+                <a:latin typeface="Arial" pitchFamily="34" charset="0"/>
+                <a:ea typeface="Arial" pitchFamily="34" charset="-122"/>
+                <a:cs typeface="Arial" pitchFamily="34" charset="-120"/>
+              </a:rPr>
+              <a:t>Not started</a:t>
+            </a:r>
+            <a:endParaRPr lang="en-US" sz="1100" dirty="0"/>
+          </a:p>
+        </p:txBody>
+      </p:sp>
+      <p:sp>
+        <p:nvSpPr>
+          <p:cNvPr id="45" name="Text 42"/>
+          <p:cNvSpPr/>
+          <p:nvPr/>
+        </p:nvSpPr>
+        <p:spPr>
+          <a:xfrm>
+            <a:off x="8324088" y="2313432"/>
+            <a:ext cx="2996184" cy="238125"/>
+          </a:xfrm>
+          <a:prstGeom prst="rect">
+            <a:avLst/>
+          </a:prstGeom>
+          <a:noFill/>
+          <a:ln/>
+        </p:spPr>
+        <p:txBody>
+          <a:bodyPr wrap="square" lIns="0" tIns="0" rIns="0" bIns="0" rtlCol="0" anchor="t"/>
+          <a:lstStyle/>
+          <a:p>
+            <a:pPr indent="0" marL="0">
+              <a:buNone/>
+            </a:pPr>
+            <a:r>
+              <a:rPr lang="en-US" sz="1500" b="1" dirty="0">
                 <a:solidFill>
                   <a:srgbClr val="F4F0E8"/>
                 </a:solidFill>
@@ -10321,120 +11946,61 @@
                 <a:ea typeface="Georgia" pitchFamily="34" charset="-122"/>
                 <a:cs typeface="Georgia" pitchFamily="34" charset="-120"/>
               </a:rPr>
-              <a:t>212</a:t>
-            </a:r>
-            <a:endParaRPr lang="en-US" sz="3400" dirty="0"/>
-          </a:p>
-        </p:txBody>
-      </p:sp>
-      <p:sp>
-        <p:nvSpPr>
-          <p:cNvPr id="18" name="Text 15"/>
-          <p:cNvSpPr/>
-          <p:nvPr/>
-        </p:nvSpPr>
-        <p:spPr>
-          <a:xfrm>
-            <a:off x="868680" y="5218938"/>
-            <a:ext cx="2468880" cy="481584"/>
-          </a:xfrm>
-          <a:prstGeom prst="rect">
-            <a:avLst/>
-          </a:prstGeom>
-          <a:noFill/>
-          <a:ln/>
-        </p:spPr>
-        <p:txBody>
-          <a:bodyPr wrap="square" lIns="0" tIns="0" rIns="0" bIns="0" rtlCol="0" anchor="t"/>
-          <a:lstStyle/>
-          <a:p>
-            <a:pPr indent="0" marL="0">
-              <a:buNone/>
-            </a:pPr>
-            <a:r>
-              <a:rPr lang="en-US" sz="1150" dirty="0">
-                <a:solidFill>
-                  <a:srgbClr val="B9BFC9"/>
+              <a:t>P4 · Payments and Receipts</a:t>
+            </a:r>
+            <a:endParaRPr lang="en-US" sz="1500" dirty="0"/>
+          </a:p>
+        </p:txBody>
+      </p:sp>
+      <p:sp>
+        <p:nvSpPr>
+          <p:cNvPr id="46" name="Text 43"/>
+          <p:cNvSpPr/>
+          <p:nvPr/>
+        </p:nvSpPr>
+        <p:spPr>
+          <a:xfrm>
+            <a:off x="8324088" y="2597277"/>
+            <a:ext cx="2996184" cy="228600"/>
+          </a:xfrm>
+          <a:prstGeom prst="rect">
+            <a:avLst/>
+          </a:prstGeom>
+          <a:noFill/>
+          <a:ln/>
+        </p:spPr>
+        <p:txBody>
+          <a:bodyPr wrap="square" lIns="0" tIns="0" rIns="0" bIns="0" rtlCol="0" anchor="ctr"/>
+          <a:lstStyle/>
+          <a:p>
+            <a:pPr indent="0" marL="0">
+              <a:buNone/>
+            </a:pPr>
+            <a:r>
+              <a:rPr lang="en-US" sz="1100" dirty="0">
+                <a:solidFill>
+                  <a:srgbClr val="929AA8"/>
                 </a:solidFill>
                 <a:latin typeface="Arial" pitchFamily="34" charset="0"/>
                 <a:ea typeface="Arial" pitchFamily="34" charset="-122"/>
                 <a:cs typeface="Arial" pitchFamily="34" charset="-120"/>
               </a:rPr>
-              <a:t>Automated tests passing (100%)</a:t>
-            </a:r>
-            <a:endParaRPr lang="en-US" sz="1150" dirty="0"/>
-          </a:p>
-        </p:txBody>
-      </p:sp>
-      <p:sp>
-        <p:nvSpPr>
-          <p:cNvPr id="19" name="Shape 16"/>
-          <p:cNvSpPr/>
-          <p:nvPr/>
-        </p:nvSpPr>
-        <p:spPr>
-          <a:xfrm>
-            <a:off x="3840480" y="1783080"/>
-            <a:ext cx="7708392" cy="1234440"/>
-          </a:xfrm>
-          <a:prstGeom prst="rect">
-            <a:avLst/>
-          </a:prstGeom>
-          <a:solidFill>
-            <a:srgbClr val="23262C"/>
-          </a:solidFill>
-          <a:ln/>
-        </p:spPr>
-      </p:sp>
-      <p:sp>
-        <p:nvSpPr>
-          <p:cNvPr id="20" name="Text 17"/>
-          <p:cNvSpPr/>
-          <p:nvPr/>
-        </p:nvSpPr>
-        <p:spPr>
-          <a:xfrm>
-            <a:off x="4069080" y="1892808"/>
-            <a:ext cx="5330952" cy="274320"/>
-          </a:xfrm>
-          <a:prstGeom prst="rect">
-            <a:avLst/>
-          </a:prstGeom>
-          <a:noFill/>
-          <a:ln/>
-        </p:spPr>
-        <p:txBody>
-          <a:bodyPr wrap="square" lIns="0" tIns="0" rIns="0" bIns="0" rtlCol="0" anchor="ctr"/>
-          <a:lstStyle/>
-          <a:p>
-            <a:pPr indent="0" marL="0">
-              <a:buNone/>
-            </a:pPr>
-            <a:r>
-              <a:rPr lang="en-US" sz="1300" b="1" dirty="0">
-                <a:solidFill>
-                  <a:srgbClr val="F4F0E8"/>
-                </a:solidFill>
-                <a:latin typeface="Georgia" pitchFamily="34" charset="0"/>
-                <a:ea typeface="Georgia" pitchFamily="34" charset="-122"/>
-                <a:cs typeface="Georgia" pitchFamily="34" charset="-120"/>
-              </a:rPr>
-              <a:t>Appointment Reminders</a:t>
-            </a:r>
-            <a:endParaRPr lang="en-US" sz="1300" dirty="0"/>
-          </a:p>
-        </p:txBody>
-      </p:sp>
-      <p:sp>
-        <p:nvSpPr>
-          <p:cNvPr id="21" name="Text 18"/>
-          <p:cNvSpPr/>
-          <p:nvPr/>
-        </p:nvSpPr>
-        <p:spPr>
-          <a:xfrm>
-            <a:off x="4069080" y="2194560"/>
-            <a:ext cx="7251192" cy="731520"/>
+              <a:t>Owner: Leo Park @Leo</a:t>
+            </a:r>
+            <a:endParaRPr lang="en-US" sz="1100" dirty="0"/>
+          </a:p>
+        </p:txBody>
+      </p:sp>
+      <p:sp>
+        <p:nvSpPr>
+          <p:cNvPr id="47" name="Text 44"/>
+          <p:cNvSpPr/>
+          <p:nvPr/>
+        </p:nvSpPr>
+        <p:spPr>
+          <a:xfrm>
+            <a:off x="8324088" y="2871597"/>
+            <a:ext cx="2996184" cy="792480"/>
           </a:xfrm>
           <a:prstGeom prst="rect">
             <a:avLst/>
@@ -10448,7 +12014,7 @@
           <a:p>
             <a:pPr indent="0" marL="0">
               <a:lnSpc>
-                <a:spcPct val="105000"/>
+                <a:spcPct val="110000"/>
               </a:lnSpc>
               <a:buNone/>
             </a:pPr>
@@ -10461,7 +12027,7 @@
                 <a:ea typeface="Arial" pitchFamily="34" charset="-122"/>
                 <a:cs typeface="Arial" pitchFamily="34" charset="-120"/>
               </a:rPr>
-              <a:t>Clinics can send SMS and email reminders 24 hours and 2 hours before each appointment.</a:t>
+              <a:t>Patients pay the booking deposit in the app and get a receipt by email. Starts after the booking calendar is approved.</a:t>
             </a:r>
             <a:endParaRPr lang="en-US" sz="1200" dirty="0"/>
           </a:p>
@@ -10469,34 +12035,14 @@
       </p:sp>
       <p:sp>
         <p:nvSpPr>
-          <p:cNvPr id="22" name="Shape 19"/>
-          <p:cNvSpPr/>
-          <p:nvPr/>
-        </p:nvSpPr>
-        <p:spPr>
-          <a:xfrm>
-            <a:off x="10402214" y="1892808"/>
-            <a:ext cx="918058" cy="274320"/>
-          </a:xfrm>
-          <a:prstGeom prst="rect">
-            <a:avLst/>
-          </a:prstGeom>
-          <a:solidFill>
-            <a:srgbClr val="F2B134"/>
-          </a:solidFill>
-          <a:ln/>
-        </p:spPr>
-      </p:sp>
-      <p:sp>
-        <p:nvSpPr>
-          <p:cNvPr id="23" name="Text 20"/>
-          <p:cNvSpPr/>
-          <p:nvPr/>
-        </p:nvSpPr>
-        <p:spPr>
-          <a:xfrm>
-            <a:off x="10402214" y="1892808"/>
-            <a:ext cx="918058" cy="274320"/>
+          <p:cNvPr id="48" name="Text 45"/>
+          <p:cNvSpPr/>
+          <p:nvPr/>
+        </p:nvSpPr>
+        <p:spPr>
+          <a:xfrm>
+            <a:off x="8324088" y="3801237"/>
+            <a:ext cx="2996184" cy="228600"/>
           </a:xfrm>
           <a:prstGeom prst="rect">
             <a:avLst/>
@@ -10508,19 +12054,19 @@
           <a:bodyPr wrap="square" lIns="0" tIns="0" rIns="0" bIns="0" rtlCol="0" anchor="ctr"/>
           <a:lstStyle/>
           <a:p>
-            <a:pPr algn="ctr" indent="0" marL="0">
+            <a:pPr indent="0" marL="0">
               <a:buNone/>
             </a:pPr>
             <a:r>
               <a:rPr lang="en-US" sz="1100" b="1" dirty="0">
                 <a:solidFill>
-                  <a:srgbClr val="12161C"/>
+                  <a:srgbClr val="929AA8"/>
                 </a:solidFill>
                 <a:latin typeface="Arial" pitchFamily="34" charset="0"/>
                 <a:ea typeface="Arial" pitchFamily="34" charset="-122"/>
                 <a:cs typeface="Arial" pitchFamily="34" charset="-120"/>
               </a:rPr>
-              <a:t>Verified</a:t>
+              <a:t>Details</a:t>
             </a:r>
             <a:endParaRPr lang="en-US" sz="1100" dirty="0"/>
           </a:p>
@@ -10528,73 +12074,36 @@
       </p:sp>
       <p:sp>
         <p:nvSpPr>
-          <p:cNvPr id="24" name="Shape 21"/>
-          <p:cNvSpPr/>
-          <p:nvPr/>
-        </p:nvSpPr>
-        <p:spPr>
-          <a:xfrm>
-            <a:off x="3840480" y="3154680"/>
-            <a:ext cx="7708392" cy="1234440"/>
-          </a:xfrm>
-          <a:prstGeom prst="rect">
-            <a:avLst/>
-          </a:prstGeom>
-          <a:solidFill>
-            <a:srgbClr val="23262C"/>
-          </a:solidFill>
-          <a:ln/>
-        </p:spPr>
-      </p:sp>
-      <p:sp>
-        <p:nvSpPr>
-          <p:cNvPr id="25" name="Text 22"/>
-          <p:cNvSpPr/>
-          <p:nvPr/>
-        </p:nvSpPr>
-        <p:spPr>
-          <a:xfrm>
-            <a:off x="4069080" y="3264408"/>
-            <a:ext cx="5330952" cy="274320"/>
-          </a:xfrm>
-          <a:prstGeom prst="rect">
-            <a:avLst/>
-          </a:prstGeom>
-          <a:noFill/>
-          <a:ln/>
-        </p:spPr>
-        <p:txBody>
-          <a:bodyPr wrap="square" lIns="0" tIns="0" rIns="0" bIns="0" rtlCol="0" anchor="ctr"/>
-          <a:lstStyle/>
-          <a:p>
-            <a:pPr indent="0" marL="0">
-              <a:buNone/>
-            </a:pPr>
-            <a:r>
-              <a:rPr lang="en-US" sz="1300" b="1" dirty="0">
-                <a:solidFill>
-                  <a:srgbClr val="F4F0E8"/>
-                </a:solidFill>
-                <a:latin typeface="Georgia" pitchFamily="34" charset="0"/>
-                <a:ea typeface="Georgia" pitchFamily="34" charset="-122"/>
-                <a:cs typeface="Georgia" pitchFamily="34" charset="-120"/>
-              </a:rPr>
-              <a:t>Reliability</a:t>
-            </a:r>
-            <a:endParaRPr lang="en-US" sz="1300" dirty="0"/>
-          </a:p>
-        </p:txBody>
-      </p:sp>
-      <p:sp>
-        <p:nvSpPr>
-          <p:cNvPr id="26" name="Text 23"/>
-          <p:cNvSpPr/>
-          <p:nvPr/>
-        </p:nvSpPr>
-        <p:spPr>
-          <a:xfrm>
-            <a:off x="4069080" y="3566160"/>
-            <a:ext cx="7251192" cy="731520"/>
+          <p:cNvPr id="49" name="Shape 46"/>
+          <p:cNvSpPr/>
+          <p:nvPr/>
+        </p:nvSpPr>
+        <p:spPr>
+          <a:xfrm>
+            <a:off x="8324088" y="4130421"/>
+            <a:ext cx="118872" cy="118872"/>
+          </a:xfrm>
+          <a:prstGeom prst="ellipse">
+            <a:avLst/>
+          </a:prstGeom>
+          <a:ln w="19050">
+            <a:solidFill>
+              <a:srgbClr val="929AA8"/>
+            </a:solidFill>
+            <a:prstDash val="solid"/>
+          </a:ln>
+        </p:spPr>
+      </p:sp>
+      <p:sp>
+        <p:nvSpPr>
+          <p:cNvPr id="50" name="Text 47"/>
+          <p:cNvSpPr/>
+          <p:nvPr/>
+        </p:nvSpPr>
+        <p:spPr>
+          <a:xfrm>
+            <a:off x="8570976" y="4075557"/>
+            <a:ext cx="2749296" cy="222504"/>
           </a:xfrm>
           <a:prstGeom prst="rect">
             <a:avLst/>
@@ -10607,43 +12116,40 @@
           <a:lstStyle/>
           <a:p>
             <a:pPr indent="0" marL="0">
-              <a:lnSpc>
-                <a:spcPct val="105000"/>
-              </a:lnSpc>
-              <a:buNone/>
-            </a:pPr>
-            <a:r>
-              <a:rPr lang="en-US" sz="1200" dirty="0">
-                <a:solidFill>
-                  <a:srgbClr val="B9BFC9"/>
+              <a:buNone/>
+            </a:pPr>
+            <a:r>
+              <a:rPr lang="en-US" sz="1100" dirty="0">
+                <a:solidFill>
+                  <a:srgbClr val="929AA8"/>
                 </a:solidFill>
                 <a:latin typeface="Arial" pitchFamily="34" charset="0"/>
                 <a:ea typeface="Arial" pitchFamily="34" charset="-122"/>
                 <a:cs typeface="Arial" pitchFamily="34" charset="-120"/>
               </a:rPr>
-              <a:t>A patient could receive the same reminder twice if sending is retried. Small fix identified.</a:t>
-            </a:r>
-            <a:endParaRPr lang="en-US" sz="1200" dirty="0"/>
-          </a:p>
-        </p:txBody>
-      </p:sp>
-      <p:sp>
-        <p:nvSpPr>
-          <p:cNvPr id="27" name="Shape 24"/>
-          <p:cNvSpPr/>
-          <p:nvPr/>
-        </p:nvSpPr>
-        <p:spPr>
-          <a:xfrm>
-            <a:off x="9597542" y="3264408"/>
-            <a:ext cx="1722730" cy="274320"/>
-          </a:xfrm>
-          <a:prstGeom prst="rect">
-            <a:avLst/>
-          </a:prstGeom>
-          <a:ln w="12700">
+              <a:t>Choose a payment method</a:t>
+            </a:r>
+            <a:endParaRPr lang="en-US" sz="1100" dirty="0"/>
+          </a:p>
+        </p:txBody>
+      </p:sp>
+      <p:sp>
+        <p:nvSpPr>
+          <p:cNvPr id="51" name="Shape 48"/>
+          <p:cNvSpPr/>
+          <p:nvPr/>
+        </p:nvSpPr>
+        <p:spPr>
+          <a:xfrm>
+            <a:off x="8324088" y="4352925"/>
+            <a:ext cx="118872" cy="118872"/>
+          </a:xfrm>
+          <a:prstGeom prst="ellipse">
+            <a:avLst/>
+          </a:prstGeom>
+          <a:ln w="19050">
             <a:solidFill>
-              <a:srgbClr val="F2B134"/>
+              <a:srgbClr val="929AA8"/>
             </a:solidFill>
             <a:prstDash val="solid"/>
           </a:ln>
@@ -10651,38 +12157,38 @@
       </p:sp>
       <p:sp>
         <p:nvSpPr>
-          <p:cNvPr id="28" name="Text 25"/>
-          <p:cNvSpPr/>
-          <p:nvPr/>
-        </p:nvSpPr>
-        <p:spPr>
-          <a:xfrm>
-            <a:off x="9597542" y="3264408"/>
-            <a:ext cx="1722730" cy="274320"/>
-          </a:xfrm>
-          <a:prstGeom prst="rect">
-            <a:avLst/>
-          </a:prstGeom>
-          <a:noFill/>
-          <a:ln/>
-        </p:spPr>
-        <p:txBody>
-          <a:bodyPr wrap="square" lIns="0" tIns="0" rIns="0" bIns="0" rtlCol="0" anchor="ctr"/>
-          <a:lstStyle/>
-          <a:p>
-            <a:pPr algn="ctr" indent="0" marL="0">
-              <a:buNone/>
-            </a:pPr>
-            <a:r>
-              <a:rPr lang="en-US" sz="1100" b="1" dirty="0">
-                <a:solidFill>
-                  <a:srgbClr val="F2B134"/>
+          <p:cNvPr id="52" name="Text 49"/>
+          <p:cNvSpPr/>
+          <p:nvPr/>
+        </p:nvSpPr>
+        <p:spPr>
+          <a:xfrm>
+            <a:off x="8570976" y="4298061"/>
+            <a:ext cx="2749296" cy="222504"/>
+          </a:xfrm>
+          <a:prstGeom prst="rect">
+            <a:avLst/>
+          </a:prstGeom>
+          <a:noFill/>
+          <a:ln/>
+        </p:spPr>
+        <p:txBody>
+          <a:bodyPr wrap="square" lIns="0" tIns="0" rIns="0" bIns="0" rtlCol="0" anchor="t"/>
+          <a:lstStyle/>
+          <a:p>
+            <a:pPr indent="0" marL="0">
+              <a:buNone/>
+            </a:pPr>
+            <a:r>
+              <a:rPr lang="en-US" sz="1100" dirty="0">
+                <a:solidFill>
+                  <a:srgbClr val="929AA8"/>
                 </a:solidFill>
                 <a:latin typeface="Arial" pitchFamily="34" charset="0"/>
                 <a:ea typeface="Arial" pitchFamily="34" charset="-122"/>
                 <a:cs typeface="Arial" pitchFamily="34" charset="-120"/>
               </a:rPr>
-              <a:t>Fix before release</a:t>
+              <a:t>Pay the booking deposit</a:t>
             </a:r>
             <a:endParaRPr lang="en-US" sz="1100" dirty="0"/>
           </a:p>
@@ -10690,73 +12196,36 @@
       </p:sp>
       <p:sp>
         <p:nvSpPr>
-          <p:cNvPr id="29" name="Shape 26"/>
-          <p:cNvSpPr/>
-          <p:nvPr/>
-        </p:nvSpPr>
-        <p:spPr>
-          <a:xfrm>
-            <a:off x="3840480" y="4526280"/>
-            <a:ext cx="7708392" cy="1234440"/>
-          </a:xfrm>
-          <a:prstGeom prst="rect">
-            <a:avLst/>
-          </a:prstGeom>
-          <a:solidFill>
-            <a:srgbClr val="23262C"/>
-          </a:solidFill>
-          <a:ln/>
-        </p:spPr>
-      </p:sp>
-      <p:sp>
-        <p:nvSpPr>
-          <p:cNvPr id="30" name="Text 27"/>
-          <p:cNvSpPr/>
-          <p:nvPr/>
-        </p:nvSpPr>
-        <p:spPr>
-          <a:xfrm>
-            <a:off x="4069080" y="4636008"/>
-            <a:ext cx="5330952" cy="274320"/>
-          </a:xfrm>
-          <a:prstGeom prst="rect">
-            <a:avLst/>
-          </a:prstGeom>
-          <a:noFill/>
-          <a:ln/>
-        </p:spPr>
-        <p:txBody>
-          <a:bodyPr wrap="square" lIns="0" tIns="0" rIns="0" bIns="0" rtlCol="0" anchor="ctr"/>
-          <a:lstStyle/>
-          <a:p>
-            <a:pPr indent="0" marL="0">
-              <a:buNone/>
-            </a:pPr>
-            <a:r>
-              <a:rPr lang="en-US" sz="1300" b="1" dirty="0">
-                <a:solidFill>
-                  <a:srgbClr val="F4F0E8"/>
-                </a:solidFill>
-                <a:latin typeface="Georgia" pitchFamily="34" charset="0"/>
-                <a:ea typeface="Georgia" pitchFamily="34" charset="-122"/>
-                <a:cs typeface="Georgia" pitchFamily="34" charset="-120"/>
-              </a:rPr>
-              <a:t>Privacy</a:t>
-            </a:r>
-            <a:endParaRPr lang="en-US" sz="1300" dirty="0"/>
-          </a:p>
-        </p:txBody>
-      </p:sp>
-      <p:sp>
-        <p:nvSpPr>
-          <p:cNvPr id="31" name="Text 28"/>
-          <p:cNvSpPr/>
-          <p:nvPr/>
-        </p:nvSpPr>
-        <p:spPr>
-          <a:xfrm>
-            <a:off x="4069080" y="4937760"/>
-            <a:ext cx="7251192" cy="731520"/>
+          <p:cNvPr id="53" name="Shape 50"/>
+          <p:cNvSpPr/>
+          <p:nvPr/>
+        </p:nvSpPr>
+        <p:spPr>
+          <a:xfrm>
+            <a:off x="8324088" y="4575429"/>
+            <a:ext cx="118872" cy="118872"/>
+          </a:xfrm>
+          <a:prstGeom prst="ellipse">
+            <a:avLst/>
+          </a:prstGeom>
+          <a:ln w="19050">
+            <a:solidFill>
+              <a:srgbClr val="929AA8"/>
+            </a:solidFill>
+            <a:prstDash val="solid"/>
+          </a:ln>
+        </p:spPr>
+      </p:sp>
+      <p:sp>
+        <p:nvSpPr>
+          <p:cNvPr id="54" name="Text 51"/>
+          <p:cNvSpPr/>
+          <p:nvPr/>
+        </p:nvSpPr>
+        <p:spPr>
+          <a:xfrm>
+            <a:off x="8570976" y="4520565"/>
+            <a:ext cx="2749296" cy="222504"/>
           </a:xfrm>
           <a:prstGeom prst="rect">
             <a:avLst/>
@@ -10769,56 +12238,33 @@
           <a:lstStyle/>
           <a:p>
             <a:pPr indent="0" marL="0">
-              <a:lnSpc>
-                <a:spcPct val="105000"/>
-              </a:lnSpc>
-              <a:buNone/>
-            </a:pPr>
-            <a:r>
-              <a:rPr lang="en-US" sz="1200" dirty="0">
-                <a:solidFill>
-                  <a:srgbClr val="B9BFC9"/>
+              <a:buNone/>
+            </a:pPr>
+            <a:r>
+              <a:rPr lang="en-US" sz="1100" dirty="0">
+                <a:solidFill>
+                  <a:srgbClr val="929AA8"/>
                 </a:solidFill>
                 <a:latin typeface="Arial" pitchFamily="34" charset="0"/>
                 <a:ea typeface="Arial" pitchFamily="34" charset="-122"/>
                 <a:cs typeface="Arial" pitchFamily="34" charset="-120"/>
               </a:rPr>
-              <a:t>Patient phone numbers are hidden in system logs and only visible to clinic staff.</a:t>
-            </a:r>
-            <a:endParaRPr lang="en-US" sz="1200" dirty="0"/>
-          </a:p>
-        </p:txBody>
-      </p:sp>
-      <p:sp>
-        <p:nvSpPr>
-          <p:cNvPr id="32" name="Shape 29"/>
-          <p:cNvSpPr/>
-          <p:nvPr/>
-        </p:nvSpPr>
-        <p:spPr>
-          <a:xfrm>
-            <a:off x="10402214" y="4636008"/>
-            <a:ext cx="918058" cy="274320"/>
-          </a:xfrm>
-          <a:prstGeom prst="rect">
-            <a:avLst/>
-          </a:prstGeom>
-          <a:solidFill>
-            <a:srgbClr val="F2B134"/>
-          </a:solidFill>
-          <a:ln/>
-        </p:spPr>
-      </p:sp>
-      <p:sp>
-        <p:nvSpPr>
-          <p:cNvPr id="33" name="Text 30"/>
-          <p:cNvSpPr/>
-          <p:nvPr/>
-        </p:nvSpPr>
-        <p:spPr>
-          <a:xfrm>
-            <a:off x="10402214" y="4636008"/>
-            <a:ext cx="918058" cy="274320"/>
+              <a:t>Receipt sent by email</a:t>
+            </a:r>
+            <a:endParaRPr lang="en-US" sz="1100" dirty="0"/>
+          </a:p>
+        </p:txBody>
+      </p:sp>
+      <p:sp>
+        <p:nvSpPr>
+          <p:cNvPr id="55" name="Text 52"/>
+          <p:cNvSpPr/>
+          <p:nvPr/>
+        </p:nvSpPr>
+        <p:spPr>
+          <a:xfrm>
+            <a:off x="640080" y="5989320"/>
+            <a:ext cx="10908792" cy="274320"/>
           </a:xfrm>
           <a:prstGeom prst="rect">
             <a:avLst/>
@@ -10830,58 +12276,19 @@
           <a:bodyPr wrap="square" lIns="0" tIns="0" rIns="0" bIns="0" rtlCol="0" anchor="ctr"/>
           <a:lstStyle/>
           <a:p>
-            <a:pPr algn="ctr" indent="0" marL="0">
-              <a:buNone/>
-            </a:pPr>
-            <a:r>
-              <a:rPr lang="en-US" sz="1100" b="1" dirty="0">
-                <a:solidFill>
-                  <a:srgbClr val="12161C"/>
+            <a:pPr indent="0" marL="0">
+              <a:buNone/>
+            </a:pPr>
+            <a:r>
+              <a:rPr lang="en-US" sz="1100" i="1" dirty="0">
+                <a:solidFill>
+                  <a:srgbClr val="929AA8"/>
                 </a:solidFill>
                 <a:latin typeface="Arial" pitchFamily="34" charset="0"/>
                 <a:ea typeface="Arial" pitchFamily="34" charset="-122"/>
                 <a:cs typeface="Arial" pitchFamily="34" charset="-120"/>
               </a:rPr>
-              <a:t>Verified</a:t>
-            </a:r>
-            <a:endParaRPr lang="en-US" sz="1100" dirty="0"/>
-          </a:p>
-        </p:txBody>
-      </p:sp>
-      <p:sp>
-        <p:nvSpPr>
-          <p:cNvPr id="34" name="Text 31"/>
-          <p:cNvSpPr/>
-          <p:nvPr/>
-        </p:nvSpPr>
-        <p:spPr>
-          <a:xfrm>
-            <a:off x="3840480" y="5852160"/>
-            <a:ext cx="7708392" cy="274320"/>
-          </a:xfrm>
-          <a:prstGeom prst="rect">
-            <a:avLst/>
-          </a:prstGeom>
-          <a:noFill/>
-          <a:ln/>
-        </p:spPr>
-        <p:txBody>
-          <a:bodyPr wrap="square" lIns="0" tIns="0" rIns="0" bIns="0" rtlCol="0" anchor="ctr"/>
-          <a:lstStyle/>
-          <a:p>
-            <a:pPr indent="0" marL="0">
-              <a:buNone/>
-            </a:pPr>
-            <a:r>
-              <a:rPr lang="en-US" sz="1100" i="1" dirty="0">
-                <a:solidFill>
-                  <a:srgbClr val="929AA8"/>
-                </a:solidFill>
-                <a:latin typeface="Arial" pitchFamily="34" charset="0"/>
-                <a:ea typeface="Arial" pitchFamily="34" charset="-122"/>
-                <a:cs typeface="Arial" pitchFamily="34" charset="-120"/>
-              </a:rPr>
-              <a:t>Source: lead's code reviews this week.</a:t>
+              <a:t>Status as of this week's review; detail comes from the task tracker and the lead's code reviews.</a:t>
             </a:r>
             <a:endParaRPr lang="en-US" sz="1100" dirty="0"/>
           </a:p>
@@ -10986,13 +12393,13 @@
             <a:r>
               <a:rPr lang="en-US" sz="1200" b="1" dirty="0">
                 <a:solidFill>
-                  <a:srgbClr val="FF7A6B"/>
+                  <a:srgbClr val="F2B134"/>
                 </a:solidFill>
                 <a:latin typeface="Arial" pitchFamily="34" charset="0"/>
                 <a:ea typeface="Arial" pitchFamily="34" charset="-122"/>
                 <a:cs typeface="Arial" pitchFamily="34" charset="-120"/>
               </a:rPr>
-              <a:t>Needs Attention</a:t>
+              <a:t>Quality · Code Review</a:t>
             </a:r>
             <a:endParaRPr lang="en-US" sz="1200" dirty="0"/>
           </a:p>
@@ -11072,7 +12479,7 @@
                 <a:ea typeface="Georgia" pitchFamily="34" charset="-122"/>
                 <a:cs typeface="Georgia" pitchFamily="34" charset="-120"/>
               </a:rPr>
-              <a:t>Blockers &amp; Decisions Needed</a:t>
+              <a:t>Quality Check: Issues Caught Before Release</a:t>
             </a:r>
             <a:endParaRPr lang="en-US" sz="2600" dirty="0"/>
           </a:p>
@@ -11119,7 +12526,7 @@
       </p:sp>
       <p:pic>
         <p:nvPicPr>
-          <p:cNvPr id="8" name="Image 0" descr="/var/folders/lw/rmylcyvd5rjfxk9g1z9rrm8w0000gq/T/showship-deck-oVNQqv/paper_mark.png">    </p:cNvPr>
+          <p:cNvPr id="8" name="Image 0" descr="/var/folders/lw/rmylcyvd5rjfxk9g1z9rrm8w0000gq/T/showship-deck-EGIwvT/paper_mark.png">    </p:cNvPr>
           <p:cNvPicPr>
             <a:picLocks noChangeAspect="1"/>
           </p:cNvPicPr>
@@ -11203,7 +12610,7 @@
         <p:spPr>
           <a:xfrm>
             <a:off x="640080" y="1783080"/>
-            <a:ext cx="5317236" cy="2515870"/>
+            <a:ext cx="2926080" cy="1203960"/>
           </a:xfrm>
           <a:prstGeom prst="rect">
             <a:avLst/>
@@ -11216,34 +12623,14 @@
       </p:sp>
       <p:sp>
         <p:nvSpPr>
-          <p:cNvPr id="11" name="Shape 8"/>
-          <p:cNvSpPr/>
-          <p:nvPr/>
-        </p:nvSpPr>
-        <p:spPr>
-          <a:xfrm>
-            <a:off x="640080" y="1783080"/>
-            <a:ext cx="5317236" cy="73152"/>
-          </a:xfrm>
-          <a:prstGeom prst="rect">
-            <a:avLst/>
-          </a:prstGeom>
-          <a:solidFill>
-            <a:srgbClr val="FF7A6B"/>
-          </a:solidFill>
-          <a:ln/>
-        </p:spPr>
-      </p:sp>
-      <p:sp>
-        <p:nvSpPr>
-          <p:cNvPr id="12" name="Text 9"/>
-          <p:cNvSpPr/>
-          <p:nvPr/>
-        </p:nvSpPr>
-        <p:spPr>
-          <a:xfrm>
-            <a:off x="914400" y="2011680"/>
-            <a:ext cx="4768596" cy="411480"/>
+          <p:cNvPr id="11" name="Text 8"/>
+          <p:cNvSpPr/>
+          <p:nvPr/>
+        </p:nvSpPr>
+        <p:spPr>
+          <a:xfrm>
+            <a:off x="868680" y="1837944"/>
+            <a:ext cx="2468880" cy="601980"/>
           </a:xfrm>
           <a:prstGeom prst="rect">
             <a:avLst/>
@@ -11259,44 +12646,128 @@
               <a:buNone/>
             </a:pPr>
             <a:r>
-              <a:rPr lang="en-US" sz="1700" b="1" dirty="0">
-                <a:solidFill>
-                  <a:srgbClr val="F4F0E8"/>
+              <a:rPr lang="en-US" sz="3400" b="1" dirty="0">
+                <a:solidFill>
+                  <a:srgbClr val="F2B134"/>
                 </a:solidFill>
                 <a:latin typeface="Georgia" pitchFamily="34" charset="0"/>
                 <a:ea typeface="Georgia" pitchFamily="34" charset="-122"/>
                 <a:cs typeface="Georgia" pitchFamily="34" charset="-120"/>
               </a:rPr>
-              <a:t>Blockers and risks</a:t>
-            </a:r>
-            <a:pPr indent="0" marL="0">
-              <a:buNone/>
-            </a:pPr>
-            <a:r>
-              <a:rPr lang="en-US" sz="1700" dirty="0">
-                <a:solidFill>
-                  <a:srgbClr val="929AA8"/>
+              <a:t>3</a:t>
+            </a:r>
+            <a:endParaRPr lang="en-US" sz="3400" dirty="0"/>
+          </a:p>
+        </p:txBody>
+      </p:sp>
+      <p:sp>
+        <p:nvSpPr>
+          <p:cNvPr id="12" name="Text 9"/>
+          <p:cNvSpPr/>
+          <p:nvPr/>
+        </p:nvSpPr>
+        <p:spPr>
+          <a:xfrm>
+            <a:off x="868680" y="2445258"/>
+            <a:ext cx="2468880" cy="481584"/>
+          </a:xfrm>
+          <a:prstGeom prst="rect">
+            <a:avLst/>
+          </a:prstGeom>
+          <a:noFill/>
+          <a:ln/>
+        </p:spPr>
+        <p:txBody>
+          <a:bodyPr wrap="square" lIns="0" tIns="0" rIns="0" bIns="0" rtlCol="0" anchor="t"/>
+          <a:lstStyle/>
+          <a:p>
+            <a:pPr indent="0" marL="0">
+              <a:buNone/>
+            </a:pPr>
+            <a:r>
+              <a:rPr lang="en-US" sz="1150" dirty="0">
+                <a:solidFill>
+                  <a:srgbClr val="B9BFC9"/>
+                </a:solidFill>
+                <a:latin typeface="Arial" pitchFamily="34" charset="0"/>
+                <a:ea typeface="Arial" pitchFamily="34" charset="-122"/>
+                <a:cs typeface="Arial" pitchFamily="34" charset="-120"/>
+              </a:rPr>
+              <a:t>Features reviewed this week</a:t>
+            </a:r>
+            <a:endParaRPr lang="en-US" sz="1150" dirty="0"/>
+          </a:p>
+        </p:txBody>
+      </p:sp>
+      <p:sp>
+        <p:nvSpPr>
+          <p:cNvPr id="13" name="Shape 10"/>
+          <p:cNvSpPr/>
+          <p:nvPr/>
+        </p:nvSpPr>
+        <p:spPr>
+          <a:xfrm>
+            <a:off x="640080" y="3169920"/>
+            <a:ext cx="2926080" cy="1203960"/>
+          </a:xfrm>
+          <a:prstGeom prst="rect">
+            <a:avLst/>
+          </a:prstGeom>
+          <a:solidFill>
+            <a:srgbClr val="23262C"/>
+          </a:solidFill>
+          <a:ln/>
+        </p:spPr>
+      </p:sp>
+      <p:sp>
+        <p:nvSpPr>
+          <p:cNvPr id="14" name="Text 11"/>
+          <p:cNvSpPr/>
+          <p:nvPr/>
+        </p:nvSpPr>
+        <p:spPr>
+          <a:xfrm>
+            <a:off x="868680" y="3224784"/>
+            <a:ext cx="2468880" cy="601980"/>
+          </a:xfrm>
+          <a:prstGeom prst="rect">
+            <a:avLst/>
+          </a:prstGeom>
+          <a:noFill/>
+          <a:ln/>
+        </p:spPr>
+        <p:txBody>
+          <a:bodyPr wrap="square" lIns="0" tIns="0" rIns="0" bIns="0" rtlCol="0" anchor="ctr"/>
+          <a:lstStyle/>
+          <a:p>
+            <a:pPr indent="0" marL="0">
+              <a:buNone/>
+            </a:pPr>
+            <a:r>
+              <a:rPr lang="en-US" sz="3400" b="1" dirty="0">
+                <a:solidFill>
+                  <a:srgbClr val="F4F0E8"/>
                 </a:solidFill>
                 <a:latin typeface="Georgia" pitchFamily="34" charset="0"/>
                 <a:ea typeface="Georgia" pitchFamily="34" charset="-122"/>
                 <a:cs typeface="Georgia" pitchFamily="34" charset="-120"/>
               </a:rPr>
-              <a:t>   1</a:t>
-            </a:r>
-            <a:endParaRPr lang="en-US" sz="1700" dirty="0"/>
-          </a:p>
-        </p:txBody>
-      </p:sp>
-      <p:sp>
-        <p:nvSpPr>
-          <p:cNvPr id="13" name="Text 10"/>
-          <p:cNvSpPr/>
-          <p:nvPr/>
-        </p:nvSpPr>
-        <p:spPr>
-          <a:xfrm>
-            <a:off x="914400" y="2606040"/>
-            <a:ext cx="411480" cy="457200"/>
+              <a:t>2</a:t>
+            </a:r>
+            <a:endParaRPr lang="en-US" sz="3400" dirty="0"/>
+          </a:p>
+        </p:txBody>
+      </p:sp>
+      <p:sp>
+        <p:nvSpPr>
+          <p:cNvPr id="15" name="Text 12"/>
+          <p:cNvSpPr/>
+          <p:nvPr/>
+        </p:nvSpPr>
+        <p:spPr>
+          <a:xfrm>
+            <a:off x="868680" y="3832098"/>
+            <a:ext cx="2468880" cy="481584"/>
           </a:xfrm>
           <a:prstGeom prst="rect">
             <a:avLst/>
@@ -11312,30 +12783,89 @@
               <a:buNone/>
             </a:pPr>
             <a:r>
-              <a:rPr lang="en-US" sz="2400" b="1" dirty="0">
-                <a:solidFill>
-                  <a:srgbClr val="FF7A6B"/>
+              <a:rPr lang="en-US" sz="1150" dirty="0">
+                <a:solidFill>
+                  <a:srgbClr val="B9BFC9"/>
+                </a:solidFill>
+                <a:latin typeface="Arial" pitchFamily="34" charset="0"/>
+                <a:ea typeface="Arial" pitchFamily="34" charset="-122"/>
+                <a:cs typeface="Arial" pitchFamily="34" charset="-120"/>
+              </a:rPr>
+              <a:t>Approved for release</a:t>
+            </a:r>
+            <a:endParaRPr lang="en-US" sz="1150" dirty="0"/>
+          </a:p>
+        </p:txBody>
+      </p:sp>
+      <p:sp>
+        <p:nvSpPr>
+          <p:cNvPr id="16" name="Shape 13"/>
+          <p:cNvSpPr/>
+          <p:nvPr/>
+        </p:nvSpPr>
+        <p:spPr>
+          <a:xfrm>
+            <a:off x="640080" y="4556760"/>
+            <a:ext cx="2926080" cy="1203960"/>
+          </a:xfrm>
+          <a:prstGeom prst="rect">
+            <a:avLst/>
+          </a:prstGeom>
+          <a:solidFill>
+            <a:srgbClr val="23262C"/>
+          </a:solidFill>
+          <a:ln/>
+        </p:spPr>
+      </p:sp>
+      <p:sp>
+        <p:nvSpPr>
+          <p:cNvPr id="17" name="Text 14"/>
+          <p:cNvSpPr/>
+          <p:nvPr/>
+        </p:nvSpPr>
+        <p:spPr>
+          <a:xfrm>
+            <a:off x="868680" y="4611624"/>
+            <a:ext cx="2468880" cy="601980"/>
+          </a:xfrm>
+          <a:prstGeom prst="rect">
+            <a:avLst/>
+          </a:prstGeom>
+          <a:noFill/>
+          <a:ln/>
+        </p:spPr>
+        <p:txBody>
+          <a:bodyPr wrap="square" lIns="0" tIns="0" rIns="0" bIns="0" rtlCol="0" anchor="ctr"/>
+          <a:lstStyle/>
+          <a:p>
+            <a:pPr indent="0" marL="0">
+              <a:buNone/>
+            </a:pPr>
+            <a:r>
+              <a:rPr lang="en-US" sz="3400" b="1" dirty="0">
+                <a:solidFill>
+                  <a:srgbClr val="F4F0E8"/>
                 </a:solidFill>
                 <a:latin typeface="Georgia" pitchFamily="34" charset="0"/>
                 <a:ea typeface="Georgia" pitchFamily="34" charset="-122"/>
                 <a:cs typeface="Georgia" pitchFamily="34" charset="-120"/>
               </a:rPr>
-              <a:t>1</a:t>
-            </a:r>
-            <a:endParaRPr lang="en-US" sz="2400" dirty="0"/>
-          </a:p>
-        </p:txBody>
-      </p:sp>
-      <p:sp>
-        <p:nvSpPr>
-          <p:cNvPr id="14" name="Text 11"/>
-          <p:cNvSpPr/>
-          <p:nvPr/>
-        </p:nvSpPr>
-        <p:spPr>
-          <a:xfrm>
-            <a:off x="1417320" y="2606040"/>
-            <a:ext cx="4265676" cy="953135"/>
+              <a:t>212</a:t>
+            </a:r>
+            <a:endParaRPr lang="en-US" sz="3400" dirty="0"/>
+          </a:p>
+        </p:txBody>
+      </p:sp>
+      <p:sp>
+        <p:nvSpPr>
+          <p:cNvPr id="18" name="Text 15"/>
+          <p:cNvSpPr/>
+          <p:nvPr/>
+        </p:nvSpPr>
+        <p:spPr>
+          <a:xfrm>
+            <a:off x="868680" y="5218938"/>
+            <a:ext cx="2468880" cy="481584"/>
           </a:xfrm>
           <a:prstGeom prst="rect">
             <a:avLst/>
@@ -11348,16 +12878,69 @@
           <a:lstStyle/>
           <a:p>
             <a:pPr indent="0" marL="0">
-              <a:lnSpc>
-                <a:spcPct val="110000"/>
-              </a:lnSpc>
-              <a:spcAft>
-                <a:spcPts val="300"/>
-              </a:spcAft>
-              <a:buNone/>
-            </a:pPr>
-            <a:r>
-              <a:rPr lang="en-US" sz="1500" b="1" dirty="0">
+              <a:buNone/>
+            </a:pPr>
+            <a:r>
+              <a:rPr lang="en-US" sz="1150" dirty="0">
+                <a:solidFill>
+                  <a:srgbClr val="B9BFC9"/>
+                </a:solidFill>
+                <a:latin typeface="Arial" pitchFamily="34" charset="0"/>
+                <a:ea typeface="Arial" pitchFamily="34" charset="-122"/>
+                <a:cs typeface="Arial" pitchFamily="34" charset="-120"/>
+              </a:rPr>
+              <a:t>Automated tests passing (100%)</a:t>
+            </a:r>
+            <a:endParaRPr lang="en-US" sz="1150" dirty="0"/>
+          </a:p>
+        </p:txBody>
+      </p:sp>
+      <p:sp>
+        <p:nvSpPr>
+          <p:cNvPr id="19" name="Shape 16"/>
+          <p:cNvSpPr/>
+          <p:nvPr/>
+        </p:nvSpPr>
+        <p:spPr>
+          <a:xfrm>
+            <a:off x="3840480" y="1783080"/>
+            <a:ext cx="7708392" cy="1234440"/>
+          </a:xfrm>
+          <a:prstGeom prst="rect">
+            <a:avLst/>
+          </a:prstGeom>
+          <a:solidFill>
+            <a:srgbClr val="23262C"/>
+          </a:solidFill>
+          <a:ln/>
+        </p:spPr>
+      </p:sp>
+      <p:sp>
+        <p:nvSpPr>
+          <p:cNvPr id="20" name="Text 17"/>
+          <p:cNvSpPr/>
+          <p:nvPr/>
+        </p:nvSpPr>
+        <p:spPr>
+          <a:xfrm>
+            <a:off x="4069080" y="1892808"/>
+            <a:ext cx="5330952" cy="274320"/>
+          </a:xfrm>
+          <a:prstGeom prst="rect">
+            <a:avLst/>
+          </a:prstGeom>
+          <a:noFill/>
+          <a:ln/>
+        </p:spPr>
+        <p:txBody>
+          <a:bodyPr wrap="square" lIns="0" tIns="0" rIns="0" bIns="0" rtlCol="0" anchor="ctr"/>
+          <a:lstStyle/>
+          <a:p>
+            <a:pPr indent="0" marL="0">
+              <a:buNone/>
+            </a:pPr>
+            <a:r>
+              <a:rPr lang="en-US" sz="1300" b="1" dirty="0">
                 <a:solidFill>
                   <a:srgbClr val="F4F0E8"/>
                 </a:solidFill>
@@ -11365,88 +12948,386 @@
                 <a:ea typeface="Georgia" pitchFamily="34" charset="-122"/>
                 <a:cs typeface="Georgia" pitchFamily="34" charset="-120"/>
               </a:rPr>
-              <a:t>Reminders release waiting on one fix</a:t>
-            </a:r>
-            <a:endParaRPr lang="en-US" sz="1500" dirty="0"/>
-          </a:p>
+              <a:t>Appointment Reminders</a:t>
+            </a:r>
+            <a:endParaRPr lang="en-US" sz="1300" dirty="0"/>
+          </a:p>
+        </p:txBody>
+      </p:sp>
+      <p:sp>
+        <p:nvSpPr>
+          <p:cNvPr id="21" name="Text 18"/>
+          <p:cNvSpPr/>
+          <p:nvPr/>
+        </p:nvSpPr>
+        <p:spPr>
+          <a:xfrm>
+            <a:off x="4069080" y="2194560"/>
+            <a:ext cx="7251192" cy="731520"/>
+          </a:xfrm>
+          <a:prstGeom prst="rect">
+            <a:avLst/>
+          </a:prstGeom>
+          <a:noFill/>
+          <a:ln/>
+        </p:spPr>
+        <p:txBody>
+          <a:bodyPr wrap="square" lIns="0" tIns="0" rIns="0" bIns="0" rtlCol="0" anchor="t"/>
+          <a:lstStyle/>
           <a:p>
             <a:pPr indent="0" marL="0">
               <a:lnSpc>
-                <a:spcPct val="110000"/>
+                <a:spcPct val="105000"/>
               </a:lnSpc>
-              <a:spcAft>
-                <a:spcPts val="300"/>
-              </a:spcAft>
               <a:buNone/>
             </a:pPr>
             <a:r>
               <a:rPr lang="en-US" sz="1200" dirty="0">
                 <a:solidFill>
                   <a:srgbClr val="B9BFC9"/>
+                </a:solidFill>
+                <a:latin typeface="Arial" pitchFamily="34" charset="0"/>
+                <a:ea typeface="Arial" pitchFamily="34" charset="-122"/>
+                <a:cs typeface="Arial" pitchFamily="34" charset="-120"/>
+              </a:rPr>
+              <a:t>Clinics can send SMS and email reminders 24 hours and 2 hours before each appointment.</a:t>
+            </a:r>
+            <a:endParaRPr lang="en-US" sz="1200" dirty="0"/>
+          </a:p>
+        </p:txBody>
+      </p:sp>
+      <p:sp>
+        <p:nvSpPr>
+          <p:cNvPr id="22" name="Shape 19"/>
+          <p:cNvSpPr/>
+          <p:nvPr/>
+        </p:nvSpPr>
+        <p:spPr>
+          <a:xfrm>
+            <a:off x="10402214" y="1892808"/>
+            <a:ext cx="918058" cy="274320"/>
+          </a:xfrm>
+          <a:prstGeom prst="rect">
+            <a:avLst/>
+          </a:prstGeom>
+          <a:solidFill>
+            <a:srgbClr val="F2B134"/>
+          </a:solidFill>
+          <a:ln/>
+        </p:spPr>
+      </p:sp>
+      <p:sp>
+        <p:nvSpPr>
+          <p:cNvPr id="23" name="Text 20"/>
+          <p:cNvSpPr/>
+          <p:nvPr/>
+        </p:nvSpPr>
+        <p:spPr>
+          <a:xfrm>
+            <a:off x="10402214" y="1892808"/>
+            <a:ext cx="918058" cy="274320"/>
+          </a:xfrm>
+          <a:prstGeom prst="rect">
+            <a:avLst/>
+          </a:prstGeom>
+          <a:noFill/>
+          <a:ln/>
+        </p:spPr>
+        <p:txBody>
+          <a:bodyPr wrap="square" lIns="0" tIns="0" rIns="0" bIns="0" rtlCol="0" anchor="ctr"/>
+          <a:lstStyle/>
+          <a:p>
+            <a:pPr algn="ctr" indent="0" marL="0">
+              <a:buNone/>
+            </a:pPr>
+            <a:r>
+              <a:rPr lang="en-US" sz="1100" b="1" dirty="0">
+                <a:solidFill>
+                  <a:srgbClr val="12161C"/>
+                </a:solidFill>
+                <a:latin typeface="Arial" pitchFamily="34" charset="0"/>
+                <a:ea typeface="Arial" pitchFamily="34" charset="-122"/>
+                <a:cs typeface="Arial" pitchFamily="34" charset="-120"/>
+              </a:rPr>
+              <a:t>Verified</a:t>
+            </a:r>
+            <a:endParaRPr lang="en-US" sz="1100" dirty="0"/>
+          </a:p>
+        </p:txBody>
+      </p:sp>
+      <p:sp>
+        <p:nvSpPr>
+          <p:cNvPr id="24" name="Shape 21"/>
+          <p:cNvSpPr/>
+          <p:nvPr/>
+        </p:nvSpPr>
+        <p:spPr>
+          <a:xfrm>
+            <a:off x="3840480" y="3154680"/>
+            <a:ext cx="7708392" cy="1234440"/>
+          </a:xfrm>
+          <a:prstGeom prst="rect">
+            <a:avLst/>
+          </a:prstGeom>
+          <a:solidFill>
+            <a:srgbClr val="23262C"/>
+          </a:solidFill>
+          <a:ln/>
+        </p:spPr>
+      </p:sp>
+      <p:sp>
+        <p:nvSpPr>
+          <p:cNvPr id="25" name="Text 22"/>
+          <p:cNvSpPr/>
+          <p:nvPr/>
+        </p:nvSpPr>
+        <p:spPr>
+          <a:xfrm>
+            <a:off x="4069080" y="3264408"/>
+            <a:ext cx="5330952" cy="274320"/>
+          </a:xfrm>
+          <a:prstGeom prst="rect">
+            <a:avLst/>
+          </a:prstGeom>
+          <a:noFill/>
+          <a:ln/>
+        </p:spPr>
+        <p:txBody>
+          <a:bodyPr wrap="square" lIns="0" tIns="0" rIns="0" bIns="0" rtlCol="0" anchor="ctr"/>
+          <a:lstStyle/>
+          <a:p>
+            <a:pPr indent="0" marL="0">
+              <a:buNone/>
+            </a:pPr>
+            <a:r>
+              <a:rPr lang="en-US" sz="1300" b="1" dirty="0">
+                <a:solidFill>
+                  <a:srgbClr val="F4F0E8"/>
                 </a:solidFill>
                 <a:latin typeface="Georgia" pitchFamily="34" charset="0"/>
                 <a:ea typeface="Georgia" pitchFamily="34" charset="-122"/>
                 <a:cs typeface="Georgia" pitchFamily="34" charset="-120"/>
               </a:rPr>
-              <a:t>Duplicate reminders must be prevented before release. Fix is small and already tested.</a:t>
-            </a:r>
-            <a:endParaRPr lang="en-US" sz="1500" dirty="0"/>
-          </a:p>
+              <a:t>Reliability</a:t>
+            </a:r>
+            <a:endParaRPr lang="en-US" sz="1300" dirty="0"/>
+          </a:p>
+        </p:txBody>
+      </p:sp>
+      <p:sp>
+        <p:nvSpPr>
+          <p:cNvPr id="26" name="Text 23"/>
+          <p:cNvSpPr/>
+          <p:nvPr/>
+        </p:nvSpPr>
+        <p:spPr>
+          <a:xfrm>
+            <a:off x="4069080" y="3566160"/>
+            <a:ext cx="7251192" cy="731520"/>
+          </a:xfrm>
+          <a:prstGeom prst="rect">
+            <a:avLst/>
+          </a:prstGeom>
+          <a:noFill/>
+          <a:ln/>
+        </p:spPr>
+        <p:txBody>
+          <a:bodyPr wrap="square" lIns="0" tIns="0" rIns="0" bIns="0" rtlCol="0" anchor="t"/>
+          <a:lstStyle/>
           <a:p>
             <a:pPr indent="0" marL="0">
               <a:lnSpc>
-                <a:spcPct val="110000"/>
+                <a:spcPct val="105000"/>
               </a:lnSpc>
-              <a:spcAft>
-                <a:spcPts val="300"/>
-              </a:spcAft>
-              <a:buNone/>
-            </a:pPr>
-            <a:r>
-              <a:rPr lang="en-US" sz="1100" i="1" dirty="0">
-                <a:solidFill>
-                  <a:srgbClr val="929AA8"/>
+              <a:buNone/>
+            </a:pPr>
+            <a:r>
+              <a:rPr lang="en-US" sz="1200" dirty="0">
+                <a:solidFill>
+                  <a:srgbClr val="B9BFC9"/>
+                </a:solidFill>
+                <a:latin typeface="Arial" pitchFamily="34" charset="0"/>
+                <a:ea typeface="Arial" pitchFamily="34" charset="-122"/>
+                <a:cs typeface="Arial" pitchFamily="34" charset="-120"/>
+              </a:rPr>
+              <a:t>A patient could receive the same reminder twice if sending is retried. Small fix identified.</a:t>
+            </a:r>
+            <a:endParaRPr lang="en-US" sz="1200" dirty="0"/>
+          </a:p>
+        </p:txBody>
+      </p:sp>
+      <p:sp>
+        <p:nvSpPr>
+          <p:cNvPr id="27" name="Shape 24"/>
+          <p:cNvSpPr/>
+          <p:nvPr/>
+        </p:nvSpPr>
+        <p:spPr>
+          <a:xfrm>
+            <a:off x="9597542" y="3264408"/>
+            <a:ext cx="1722730" cy="274320"/>
+          </a:xfrm>
+          <a:prstGeom prst="rect">
+            <a:avLst/>
+          </a:prstGeom>
+          <a:ln w="12700">
+            <a:solidFill>
+              <a:srgbClr val="F2B134"/>
+            </a:solidFill>
+            <a:prstDash val="solid"/>
+          </a:ln>
+        </p:spPr>
+      </p:sp>
+      <p:sp>
+        <p:nvSpPr>
+          <p:cNvPr id="28" name="Text 25"/>
+          <p:cNvSpPr/>
+          <p:nvPr/>
+        </p:nvSpPr>
+        <p:spPr>
+          <a:xfrm>
+            <a:off x="9597542" y="3264408"/>
+            <a:ext cx="1722730" cy="274320"/>
+          </a:xfrm>
+          <a:prstGeom prst="rect">
+            <a:avLst/>
+          </a:prstGeom>
+          <a:noFill/>
+          <a:ln/>
+        </p:spPr>
+        <p:txBody>
+          <a:bodyPr wrap="square" lIns="0" tIns="0" rIns="0" bIns="0" rtlCol="0" anchor="ctr"/>
+          <a:lstStyle/>
+          <a:p>
+            <a:pPr algn="ctr" indent="0" marL="0">
+              <a:buNone/>
+            </a:pPr>
+            <a:r>
+              <a:rPr lang="en-US" sz="1100" b="1" dirty="0">
+                <a:solidFill>
+                  <a:srgbClr val="F2B134"/>
+                </a:solidFill>
+                <a:latin typeface="Arial" pitchFamily="34" charset="0"/>
+                <a:ea typeface="Arial" pitchFamily="34" charset="-122"/>
+                <a:cs typeface="Arial" pitchFamily="34" charset="-120"/>
+              </a:rPr>
+              <a:t>Fix before release</a:t>
+            </a:r>
+            <a:endParaRPr lang="en-US" sz="1100" dirty="0"/>
+          </a:p>
+        </p:txBody>
+      </p:sp>
+      <p:sp>
+        <p:nvSpPr>
+          <p:cNvPr id="29" name="Shape 26"/>
+          <p:cNvSpPr/>
+          <p:nvPr/>
+        </p:nvSpPr>
+        <p:spPr>
+          <a:xfrm>
+            <a:off x="3840480" y="4526280"/>
+            <a:ext cx="7708392" cy="1234440"/>
+          </a:xfrm>
+          <a:prstGeom prst="rect">
+            <a:avLst/>
+          </a:prstGeom>
+          <a:solidFill>
+            <a:srgbClr val="23262C"/>
+          </a:solidFill>
+          <a:ln/>
+        </p:spPr>
+      </p:sp>
+      <p:sp>
+        <p:nvSpPr>
+          <p:cNvPr id="30" name="Text 27"/>
+          <p:cNvSpPr/>
+          <p:nvPr/>
+        </p:nvSpPr>
+        <p:spPr>
+          <a:xfrm>
+            <a:off x="4069080" y="4636008"/>
+            <a:ext cx="5330952" cy="274320"/>
+          </a:xfrm>
+          <a:prstGeom prst="rect">
+            <a:avLst/>
+          </a:prstGeom>
+          <a:noFill/>
+          <a:ln/>
+        </p:spPr>
+        <p:txBody>
+          <a:bodyPr wrap="square" lIns="0" tIns="0" rIns="0" bIns="0" rtlCol="0" anchor="ctr"/>
+          <a:lstStyle/>
+          <a:p>
+            <a:pPr indent="0" marL="0">
+              <a:buNone/>
+            </a:pPr>
+            <a:r>
+              <a:rPr lang="en-US" sz="1300" b="1" dirty="0">
+                <a:solidFill>
+                  <a:srgbClr val="F4F0E8"/>
                 </a:solidFill>
                 <a:latin typeface="Georgia" pitchFamily="34" charset="0"/>
                 <a:ea typeface="Georgia" pitchFamily="34" charset="-122"/>
                 <a:cs typeface="Georgia" pitchFamily="34" charset="-120"/>
               </a:rPr>
-              <a:t>Owner: Nina Rao @Nina · Expected: next week</a:t>
-            </a:r>
-            <a:endParaRPr lang="en-US" sz="1500" dirty="0"/>
-          </a:p>
-        </p:txBody>
-      </p:sp>
-      <p:sp>
-        <p:nvSpPr>
-          <p:cNvPr id="15" name="Shape 12"/>
-          <p:cNvSpPr/>
-          <p:nvPr/>
-        </p:nvSpPr>
-        <p:spPr>
-          <a:xfrm>
-            <a:off x="6231636" y="1783080"/>
-            <a:ext cx="5317236" cy="2515870"/>
-          </a:xfrm>
-          <a:prstGeom prst="rect">
-            <a:avLst/>
-          </a:prstGeom>
-          <a:solidFill>
-            <a:srgbClr val="23262C"/>
-          </a:solidFill>
-          <a:ln/>
-        </p:spPr>
-      </p:sp>
-      <p:sp>
-        <p:nvSpPr>
-          <p:cNvPr id="16" name="Shape 13"/>
-          <p:cNvSpPr/>
-          <p:nvPr/>
-        </p:nvSpPr>
-        <p:spPr>
-          <a:xfrm>
-            <a:off x="6231636" y="1783080"/>
-            <a:ext cx="5317236" cy="73152"/>
+              <a:t>Privacy</a:t>
+            </a:r>
+            <a:endParaRPr lang="en-US" sz="1300" dirty="0"/>
+          </a:p>
+        </p:txBody>
+      </p:sp>
+      <p:sp>
+        <p:nvSpPr>
+          <p:cNvPr id="31" name="Text 28"/>
+          <p:cNvSpPr/>
+          <p:nvPr/>
+        </p:nvSpPr>
+        <p:spPr>
+          <a:xfrm>
+            <a:off x="4069080" y="4937760"/>
+            <a:ext cx="7251192" cy="731520"/>
+          </a:xfrm>
+          <a:prstGeom prst="rect">
+            <a:avLst/>
+          </a:prstGeom>
+          <a:noFill/>
+          <a:ln/>
+        </p:spPr>
+        <p:txBody>
+          <a:bodyPr wrap="square" lIns="0" tIns="0" rIns="0" bIns="0" rtlCol="0" anchor="t"/>
+          <a:lstStyle/>
+          <a:p>
+            <a:pPr indent="0" marL="0">
+              <a:lnSpc>
+                <a:spcPct val="105000"/>
+              </a:lnSpc>
+              <a:buNone/>
+            </a:pPr>
+            <a:r>
+              <a:rPr lang="en-US" sz="1200" dirty="0">
+                <a:solidFill>
+                  <a:srgbClr val="B9BFC9"/>
+                </a:solidFill>
+                <a:latin typeface="Arial" pitchFamily="34" charset="0"/>
+                <a:ea typeface="Arial" pitchFamily="34" charset="-122"/>
+                <a:cs typeface="Arial" pitchFamily="34" charset="-120"/>
+              </a:rPr>
+              <a:t>Patient phone numbers are hidden in system logs and only visible to clinic staff.</a:t>
+            </a:r>
+            <a:endParaRPr lang="en-US" sz="1200" dirty="0"/>
+          </a:p>
+        </p:txBody>
+      </p:sp>
+      <p:sp>
+        <p:nvSpPr>
+          <p:cNvPr id="32" name="Shape 29"/>
+          <p:cNvSpPr/>
+          <p:nvPr/>
+        </p:nvSpPr>
+        <p:spPr>
+          <a:xfrm>
+            <a:off x="10402214" y="4636008"/>
+            <a:ext cx="918058" cy="274320"/>
           </a:xfrm>
           <a:prstGeom prst="rect">
             <a:avLst/>
@@ -11459,14 +13340,14 @@
       </p:sp>
       <p:sp>
         <p:nvSpPr>
-          <p:cNvPr id="17" name="Text 14"/>
-          <p:cNvSpPr/>
-          <p:nvPr/>
-        </p:nvSpPr>
-        <p:spPr>
-          <a:xfrm>
-            <a:off x="6505956" y="2011680"/>
-            <a:ext cx="4768596" cy="411480"/>
+          <p:cNvPr id="33" name="Text 30"/>
+          <p:cNvSpPr/>
+          <p:nvPr/>
+        </p:nvSpPr>
+        <p:spPr>
+          <a:xfrm>
+            <a:off x="10402214" y="4636008"/>
+            <a:ext cx="918058" cy="274320"/>
           </a:xfrm>
           <a:prstGeom prst="rect">
             <a:avLst/>
@@ -11478,165 +13359,60 @@
           <a:bodyPr wrap="square" lIns="0" tIns="0" rIns="0" bIns="0" rtlCol="0" anchor="ctr"/>
           <a:lstStyle/>
           <a:p>
-            <a:pPr indent="0" marL="0">
-              <a:buNone/>
-            </a:pPr>
-            <a:r>
-              <a:rPr lang="en-US" sz="1700" b="1" dirty="0">
-                <a:solidFill>
-                  <a:srgbClr val="F4F0E8"/>
-                </a:solidFill>
-                <a:latin typeface="Georgia" pitchFamily="34" charset="0"/>
-                <a:ea typeface="Georgia" pitchFamily="34" charset="-122"/>
-                <a:cs typeface="Georgia" pitchFamily="34" charset="-120"/>
-              </a:rPr>
-              <a:t>Decisions needed</a:t>
-            </a:r>
-            <a:pPr indent="0" marL="0">
-              <a:buNone/>
-            </a:pPr>
-            <a:r>
-              <a:rPr lang="en-US" sz="1700" dirty="0">
+            <a:pPr algn="ctr" indent="0" marL="0">
+              <a:buNone/>
+            </a:pPr>
+            <a:r>
+              <a:rPr lang="en-US" sz="1100" b="1" dirty="0">
+                <a:solidFill>
+                  <a:srgbClr val="12161C"/>
+                </a:solidFill>
+                <a:latin typeface="Arial" pitchFamily="34" charset="0"/>
+                <a:ea typeface="Arial" pitchFamily="34" charset="-122"/>
+                <a:cs typeface="Arial" pitchFamily="34" charset="-120"/>
+              </a:rPr>
+              <a:t>Verified</a:t>
+            </a:r>
+            <a:endParaRPr lang="en-US" sz="1100" dirty="0"/>
+          </a:p>
+        </p:txBody>
+      </p:sp>
+      <p:sp>
+        <p:nvSpPr>
+          <p:cNvPr id="34" name="Text 31"/>
+          <p:cNvSpPr/>
+          <p:nvPr/>
+        </p:nvSpPr>
+        <p:spPr>
+          <a:xfrm>
+            <a:off x="3840480" y="5852160"/>
+            <a:ext cx="7708392" cy="274320"/>
+          </a:xfrm>
+          <a:prstGeom prst="rect">
+            <a:avLst/>
+          </a:prstGeom>
+          <a:noFill/>
+          <a:ln/>
+        </p:spPr>
+        <p:txBody>
+          <a:bodyPr wrap="square" lIns="0" tIns="0" rIns="0" bIns="0" rtlCol="0" anchor="ctr"/>
+          <a:lstStyle/>
+          <a:p>
+            <a:pPr indent="0" marL="0">
+              <a:buNone/>
+            </a:pPr>
+            <a:r>
+              <a:rPr lang="en-US" sz="1100" i="1" dirty="0">
                 <a:solidFill>
                   <a:srgbClr val="929AA8"/>
                 </a:solidFill>
-                <a:latin typeface="Georgia" pitchFamily="34" charset="0"/>
-                <a:ea typeface="Georgia" pitchFamily="34" charset="-122"/>
-                <a:cs typeface="Georgia" pitchFamily="34" charset="-120"/>
-              </a:rPr>
-              <a:t>   1</a:t>
-            </a:r>
-            <a:endParaRPr lang="en-US" sz="1700" dirty="0"/>
-          </a:p>
-        </p:txBody>
-      </p:sp>
-      <p:sp>
-        <p:nvSpPr>
-          <p:cNvPr id="18" name="Text 15"/>
-          <p:cNvSpPr/>
-          <p:nvPr/>
-        </p:nvSpPr>
-        <p:spPr>
-          <a:xfrm>
-            <a:off x="6505956" y="2606040"/>
-            <a:ext cx="411480" cy="457200"/>
-          </a:xfrm>
-          <a:prstGeom prst="rect">
-            <a:avLst/>
-          </a:prstGeom>
-          <a:noFill/>
-          <a:ln/>
-        </p:spPr>
-        <p:txBody>
-          <a:bodyPr wrap="square" lIns="0" tIns="0" rIns="0" bIns="0" rtlCol="0" anchor="t"/>
-          <a:lstStyle/>
-          <a:p>
-            <a:pPr indent="0" marL="0">
-              <a:buNone/>
-            </a:pPr>
-            <a:r>
-              <a:rPr lang="en-US" sz="2400" b="1" dirty="0">
-                <a:solidFill>
-                  <a:srgbClr val="F2B134"/>
-                </a:solidFill>
-                <a:latin typeface="Georgia" pitchFamily="34" charset="0"/>
-                <a:ea typeface="Georgia" pitchFamily="34" charset="-122"/>
-                <a:cs typeface="Georgia" pitchFamily="34" charset="-120"/>
-              </a:rPr>
-              <a:t>1</a:t>
-            </a:r>
-            <a:endParaRPr lang="en-US" sz="2400" dirty="0"/>
-          </a:p>
-        </p:txBody>
-      </p:sp>
-      <p:sp>
-        <p:nvSpPr>
-          <p:cNvPr id="19" name="Text 16"/>
-          <p:cNvSpPr/>
-          <p:nvPr/>
-        </p:nvSpPr>
-        <p:spPr>
-          <a:xfrm>
-            <a:off x="7008876" y="2606040"/>
-            <a:ext cx="4265676" cy="1372870"/>
-          </a:xfrm>
-          <a:prstGeom prst="rect">
-            <a:avLst/>
-          </a:prstGeom>
-          <a:noFill/>
-          <a:ln/>
-        </p:spPr>
-        <p:txBody>
-          <a:bodyPr wrap="square" lIns="0" tIns="0" rIns="0" bIns="0" rtlCol="0" anchor="t"/>
-          <a:lstStyle/>
-          <a:p>
-            <a:pPr indent="0" marL="0">
-              <a:lnSpc>
-                <a:spcPct val="110000"/>
-              </a:lnSpc>
-              <a:spcAft>
-                <a:spcPts val="300"/>
-              </a:spcAft>
-              <a:buNone/>
-            </a:pPr>
-            <a:r>
-              <a:rPr lang="en-US" sz="1500" b="1" dirty="0">
-                <a:solidFill>
-                  <a:srgbClr val="F4F0E8"/>
-                </a:solidFill>
-                <a:latin typeface="Georgia" pitchFamily="34" charset="0"/>
-                <a:ea typeface="Georgia" pitchFamily="34" charset="-122"/>
-                <a:cs typeface="Georgia" pitchFamily="34" charset="-120"/>
-              </a:rPr>
-              <a:t>Can patients turn off SMS reminders and keep email only?</a:t>
-            </a:r>
-            <a:endParaRPr lang="en-US" sz="1500" dirty="0"/>
-          </a:p>
-          <a:p>
-            <a:pPr indent="0" marL="0">
-              <a:lnSpc>
-                <a:spcPct val="110000"/>
-              </a:lnSpc>
-              <a:spcAft>
-                <a:spcPts val="300"/>
-              </a:spcAft>
-              <a:buNone/>
-            </a:pPr>
-            <a:r>
-              <a:rPr lang="en-US" sz="1200" dirty="0">
-                <a:solidFill>
-                  <a:srgbClr val="B9BFC9"/>
-                </a:solidFill>
-                <a:latin typeface="Georgia" pitchFamily="34" charset="0"/>
-                <a:ea typeface="Georgia" pitchFamily="34" charset="-122"/>
-                <a:cs typeface="Georgia" pitchFamily="34" charset="-120"/>
-              </a:rPr>
-              <a:t>Today every patient with a phone number receives SMS reminders; some clinics report complaints.</a:t>
-            </a:r>
-            <a:endParaRPr lang="en-US" sz="1500" dirty="0"/>
-          </a:p>
-          <a:p>
-            <a:pPr indent="0" marL="0">
-              <a:lnSpc>
-                <a:spcPct val="110000"/>
-              </a:lnSpc>
-              <a:spcAft>
-                <a:spcPts val="300"/>
-              </a:spcAft>
-              <a:buNone/>
-            </a:pPr>
-            <a:r>
-              <a:rPr lang="en-US" sz="1100" i="1" dirty="0">
-                <a:solidFill>
-                  <a:srgbClr val="929AA8"/>
-                </a:solidFill>
-                <a:latin typeface="Georgia" pitchFamily="34" charset="0"/>
-                <a:ea typeface="Georgia" pitchFamily="34" charset="-122"/>
-                <a:cs typeface="Georgia" pitchFamily="34" charset="-120"/>
-              </a:rPr>
-              <a:t>Options: allow opt-out · clinic decides per patient · keep as today</a:t>
-            </a:r>
-            <a:endParaRPr lang="en-US" sz="1500" dirty="0"/>
+                <a:latin typeface="Arial" pitchFamily="34" charset="0"/>
+                <a:ea typeface="Arial" pitchFamily="34" charset="-122"/>
+                <a:cs typeface="Arial" pitchFamily="34" charset="-120"/>
+              </a:rPr>
+              <a:t>Source: lead's code reviews this week.</a:t>
+            </a:r>
+            <a:endParaRPr lang="en-US" sz="1100" dirty="0"/>
           </a:p>
         </p:txBody>
       </p:sp>
@@ -11739,13 +13515,13 @@
             <a:r>
               <a:rPr lang="en-US" sz="1200" b="1" dirty="0">
                 <a:solidFill>
-                  <a:srgbClr val="F2B134"/>
+                  <a:srgbClr val="FF7A6B"/>
                 </a:solidFill>
                 <a:latin typeface="Arial" pitchFamily="34" charset="0"/>
                 <a:ea typeface="Arial" pitchFamily="34" charset="-122"/>
                 <a:cs typeface="Arial" pitchFamily="34" charset="-120"/>
               </a:rPr>
-              <a:t>Team · Task Tracker</a:t>
+              <a:t>Needs Attention</a:t>
             </a:r>
             <a:endParaRPr lang="en-US" sz="1200" dirty="0"/>
           </a:p>
@@ -11825,7 +13601,7 @@
                 <a:ea typeface="Georgia" pitchFamily="34" charset="-122"/>
                 <a:cs typeface="Georgia" pitchFamily="34" charset="-120"/>
               </a:rPr>
-              <a:t>Developer Task Track</a:t>
+              <a:t>Blockers &amp; Decisions Needed</a:t>
             </a:r>
             <a:endParaRPr lang="en-US" sz="2600" dirty="0"/>
           </a:p>
@@ -11872,7 +13648,7 @@
       </p:sp>
       <p:pic>
         <p:nvPicPr>
-          <p:cNvPr id="8" name="Image 0" descr="/var/folders/lw/rmylcyvd5rjfxk9g1z9rrm8w0000gq/T/showship-deck-oVNQqv/paper_mark.png">    </p:cNvPr>
+          <p:cNvPr id="8" name="Image 0" descr="/var/folders/lw/rmylcyvd5rjfxk9g1z9rrm8w0000gq/T/showship-deck-EGIwvT/paper_mark.png">    </p:cNvPr>
           <p:cNvPicPr>
             <a:picLocks noChangeAspect="1"/>
           </p:cNvPicPr>
@@ -11956,7 +13732,7 @@
         <p:spPr>
           <a:xfrm>
             <a:off x="640080" y="1783080"/>
-            <a:ext cx="10908792" cy="1280160"/>
+            <a:ext cx="5317236" cy="2515870"/>
           </a:xfrm>
           <a:prstGeom prst="rect">
             <a:avLst/>
@@ -11969,30 +13745,50 @@
       </p:sp>
       <p:sp>
         <p:nvSpPr>
-          <p:cNvPr id="11" name="Text 8"/>
-          <p:cNvSpPr/>
-          <p:nvPr/>
-        </p:nvSpPr>
-        <p:spPr>
-          <a:xfrm>
-            <a:off x="868680" y="1874520"/>
-            <a:ext cx="3291840" cy="292608"/>
-          </a:xfrm>
-          <a:prstGeom prst="rect">
-            <a:avLst/>
-          </a:prstGeom>
-          <a:noFill/>
-          <a:ln/>
-        </p:spPr>
-        <p:txBody>
-          <a:bodyPr wrap="square" lIns="0" tIns="0" rIns="0" bIns="0" rtlCol="0" anchor="t"/>
-          <a:lstStyle/>
-          <a:p>
-            <a:pPr indent="0" marL="0">
-              <a:buNone/>
-            </a:pPr>
-            <a:r>
-              <a:rPr lang="en-US" sz="1500" b="1" dirty="0">
+          <p:cNvPr id="11" name="Shape 8"/>
+          <p:cNvSpPr/>
+          <p:nvPr/>
+        </p:nvSpPr>
+        <p:spPr>
+          <a:xfrm>
+            <a:off x="640080" y="1783080"/>
+            <a:ext cx="5317236" cy="73152"/>
+          </a:xfrm>
+          <a:prstGeom prst="rect">
+            <a:avLst/>
+          </a:prstGeom>
+          <a:solidFill>
+            <a:srgbClr val="FF7A6B"/>
+          </a:solidFill>
+          <a:ln/>
+        </p:spPr>
+      </p:sp>
+      <p:sp>
+        <p:nvSpPr>
+          <p:cNvPr id="12" name="Text 9"/>
+          <p:cNvSpPr/>
+          <p:nvPr/>
+        </p:nvSpPr>
+        <p:spPr>
+          <a:xfrm>
+            <a:off x="914400" y="2011680"/>
+            <a:ext cx="4768596" cy="411480"/>
+          </a:xfrm>
+          <a:prstGeom prst="rect">
+            <a:avLst/>
+          </a:prstGeom>
+          <a:noFill/>
+          <a:ln/>
+        </p:spPr>
+        <p:txBody>
+          <a:bodyPr wrap="square" lIns="0" tIns="0" rIns="0" bIns="0" rtlCol="0" anchor="ctr"/>
+          <a:lstStyle/>
+          <a:p>
+            <a:pPr indent="0" marL="0">
+              <a:buNone/>
+            </a:pPr>
+            <a:r>
+              <a:rPr lang="en-US" sz="1700" b="1" dirty="0">
                 <a:solidFill>
                   <a:srgbClr val="F4F0E8"/>
                 </a:solidFill>
@@ -12000,460 +13796,166 @@
                 <a:ea typeface="Georgia" pitchFamily="34" charset="-122"/>
                 <a:cs typeface="Georgia" pitchFamily="34" charset="-120"/>
               </a:rPr>
-              <a:t>Leo Park @Leo</a:t>
-            </a:r>
-            <a:endParaRPr lang="en-US" sz="1500" dirty="0"/>
-          </a:p>
-        </p:txBody>
-      </p:sp>
-      <p:sp>
-        <p:nvSpPr>
-          <p:cNvPr id="12" name="Text 9"/>
-          <p:cNvSpPr/>
-          <p:nvPr/>
-        </p:nvSpPr>
-        <p:spPr>
-          <a:xfrm>
-            <a:off x="868680" y="2185416"/>
-            <a:ext cx="3291840" cy="219456"/>
-          </a:xfrm>
-          <a:prstGeom prst="rect">
-            <a:avLst/>
-          </a:prstGeom>
-          <a:noFill/>
-          <a:ln/>
-        </p:spPr>
-        <p:txBody>
-          <a:bodyPr wrap="square" lIns="0" tIns="0" rIns="0" bIns="0" rtlCol="0" anchor="ctr">
-            <a:normAutofit/>
-          </a:bodyPr>
-          <a:lstStyle/>
-          <a:p>
-            <a:pPr indent="0" marL="0">
-              <a:buNone/>
-            </a:pPr>
-            <a:r>
-              <a:rPr lang="en-US" sz="1100" b="1" dirty="0">
-                <a:solidFill>
-                  <a:srgbClr val="5CC8D7"/>
-                </a:solidFill>
-                <a:latin typeface="Arial" pitchFamily="34" charset="0"/>
-                <a:ea typeface="Arial" pitchFamily="34" charset="-122"/>
-                <a:cs typeface="Arial" pitchFamily="34" charset="-120"/>
-              </a:rPr>
-              <a:t>ClinicBook · Patient App</a:t>
-            </a:r>
-            <a:endParaRPr lang="en-US" sz="1100" dirty="0"/>
-          </a:p>
-        </p:txBody>
-      </p:sp>
-      <p:sp>
-        <p:nvSpPr>
-          <p:cNvPr id="13" name="Text 10"/>
-          <p:cNvSpPr/>
-          <p:nvPr/>
-        </p:nvSpPr>
-        <p:spPr>
-          <a:xfrm>
-            <a:off x="868680" y="2441448"/>
-            <a:ext cx="3291840" cy="576072"/>
-          </a:xfrm>
-          <a:prstGeom prst="rect">
-            <a:avLst/>
-          </a:prstGeom>
-          <a:noFill/>
-          <a:ln/>
-        </p:spPr>
-        <p:txBody>
-          <a:bodyPr wrap="square" lIns="0" tIns="0" rIns="0" bIns="0" rtlCol="0" anchor="t"/>
-          <a:lstStyle/>
-          <a:p>
-            <a:pPr indent="0" marL="0">
-              <a:buNone/>
-            </a:pPr>
-            <a:r>
-              <a:rPr lang="en-US" sz="1100" i="1" dirty="0">
-                <a:solidFill>
-                  <a:srgbClr val="B9BFC9"/>
-                </a:solidFill>
-                <a:latin typeface="Arial" pitchFamily="34" charset="0"/>
-                <a:ea typeface="Arial" pitchFamily="34" charset="-122"/>
-                <a:cs typeface="Arial" pitchFamily="34" charset="-120"/>
-              </a:rPr>
-              <a:t>Sign-in and clinic search done; booking calendar in progress.</a:t>
-            </a:r>
-            <a:endParaRPr lang="en-US" sz="1100" dirty="0"/>
-          </a:p>
-        </p:txBody>
-      </p:sp>
-      <p:sp>
-        <p:nvSpPr>
-          <p:cNvPr id="14" name="Text 11"/>
-          <p:cNvSpPr/>
-          <p:nvPr/>
-        </p:nvSpPr>
-        <p:spPr>
-          <a:xfrm>
-            <a:off x="4480560" y="1874520"/>
-            <a:ext cx="2103120" cy="548640"/>
-          </a:xfrm>
-          <a:prstGeom prst="rect">
-            <a:avLst/>
-          </a:prstGeom>
-          <a:noFill/>
-          <a:ln/>
-        </p:spPr>
-        <p:txBody>
-          <a:bodyPr wrap="square" lIns="0" tIns="0" rIns="0" bIns="0" rtlCol="0" anchor="ctr"/>
-          <a:lstStyle/>
-          <a:p>
-            <a:pPr indent="0" marL="0">
-              <a:buNone/>
-            </a:pPr>
-            <a:r>
-              <a:rPr lang="en-US" sz="2800" b="1" dirty="0">
-                <a:solidFill>
-                  <a:srgbClr val="5CC8D7"/>
+              <a:t>Blockers and risks</a:t>
+            </a:r>
+            <a:pPr indent="0" marL="0">
+              <a:buNone/>
+            </a:pPr>
+            <a:r>
+              <a:rPr lang="en-US" sz="1700" dirty="0">
+                <a:solidFill>
+                  <a:srgbClr val="929AA8"/>
                 </a:solidFill>
                 <a:latin typeface="Georgia" pitchFamily="34" charset="0"/>
                 <a:ea typeface="Georgia" pitchFamily="34" charset="-122"/>
                 <a:cs typeface="Georgia" pitchFamily="34" charset="-120"/>
               </a:rPr>
-              <a:t>60%</a:t>
-            </a:r>
-            <a:endParaRPr lang="en-US" sz="2800" dirty="0"/>
-          </a:p>
-        </p:txBody>
-      </p:sp>
-      <p:sp>
-        <p:nvSpPr>
-          <p:cNvPr id="15" name="Text 12"/>
-          <p:cNvSpPr/>
-          <p:nvPr/>
-        </p:nvSpPr>
-        <p:spPr>
-          <a:xfrm>
-            <a:off x="4480560" y="2441448"/>
-            <a:ext cx="2103120" cy="256032"/>
-          </a:xfrm>
-          <a:prstGeom prst="rect">
-            <a:avLst/>
-          </a:prstGeom>
-          <a:noFill/>
-          <a:ln/>
-        </p:spPr>
-        <p:txBody>
-          <a:bodyPr wrap="square" lIns="0" tIns="0" rIns="0" bIns="0" rtlCol="0" anchor="ctr"/>
-          <a:lstStyle/>
-          <a:p>
-            <a:pPr indent="0" marL="0">
-              <a:buNone/>
-            </a:pPr>
-            <a:r>
-              <a:rPr lang="en-US" sz="1100" dirty="0">
+              <a:t>   1</a:t>
+            </a:r>
+            <a:endParaRPr lang="en-US" sz="1700" dirty="0"/>
+          </a:p>
+        </p:txBody>
+      </p:sp>
+      <p:sp>
+        <p:nvSpPr>
+          <p:cNvPr id="13" name="Text 10"/>
+          <p:cNvSpPr/>
+          <p:nvPr/>
+        </p:nvSpPr>
+        <p:spPr>
+          <a:xfrm>
+            <a:off x="914400" y="2606040"/>
+            <a:ext cx="411480" cy="457200"/>
+          </a:xfrm>
+          <a:prstGeom prst="rect">
+            <a:avLst/>
+          </a:prstGeom>
+          <a:noFill/>
+          <a:ln/>
+        </p:spPr>
+        <p:txBody>
+          <a:bodyPr wrap="square" lIns="0" tIns="0" rIns="0" bIns="0" rtlCol="0" anchor="t"/>
+          <a:lstStyle/>
+          <a:p>
+            <a:pPr indent="0" marL="0">
+              <a:buNone/>
+            </a:pPr>
+            <a:r>
+              <a:rPr lang="en-US" sz="2400" b="1" dirty="0">
+                <a:solidFill>
+                  <a:srgbClr val="FF7A6B"/>
+                </a:solidFill>
+                <a:latin typeface="Georgia" pitchFamily="34" charset="0"/>
+                <a:ea typeface="Georgia" pitchFamily="34" charset="-122"/>
+                <a:cs typeface="Georgia" pitchFamily="34" charset="-120"/>
+              </a:rPr>
+              <a:t>1</a:t>
+            </a:r>
+            <a:endParaRPr lang="en-US" sz="2400" dirty="0"/>
+          </a:p>
+        </p:txBody>
+      </p:sp>
+      <p:sp>
+        <p:nvSpPr>
+          <p:cNvPr id="14" name="Text 11"/>
+          <p:cNvSpPr/>
+          <p:nvPr/>
+        </p:nvSpPr>
+        <p:spPr>
+          <a:xfrm>
+            <a:off x="1417320" y="2606040"/>
+            <a:ext cx="4265676" cy="953135"/>
+          </a:xfrm>
+          <a:prstGeom prst="rect">
+            <a:avLst/>
+          </a:prstGeom>
+          <a:noFill/>
+          <a:ln/>
+        </p:spPr>
+        <p:txBody>
+          <a:bodyPr wrap="square" lIns="0" tIns="0" rIns="0" bIns="0" rtlCol="0" anchor="t"/>
+          <a:lstStyle/>
+          <a:p>
+            <a:pPr indent="0" marL="0">
+              <a:lnSpc>
+                <a:spcPct val="110000"/>
+              </a:lnSpc>
+              <a:spcAft>
+                <a:spcPts val="300"/>
+              </a:spcAft>
+              <a:buNone/>
+            </a:pPr>
+            <a:r>
+              <a:rPr lang="en-US" sz="1500" b="1" dirty="0">
+                <a:solidFill>
+                  <a:srgbClr val="F4F0E8"/>
+                </a:solidFill>
+                <a:latin typeface="Georgia" pitchFamily="34" charset="0"/>
+                <a:ea typeface="Georgia" pitchFamily="34" charset="-122"/>
+                <a:cs typeface="Georgia" pitchFamily="34" charset="-120"/>
+              </a:rPr>
+              <a:t>Reminders release waiting on one fix</a:t>
+            </a:r>
+            <a:endParaRPr lang="en-US" sz="1500" dirty="0"/>
+          </a:p>
+          <a:p>
+            <a:pPr indent="0" marL="0">
+              <a:lnSpc>
+                <a:spcPct val="110000"/>
+              </a:lnSpc>
+              <a:spcAft>
+                <a:spcPts val="300"/>
+              </a:spcAft>
+              <a:buNone/>
+            </a:pPr>
+            <a:r>
+              <a:rPr lang="en-US" sz="1200" dirty="0">
                 <a:solidFill>
                   <a:srgbClr val="B9BFC9"/>
                 </a:solidFill>
-                <a:latin typeface="Arial" pitchFamily="34" charset="0"/>
-                <a:ea typeface="Arial" pitchFamily="34" charset="-122"/>
-                <a:cs typeface="Arial" pitchFamily="34" charset="-120"/>
-              </a:rPr>
-              <a:t>3 done, 2 open</a:t>
-            </a:r>
-            <a:endParaRPr lang="en-US" sz="1100" dirty="0"/>
-          </a:p>
-        </p:txBody>
-      </p:sp>
-      <p:sp>
-        <p:nvSpPr>
-          <p:cNvPr id="16" name="Shape 13"/>
-          <p:cNvSpPr/>
-          <p:nvPr/>
-        </p:nvSpPr>
-        <p:spPr>
-          <a:xfrm>
-            <a:off x="4480560" y="2788920"/>
-            <a:ext cx="2103120" cy="73152"/>
-          </a:xfrm>
-          <a:prstGeom prst="rect">
-            <a:avLst/>
-          </a:prstGeom>
-          <a:solidFill>
-            <a:srgbClr val="36393E"/>
-          </a:solidFill>
-          <a:ln/>
-        </p:spPr>
-      </p:sp>
-      <p:sp>
-        <p:nvSpPr>
-          <p:cNvPr id="17" name="Shape 14"/>
-          <p:cNvSpPr/>
-          <p:nvPr/>
-        </p:nvSpPr>
-        <p:spPr>
-          <a:xfrm>
-            <a:off x="4480560" y="2788920"/>
-            <a:ext cx="1261872" cy="73152"/>
-          </a:xfrm>
-          <a:prstGeom prst="rect">
-            <a:avLst/>
-          </a:prstGeom>
-          <a:solidFill>
-            <a:srgbClr val="5CC8D7"/>
-          </a:solidFill>
-          <a:ln/>
-        </p:spPr>
-      </p:sp>
-      <p:sp>
-        <p:nvSpPr>
-          <p:cNvPr id="18" name="Shape 15"/>
-          <p:cNvSpPr/>
-          <p:nvPr/>
-        </p:nvSpPr>
-        <p:spPr>
-          <a:xfrm>
-            <a:off x="6903720" y="1984248"/>
-            <a:ext cx="109728" cy="109728"/>
-          </a:xfrm>
-          <a:prstGeom prst="rect">
-            <a:avLst/>
-          </a:prstGeom>
-          <a:solidFill>
-            <a:srgbClr val="5CC8D7"/>
-          </a:solidFill>
-          <a:ln/>
-        </p:spPr>
-      </p:sp>
-      <p:sp>
-        <p:nvSpPr>
-          <p:cNvPr id="19" name="Text 16"/>
-          <p:cNvSpPr/>
-          <p:nvPr/>
-        </p:nvSpPr>
-        <p:spPr>
-          <a:xfrm>
-            <a:off x="7104888" y="1920240"/>
-            <a:ext cx="1888236" cy="365760"/>
-          </a:xfrm>
-          <a:prstGeom prst="rect">
-            <a:avLst/>
-          </a:prstGeom>
-          <a:noFill/>
-          <a:ln/>
-        </p:spPr>
-        <p:txBody>
-          <a:bodyPr wrap="square" lIns="0" tIns="0" rIns="0" bIns="0" rtlCol="0" anchor="t"/>
-          <a:lstStyle/>
-          <a:p>
-            <a:pPr indent="0" marL="0">
-              <a:buNone/>
-            </a:pPr>
-            <a:r>
-              <a:rPr lang="en-US" sz="1100" dirty="0">
-                <a:solidFill>
-                  <a:srgbClr val="F4F0E8"/>
-                </a:solidFill>
-                <a:latin typeface="Arial" pitchFamily="34" charset="0"/>
-                <a:ea typeface="Arial" pitchFamily="34" charset="-122"/>
-                <a:cs typeface="Arial" pitchFamily="34" charset="-120"/>
-              </a:rPr>
-              <a:t>P1 · Accounts &amp; Sign-in (3/3)</a:t>
-            </a:r>
-            <a:endParaRPr lang="en-US" sz="1100" dirty="0"/>
-          </a:p>
-        </p:txBody>
-      </p:sp>
-      <p:sp>
-        <p:nvSpPr>
-          <p:cNvPr id="20" name="Shape 17"/>
-          <p:cNvSpPr/>
-          <p:nvPr/>
-        </p:nvSpPr>
-        <p:spPr>
-          <a:xfrm>
-            <a:off x="6903720" y="2350008"/>
-            <a:ext cx="109728" cy="109728"/>
-          </a:xfrm>
-          <a:prstGeom prst="rect">
-            <a:avLst/>
-          </a:prstGeom>
-          <a:solidFill>
-            <a:srgbClr val="5CC8D7"/>
-          </a:solidFill>
-          <a:ln/>
-        </p:spPr>
-      </p:sp>
-      <p:sp>
-        <p:nvSpPr>
-          <p:cNvPr id="21" name="Text 18"/>
-          <p:cNvSpPr/>
-          <p:nvPr/>
-        </p:nvSpPr>
-        <p:spPr>
-          <a:xfrm>
-            <a:off x="7104888" y="2286000"/>
-            <a:ext cx="1888236" cy="365760"/>
-          </a:xfrm>
-          <a:prstGeom prst="rect">
-            <a:avLst/>
-          </a:prstGeom>
-          <a:noFill/>
-          <a:ln/>
-        </p:spPr>
-        <p:txBody>
-          <a:bodyPr wrap="square" lIns="0" tIns="0" rIns="0" bIns="0" rtlCol="0" anchor="t"/>
-          <a:lstStyle/>
-          <a:p>
-            <a:pPr indent="0" marL="0">
-              <a:buNone/>
-            </a:pPr>
-            <a:r>
-              <a:rPr lang="en-US" sz="1100" dirty="0">
-                <a:solidFill>
-                  <a:srgbClr val="F4F0E8"/>
-                </a:solidFill>
-                <a:latin typeface="Arial" pitchFamily="34" charset="0"/>
-                <a:ea typeface="Arial" pitchFamily="34" charset="-122"/>
-                <a:cs typeface="Arial" pitchFamily="34" charset="-120"/>
-              </a:rPr>
-              <a:t>P2 · Clinic Search &amp; Maps (5/5)</a:t>
-            </a:r>
-            <a:endParaRPr lang="en-US" sz="1100" dirty="0"/>
-          </a:p>
-        </p:txBody>
-      </p:sp>
-      <p:sp>
-        <p:nvSpPr>
-          <p:cNvPr id="22" name="Shape 19"/>
-          <p:cNvSpPr/>
-          <p:nvPr/>
-        </p:nvSpPr>
-        <p:spPr>
-          <a:xfrm>
-            <a:off x="9111996" y="1984248"/>
-            <a:ext cx="109728" cy="109728"/>
-          </a:xfrm>
-          <a:prstGeom prst="rect">
-            <a:avLst/>
-          </a:prstGeom>
-          <a:ln w="15875">
-            <a:solidFill>
-              <a:srgbClr val="5CC8D7"/>
-            </a:solidFill>
-            <a:prstDash val="solid"/>
-          </a:ln>
-        </p:spPr>
-      </p:sp>
-      <p:sp>
-        <p:nvSpPr>
-          <p:cNvPr id="23" name="Text 20"/>
-          <p:cNvSpPr/>
-          <p:nvPr/>
-        </p:nvSpPr>
-        <p:spPr>
-          <a:xfrm>
-            <a:off x="9313164" y="1920240"/>
-            <a:ext cx="1888236" cy="365760"/>
-          </a:xfrm>
-          <a:prstGeom prst="rect">
-            <a:avLst/>
-          </a:prstGeom>
-          <a:noFill/>
-          <a:ln/>
-        </p:spPr>
-        <p:txBody>
-          <a:bodyPr wrap="square" lIns="0" tIns="0" rIns="0" bIns="0" rtlCol="0" anchor="t"/>
-          <a:lstStyle/>
-          <a:p>
-            <a:pPr indent="0" marL="0">
-              <a:buNone/>
-            </a:pPr>
-            <a:r>
-              <a:rPr lang="en-US" sz="1100" dirty="0">
-                <a:solidFill>
-                  <a:srgbClr val="F4F0E8"/>
-                </a:solidFill>
-                <a:latin typeface="Arial" pitchFamily="34" charset="0"/>
-                <a:ea typeface="Arial" pitchFamily="34" charset="-122"/>
-                <a:cs typeface="Arial" pitchFamily="34" charset="-120"/>
-              </a:rPr>
-              <a:t>P3 · Booking Calendar (2/5)</a:t>
-            </a:r>
-            <a:endParaRPr lang="en-US" sz="1100" dirty="0"/>
-          </a:p>
-        </p:txBody>
-      </p:sp>
-      <p:sp>
-        <p:nvSpPr>
-          <p:cNvPr id="24" name="Shape 21"/>
-          <p:cNvSpPr/>
-          <p:nvPr/>
-        </p:nvSpPr>
-        <p:spPr>
-          <a:xfrm>
-            <a:off x="9111996" y="2350008"/>
-            <a:ext cx="109728" cy="109728"/>
-          </a:xfrm>
-          <a:prstGeom prst="rect">
-            <a:avLst/>
-          </a:prstGeom>
-          <a:ln w="15875">
-            <a:solidFill>
-              <a:srgbClr val="929AA8"/>
-            </a:solidFill>
-            <a:prstDash val="solid"/>
-          </a:ln>
-        </p:spPr>
-      </p:sp>
-      <p:sp>
-        <p:nvSpPr>
-          <p:cNvPr id="25" name="Text 22"/>
-          <p:cNvSpPr/>
-          <p:nvPr/>
-        </p:nvSpPr>
-        <p:spPr>
-          <a:xfrm>
-            <a:off x="9313164" y="2286000"/>
-            <a:ext cx="1888236" cy="365760"/>
-          </a:xfrm>
-          <a:prstGeom prst="rect">
-            <a:avLst/>
-          </a:prstGeom>
-          <a:noFill/>
-          <a:ln/>
-        </p:spPr>
-        <p:txBody>
-          <a:bodyPr wrap="square" lIns="0" tIns="0" rIns="0" bIns="0" rtlCol="0" anchor="t"/>
-          <a:lstStyle/>
-          <a:p>
-            <a:pPr indent="0" marL="0">
-              <a:buNone/>
-            </a:pPr>
-            <a:r>
-              <a:rPr lang="en-US" sz="1100" dirty="0">
+                <a:latin typeface="Georgia" pitchFamily="34" charset="0"/>
+                <a:ea typeface="Georgia" pitchFamily="34" charset="-122"/>
+                <a:cs typeface="Georgia" pitchFamily="34" charset="-120"/>
+              </a:rPr>
+              <a:t>Duplicate reminders must be prevented before release. Fix is small and already tested.</a:t>
+            </a:r>
+            <a:endParaRPr lang="en-US" sz="1500" dirty="0"/>
+          </a:p>
+          <a:p>
+            <a:pPr indent="0" marL="0">
+              <a:lnSpc>
+                <a:spcPct val="110000"/>
+              </a:lnSpc>
+              <a:spcAft>
+                <a:spcPts val="300"/>
+              </a:spcAft>
+              <a:buNone/>
+            </a:pPr>
+            <a:r>
+              <a:rPr lang="en-US" sz="1100" i="1" dirty="0">
                 <a:solidFill>
                   <a:srgbClr val="929AA8"/>
                 </a:solidFill>
-                <a:latin typeface="Arial" pitchFamily="34" charset="0"/>
-                <a:ea typeface="Arial" pitchFamily="34" charset="-122"/>
-                <a:cs typeface="Arial" pitchFamily="34" charset="-120"/>
-              </a:rPr>
-              <a:t>P4 · Payments &amp; Receipts (0/4)</a:t>
-            </a:r>
-            <a:endParaRPr lang="en-US" sz="1100" dirty="0"/>
-          </a:p>
-        </p:txBody>
-      </p:sp>
-      <p:sp>
-        <p:nvSpPr>
-          <p:cNvPr id="26" name="Shape 23"/>
-          <p:cNvSpPr/>
-          <p:nvPr/>
-        </p:nvSpPr>
-        <p:spPr>
-          <a:xfrm>
-            <a:off x="640080" y="3246120"/>
-            <a:ext cx="10908792" cy="1280160"/>
+                <a:latin typeface="Georgia" pitchFamily="34" charset="0"/>
+                <a:ea typeface="Georgia" pitchFamily="34" charset="-122"/>
+                <a:cs typeface="Georgia" pitchFamily="34" charset="-120"/>
+              </a:rPr>
+              <a:t>Owner: Nina Rao @Nina · Expected: next week</a:t>
+            </a:r>
+            <a:endParaRPr lang="en-US" sz="1500" dirty="0"/>
+          </a:p>
+        </p:txBody>
+      </p:sp>
+      <p:sp>
+        <p:nvSpPr>
+          <p:cNvPr id="15" name="Shape 12"/>
+          <p:cNvSpPr/>
+          <p:nvPr/>
+        </p:nvSpPr>
+        <p:spPr>
+          <a:xfrm>
+            <a:off x="6231636" y="1783080"/>
+            <a:ext cx="5317236" cy="2515870"/>
           </a:xfrm>
           <a:prstGeom prst="rect">
             <a:avLst/>
@@ -12466,30 +13968,50 @@
       </p:sp>
       <p:sp>
         <p:nvSpPr>
-          <p:cNvPr id="27" name="Text 24"/>
-          <p:cNvSpPr/>
-          <p:nvPr/>
-        </p:nvSpPr>
-        <p:spPr>
-          <a:xfrm>
-            <a:off x="868680" y="3337560"/>
-            <a:ext cx="3291840" cy="292608"/>
-          </a:xfrm>
-          <a:prstGeom prst="rect">
-            <a:avLst/>
-          </a:prstGeom>
-          <a:noFill/>
-          <a:ln/>
-        </p:spPr>
-        <p:txBody>
-          <a:bodyPr wrap="square" lIns="0" tIns="0" rIns="0" bIns="0" rtlCol="0" anchor="t"/>
-          <a:lstStyle/>
-          <a:p>
-            <a:pPr indent="0" marL="0">
-              <a:buNone/>
-            </a:pPr>
-            <a:r>
-              <a:rPr lang="en-US" sz="1500" b="1" dirty="0">
+          <p:cNvPr id="16" name="Shape 13"/>
+          <p:cNvSpPr/>
+          <p:nvPr/>
+        </p:nvSpPr>
+        <p:spPr>
+          <a:xfrm>
+            <a:off x="6231636" y="1783080"/>
+            <a:ext cx="5317236" cy="73152"/>
+          </a:xfrm>
+          <a:prstGeom prst="rect">
+            <a:avLst/>
+          </a:prstGeom>
+          <a:solidFill>
+            <a:srgbClr val="F2B134"/>
+          </a:solidFill>
+          <a:ln/>
+        </p:spPr>
+      </p:sp>
+      <p:sp>
+        <p:nvSpPr>
+          <p:cNvPr id="17" name="Text 14"/>
+          <p:cNvSpPr/>
+          <p:nvPr/>
+        </p:nvSpPr>
+        <p:spPr>
+          <a:xfrm>
+            <a:off x="6505956" y="2011680"/>
+            <a:ext cx="4768596" cy="411480"/>
+          </a:xfrm>
+          <a:prstGeom prst="rect">
+            <a:avLst/>
+          </a:prstGeom>
+          <a:noFill/>
+          <a:ln/>
+        </p:spPr>
+        <p:txBody>
+          <a:bodyPr wrap="square" lIns="0" tIns="0" rIns="0" bIns="0" rtlCol="0" anchor="ctr"/>
+          <a:lstStyle/>
+          <a:p>
+            <a:pPr indent="0" marL="0">
+              <a:buNone/>
+            </a:pPr>
+            <a:r>
+              <a:rPr lang="en-US" sz="1700" b="1" dirty="0">
                 <a:solidFill>
                   <a:srgbClr val="F4F0E8"/>
                 </a:solidFill>
@@ -12497,240 +14019,36 @@
                 <a:ea typeface="Georgia" pitchFamily="34" charset="-122"/>
                 <a:cs typeface="Georgia" pitchFamily="34" charset="-120"/>
               </a:rPr>
-              <a:t>Nina Rao @Nina</a:t>
-            </a:r>
-            <a:endParaRPr lang="en-US" sz="1500" dirty="0"/>
-          </a:p>
-        </p:txBody>
-      </p:sp>
-      <p:sp>
-        <p:nvSpPr>
-          <p:cNvPr id="28" name="Text 25"/>
-          <p:cNvSpPr/>
-          <p:nvPr/>
-        </p:nvSpPr>
-        <p:spPr>
-          <a:xfrm>
-            <a:off x="868680" y="3648456"/>
-            <a:ext cx="3291840" cy="219456"/>
-          </a:xfrm>
-          <a:prstGeom prst="rect">
-            <a:avLst/>
-          </a:prstGeom>
-          <a:noFill/>
-          <a:ln/>
-        </p:spPr>
-        <p:txBody>
-          <a:bodyPr wrap="square" lIns="0" tIns="0" rIns="0" bIns="0" rtlCol="0" anchor="ctr">
-            <a:normAutofit/>
-          </a:bodyPr>
-          <a:lstStyle/>
-          <a:p>
-            <a:pPr indent="0" marL="0">
-              <a:buNone/>
-            </a:pPr>
-            <a:r>
-              <a:rPr lang="en-US" sz="1100" b="1" dirty="0">
-                <a:solidFill>
-                  <a:srgbClr val="5CC8D7"/>
-                </a:solidFill>
-                <a:latin typeface="Arial" pitchFamily="34" charset="0"/>
-                <a:ea typeface="Arial" pitchFamily="34" charset="-122"/>
-                <a:cs typeface="Arial" pitchFamily="34" charset="-120"/>
-              </a:rPr>
-              <a:t>ClinicBook · Clinic Dashboard</a:t>
-            </a:r>
-            <a:endParaRPr lang="en-US" sz="1100" dirty="0"/>
-          </a:p>
-        </p:txBody>
-      </p:sp>
-      <p:sp>
-        <p:nvSpPr>
-          <p:cNvPr id="29" name="Text 26"/>
-          <p:cNvSpPr/>
-          <p:nvPr/>
-        </p:nvSpPr>
-        <p:spPr>
-          <a:xfrm>
-            <a:off x="868680" y="3904488"/>
-            <a:ext cx="3291840" cy="576072"/>
-          </a:xfrm>
-          <a:prstGeom prst="rect">
-            <a:avLst/>
-          </a:prstGeom>
-          <a:noFill/>
-          <a:ln/>
-        </p:spPr>
-        <p:txBody>
-          <a:bodyPr wrap="square" lIns="0" tIns="0" rIns="0" bIns="0" rtlCol="0" anchor="t"/>
-          <a:lstStyle/>
-          <a:p>
-            <a:pPr indent="0" marL="0">
-              <a:buNone/>
-            </a:pPr>
-            <a:r>
-              <a:rPr lang="en-US" sz="1100" i="1" dirty="0">
-                <a:solidFill>
-                  <a:srgbClr val="B9BFC9"/>
-                </a:solidFill>
-                <a:latin typeface="Arial" pitchFamily="34" charset="0"/>
-                <a:ea typeface="Arial" pitchFamily="34" charset="-122"/>
-                <a:cs typeface="Arial" pitchFamily="34" charset="-120"/>
-              </a:rPr>
-              <a:t>Onboarding and schedules done; reminders in final review.</a:t>
-            </a:r>
-            <a:endParaRPr lang="en-US" sz="1100" dirty="0"/>
-          </a:p>
-        </p:txBody>
-      </p:sp>
-      <p:sp>
-        <p:nvSpPr>
-          <p:cNvPr id="30" name="Text 27"/>
-          <p:cNvSpPr/>
-          <p:nvPr/>
-        </p:nvSpPr>
-        <p:spPr>
-          <a:xfrm>
-            <a:off x="4480560" y="3337560"/>
-            <a:ext cx="2103120" cy="548640"/>
-          </a:xfrm>
-          <a:prstGeom prst="rect">
-            <a:avLst/>
-          </a:prstGeom>
-          <a:noFill/>
-          <a:ln/>
-        </p:spPr>
-        <p:txBody>
-          <a:bodyPr wrap="square" lIns="0" tIns="0" rIns="0" bIns="0" rtlCol="0" anchor="ctr"/>
-          <a:lstStyle/>
-          <a:p>
-            <a:pPr indent="0" marL="0">
-              <a:buNone/>
-            </a:pPr>
-            <a:r>
-              <a:rPr lang="en-US" sz="2800" b="1" dirty="0">
-                <a:solidFill>
-                  <a:srgbClr val="5CC8D7"/>
+              <a:t>Decisions needed</a:t>
+            </a:r>
+            <a:pPr indent="0" marL="0">
+              <a:buNone/>
+            </a:pPr>
+            <a:r>
+              <a:rPr lang="en-US" sz="1700" dirty="0">
+                <a:solidFill>
+                  <a:srgbClr val="929AA8"/>
                 </a:solidFill>
                 <a:latin typeface="Georgia" pitchFamily="34" charset="0"/>
                 <a:ea typeface="Georgia" pitchFamily="34" charset="-122"/>
                 <a:cs typeface="Georgia" pitchFamily="34" charset="-120"/>
               </a:rPr>
-              <a:t>70%</a:t>
-            </a:r>
-            <a:endParaRPr lang="en-US" sz="2800" dirty="0"/>
-          </a:p>
-        </p:txBody>
-      </p:sp>
-      <p:sp>
-        <p:nvSpPr>
-          <p:cNvPr id="31" name="Text 28"/>
-          <p:cNvSpPr/>
-          <p:nvPr/>
-        </p:nvSpPr>
-        <p:spPr>
-          <a:xfrm>
-            <a:off x="4480560" y="3904488"/>
-            <a:ext cx="2103120" cy="256032"/>
-          </a:xfrm>
-          <a:prstGeom prst="rect">
-            <a:avLst/>
-          </a:prstGeom>
-          <a:noFill/>
-          <a:ln/>
-        </p:spPr>
-        <p:txBody>
-          <a:bodyPr wrap="square" lIns="0" tIns="0" rIns="0" bIns="0" rtlCol="0" anchor="ctr"/>
-          <a:lstStyle/>
-          <a:p>
-            <a:pPr indent="0" marL="0">
-              <a:buNone/>
-            </a:pPr>
-            <a:r>
-              <a:rPr lang="en-US" sz="1100" dirty="0">
-                <a:solidFill>
-                  <a:srgbClr val="B9BFC9"/>
-                </a:solidFill>
-                <a:latin typeface="Arial" pitchFamily="34" charset="0"/>
-                <a:ea typeface="Arial" pitchFamily="34" charset="-122"/>
-                <a:cs typeface="Arial" pitchFamily="34" charset="-120"/>
-              </a:rPr>
-              <a:t>4 done, 1 open</a:t>
-            </a:r>
-            <a:endParaRPr lang="en-US" sz="1100" dirty="0"/>
-          </a:p>
-        </p:txBody>
-      </p:sp>
-      <p:sp>
-        <p:nvSpPr>
-          <p:cNvPr id="32" name="Shape 29"/>
-          <p:cNvSpPr/>
-          <p:nvPr/>
-        </p:nvSpPr>
-        <p:spPr>
-          <a:xfrm>
-            <a:off x="4480560" y="4251960"/>
-            <a:ext cx="2103120" cy="73152"/>
-          </a:xfrm>
-          <a:prstGeom prst="rect">
-            <a:avLst/>
-          </a:prstGeom>
-          <a:solidFill>
-            <a:srgbClr val="36393E"/>
-          </a:solidFill>
-          <a:ln/>
-        </p:spPr>
-      </p:sp>
-      <p:sp>
-        <p:nvSpPr>
-          <p:cNvPr id="33" name="Shape 30"/>
-          <p:cNvSpPr/>
-          <p:nvPr/>
-        </p:nvSpPr>
-        <p:spPr>
-          <a:xfrm>
-            <a:off x="4480560" y="4251960"/>
-            <a:ext cx="1472184" cy="73152"/>
-          </a:xfrm>
-          <a:prstGeom prst="rect">
-            <a:avLst/>
-          </a:prstGeom>
-          <a:solidFill>
-            <a:srgbClr val="5CC8D7"/>
-          </a:solidFill>
-          <a:ln/>
-        </p:spPr>
-      </p:sp>
-      <p:sp>
-        <p:nvSpPr>
-          <p:cNvPr id="34" name="Shape 31"/>
-          <p:cNvSpPr/>
-          <p:nvPr/>
-        </p:nvSpPr>
-        <p:spPr>
-          <a:xfrm>
-            <a:off x="6903720" y="3447288"/>
-            <a:ext cx="109728" cy="109728"/>
-          </a:xfrm>
-          <a:prstGeom prst="rect">
-            <a:avLst/>
-          </a:prstGeom>
-          <a:solidFill>
-            <a:srgbClr val="5CC8D7"/>
-          </a:solidFill>
-          <a:ln/>
-        </p:spPr>
-      </p:sp>
-      <p:sp>
-        <p:nvSpPr>
-          <p:cNvPr id="35" name="Text 32"/>
-          <p:cNvSpPr/>
-          <p:nvPr/>
-        </p:nvSpPr>
-        <p:spPr>
-          <a:xfrm>
-            <a:off x="7104888" y="3383280"/>
-            <a:ext cx="1888236" cy="365760"/>
+              <a:t>   1</a:t>
+            </a:r>
+            <a:endParaRPr lang="en-US" sz="1700" dirty="0"/>
+          </a:p>
+        </p:txBody>
+      </p:sp>
+      <p:sp>
+        <p:nvSpPr>
+          <p:cNvPr id="18" name="Text 15"/>
+          <p:cNvSpPr/>
+          <p:nvPr/>
+        </p:nvSpPr>
+        <p:spPr>
+          <a:xfrm>
+            <a:off x="6505956" y="2606040"/>
+            <a:ext cx="411480" cy="457200"/>
           </a:xfrm>
           <a:prstGeom prst="rect">
             <a:avLst/>
@@ -12746,311 +14064,30 @@
               <a:buNone/>
             </a:pPr>
             <a:r>
-              <a:rPr lang="en-US" sz="1100" dirty="0">
-                <a:solidFill>
-                  <a:srgbClr val="F4F0E8"/>
-                </a:solidFill>
-                <a:latin typeface="Arial" pitchFamily="34" charset="0"/>
-                <a:ea typeface="Arial" pitchFamily="34" charset="-122"/>
-                <a:cs typeface="Arial" pitchFamily="34" charset="-120"/>
-              </a:rPr>
-              <a:t>P1 · Clinic Onboarding (3/3)</a:t>
-            </a:r>
-            <a:endParaRPr lang="en-US" sz="1100" dirty="0"/>
-          </a:p>
-        </p:txBody>
-      </p:sp>
-      <p:sp>
-        <p:nvSpPr>
-          <p:cNvPr id="36" name="Shape 33"/>
-          <p:cNvSpPr/>
-          <p:nvPr/>
-        </p:nvSpPr>
-        <p:spPr>
-          <a:xfrm>
-            <a:off x="6903720" y="3813048"/>
-            <a:ext cx="109728" cy="109728"/>
-          </a:xfrm>
-          <a:prstGeom prst="rect">
-            <a:avLst/>
-          </a:prstGeom>
-          <a:solidFill>
-            <a:srgbClr val="5CC8D7"/>
-          </a:solidFill>
-          <a:ln/>
-        </p:spPr>
-      </p:sp>
-      <p:sp>
-        <p:nvSpPr>
-          <p:cNvPr id="37" name="Text 34"/>
-          <p:cNvSpPr/>
-          <p:nvPr/>
-        </p:nvSpPr>
-        <p:spPr>
-          <a:xfrm>
-            <a:off x="7104888" y="3749040"/>
-            <a:ext cx="1888236" cy="365760"/>
-          </a:xfrm>
-          <a:prstGeom prst="rect">
-            <a:avLst/>
-          </a:prstGeom>
-          <a:noFill/>
-          <a:ln/>
-        </p:spPr>
-        <p:txBody>
-          <a:bodyPr wrap="square" lIns="0" tIns="0" rIns="0" bIns="0" rtlCol="0" anchor="t"/>
-          <a:lstStyle/>
-          <a:p>
-            <a:pPr indent="0" marL="0">
-              <a:buNone/>
-            </a:pPr>
-            <a:r>
-              <a:rPr lang="en-US" sz="1100" dirty="0">
-                <a:solidFill>
-                  <a:srgbClr val="F4F0E8"/>
-                </a:solidFill>
-                <a:latin typeface="Arial" pitchFamily="34" charset="0"/>
-                <a:ea typeface="Arial" pitchFamily="34" charset="-122"/>
-                <a:cs typeface="Arial" pitchFamily="34" charset="-120"/>
-              </a:rPr>
-              <a:t>P2 · Doctor Schedules (5/5)</a:t>
-            </a:r>
-            <a:endParaRPr lang="en-US" sz="1100" dirty="0"/>
-          </a:p>
-        </p:txBody>
-      </p:sp>
-      <p:sp>
-        <p:nvSpPr>
-          <p:cNvPr id="38" name="Shape 35"/>
-          <p:cNvSpPr/>
-          <p:nvPr/>
-        </p:nvSpPr>
-        <p:spPr>
-          <a:xfrm>
-            <a:off x="9111996" y="3447288"/>
-            <a:ext cx="109728" cy="109728"/>
-          </a:xfrm>
-          <a:prstGeom prst="rect">
-            <a:avLst/>
-          </a:prstGeom>
-          <a:ln w="15875">
-            <a:solidFill>
-              <a:srgbClr val="5CC8D7"/>
-            </a:solidFill>
-            <a:prstDash val="solid"/>
-          </a:ln>
-        </p:spPr>
-      </p:sp>
-      <p:sp>
-        <p:nvSpPr>
-          <p:cNvPr id="39" name="Text 36"/>
-          <p:cNvSpPr/>
-          <p:nvPr/>
-        </p:nvSpPr>
-        <p:spPr>
-          <a:xfrm>
-            <a:off x="9313164" y="3383280"/>
-            <a:ext cx="1888236" cy="365760"/>
-          </a:xfrm>
-          <a:prstGeom prst="rect">
-            <a:avLst/>
-          </a:prstGeom>
-          <a:noFill/>
-          <a:ln/>
-        </p:spPr>
-        <p:txBody>
-          <a:bodyPr wrap="square" lIns="0" tIns="0" rIns="0" bIns="0" rtlCol="0" anchor="t"/>
-          <a:lstStyle/>
-          <a:p>
-            <a:pPr indent="0" marL="0">
-              <a:buNone/>
-            </a:pPr>
-            <a:r>
-              <a:rPr lang="en-US" sz="1100" dirty="0">
-                <a:solidFill>
-                  <a:srgbClr val="F4F0E8"/>
-                </a:solidFill>
-                <a:latin typeface="Arial" pitchFamily="34" charset="0"/>
-                <a:ea typeface="Arial" pitchFamily="34" charset="-122"/>
-                <a:cs typeface="Arial" pitchFamily="34" charset="-120"/>
-              </a:rPr>
-              <a:t>P4 · Reminders, in review (5/5)</a:t>
-            </a:r>
-            <a:endParaRPr lang="en-US" sz="1100" dirty="0"/>
-          </a:p>
-        </p:txBody>
-      </p:sp>
-      <p:sp>
-        <p:nvSpPr>
-          <p:cNvPr id="40" name="Shape 37"/>
-          <p:cNvSpPr/>
-          <p:nvPr/>
-        </p:nvSpPr>
-        <p:spPr>
-          <a:xfrm>
-            <a:off x="9111996" y="3813048"/>
-            <a:ext cx="109728" cy="109728"/>
-          </a:xfrm>
-          <a:prstGeom prst="rect">
-            <a:avLst/>
-          </a:prstGeom>
-          <a:ln w="15875">
-            <a:solidFill>
-              <a:srgbClr val="929AA8"/>
-            </a:solidFill>
-            <a:prstDash val="solid"/>
-          </a:ln>
-        </p:spPr>
-      </p:sp>
-      <p:sp>
-        <p:nvSpPr>
-          <p:cNvPr id="41" name="Text 38"/>
-          <p:cNvSpPr/>
-          <p:nvPr/>
-        </p:nvSpPr>
-        <p:spPr>
-          <a:xfrm>
-            <a:off x="9313164" y="3749040"/>
-            <a:ext cx="1888236" cy="365760"/>
-          </a:xfrm>
-          <a:prstGeom prst="rect">
-            <a:avLst/>
-          </a:prstGeom>
-          <a:noFill/>
-          <a:ln/>
-        </p:spPr>
-        <p:txBody>
-          <a:bodyPr wrap="square" lIns="0" tIns="0" rIns="0" bIns="0" rtlCol="0" anchor="t"/>
-          <a:lstStyle/>
-          <a:p>
-            <a:pPr indent="0" marL="0">
-              <a:buNone/>
-            </a:pPr>
-            <a:r>
-              <a:rPr lang="en-US" sz="1100" dirty="0">
-                <a:solidFill>
-                  <a:srgbClr val="929AA8"/>
-                </a:solidFill>
-                <a:latin typeface="Arial" pitchFamily="34" charset="0"/>
-                <a:ea typeface="Arial" pitchFamily="34" charset="-122"/>
-                <a:cs typeface="Arial" pitchFamily="34" charset="-120"/>
-              </a:rPr>
-              <a:t>P3 · Reports &amp; Exports (0/3)</a:t>
-            </a:r>
-            <a:endParaRPr lang="en-US" sz="1100" dirty="0"/>
-          </a:p>
-        </p:txBody>
-      </p:sp>
-      <p:sp>
-        <p:nvSpPr>
-          <p:cNvPr id="42" name="Shape 39"/>
-          <p:cNvSpPr/>
-          <p:nvPr/>
-        </p:nvSpPr>
-        <p:spPr>
-          <a:xfrm>
-            <a:off x="640080" y="4709160"/>
-            <a:ext cx="10908792" cy="1280160"/>
-          </a:xfrm>
-          <a:prstGeom prst="rect">
-            <a:avLst/>
-          </a:prstGeom>
-          <a:solidFill>
-            <a:srgbClr val="23262C"/>
-          </a:solidFill>
-          <a:ln/>
-        </p:spPr>
-      </p:sp>
-      <p:sp>
-        <p:nvSpPr>
-          <p:cNvPr id="43" name="Text 40"/>
-          <p:cNvSpPr/>
-          <p:nvPr/>
-        </p:nvSpPr>
-        <p:spPr>
-          <a:xfrm>
-            <a:off x="868680" y="4800600"/>
-            <a:ext cx="3291840" cy="292608"/>
-          </a:xfrm>
-          <a:prstGeom prst="rect">
-            <a:avLst/>
-          </a:prstGeom>
-          <a:noFill/>
-          <a:ln/>
-        </p:spPr>
-        <p:txBody>
-          <a:bodyPr wrap="square" lIns="0" tIns="0" rIns="0" bIns="0" rtlCol="0" anchor="t"/>
-          <a:lstStyle/>
-          <a:p>
-            <a:pPr indent="0" marL="0">
-              <a:buNone/>
-            </a:pPr>
-            <a:r>
-              <a:rPr lang="en-US" sz="1500" b="1" dirty="0">
-                <a:solidFill>
-                  <a:srgbClr val="F4F0E8"/>
+              <a:rPr lang="en-US" sz="2400" b="1" dirty="0">
+                <a:solidFill>
+                  <a:srgbClr val="F2B134"/>
                 </a:solidFill>
                 <a:latin typeface="Georgia" pitchFamily="34" charset="0"/>
                 <a:ea typeface="Georgia" pitchFamily="34" charset="-122"/>
                 <a:cs typeface="Georgia" pitchFamily="34" charset="-120"/>
               </a:rPr>
-              <a:t>Maya Lin @Maya</a:t>
-            </a:r>
-            <a:endParaRPr lang="en-US" sz="1500" dirty="0"/>
-          </a:p>
-        </p:txBody>
-      </p:sp>
-      <p:sp>
-        <p:nvSpPr>
-          <p:cNvPr id="44" name="Text 41"/>
-          <p:cNvSpPr/>
-          <p:nvPr/>
-        </p:nvSpPr>
-        <p:spPr>
-          <a:xfrm>
-            <a:off x="868680" y="5111496"/>
-            <a:ext cx="3291840" cy="219456"/>
-          </a:xfrm>
-          <a:prstGeom prst="rect">
-            <a:avLst/>
-          </a:prstGeom>
-          <a:noFill/>
-          <a:ln/>
-        </p:spPr>
-        <p:txBody>
-          <a:bodyPr wrap="square" lIns="0" tIns="0" rIns="0" bIns="0" rtlCol="0" anchor="ctr">
-            <a:normAutofit/>
-          </a:bodyPr>
-          <a:lstStyle/>
-          <a:p>
-            <a:pPr indent="0" marL="0">
-              <a:buNone/>
-            </a:pPr>
-            <a:r>
-              <a:rPr lang="en-US" sz="1100" b="1" dirty="0">
-                <a:solidFill>
-                  <a:srgbClr val="A99BFF"/>
-                </a:solidFill>
-                <a:latin typeface="Arial" pitchFamily="34" charset="0"/>
-                <a:ea typeface="Arial" pitchFamily="34" charset="-122"/>
-                <a:cs typeface="Arial" pitchFamily="34" charset="-120"/>
-              </a:rPr>
-              <a:t>PulseBoard · Analytics</a:t>
-            </a:r>
-            <a:endParaRPr lang="en-US" sz="1100" dirty="0"/>
-          </a:p>
-        </p:txBody>
-      </p:sp>
-      <p:sp>
-        <p:nvSpPr>
-          <p:cNvPr id="45" name="Text 42"/>
-          <p:cNvSpPr/>
-          <p:nvPr/>
-        </p:nvSpPr>
-        <p:spPr>
-          <a:xfrm>
-            <a:off x="868680" y="5367528"/>
-            <a:ext cx="3291840" cy="576072"/>
+              <a:t>1</a:t>
+            </a:r>
+            <a:endParaRPr lang="en-US" sz="2400" dirty="0"/>
+          </a:p>
+        </p:txBody>
+      </p:sp>
+      <p:sp>
+        <p:nvSpPr>
+          <p:cNvPr id="19" name="Text 16"/>
+          <p:cNvSpPr/>
+          <p:nvPr/>
+        </p:nvSpPr>
+        <p:spPr>
+          <a:xfrm>
+            <a:off x="7008876" y="2606040"/>
+            <a:ext cx="4265676" cy="1372870"/>
           </a:xfrm>
           <a:prstGeom prst="rect">
             <a:avLst/>
@@ -13063,401 +14100,58 @@
           <a:lstStyle/>
           <a:p>
             <a:pPr indent="0" marL="0">
-              <a:buNone/>
-            </a:pPr>
-            <a:r>
-              <a:rPr lang="en-US" sz="1100" i="1" dirty="0">
-                <a:solidFill>
-                  <a:srgbClr val="B9BFC9"/>
-                </a:solidFill>
-                <a:latin typeface="Arial" pitchFamily="34" charset="0"/>
-                <a:ea typeface="Arial" pitchFamily="34" charset="-122"/>
-                <a:cs typeface="Arial" pitchFamily="34" charset="-120"/>
-              </a:rPr>
-              <a:t>Data transfer done; usage tracking rolling out.</a:t>
-            </a:r>
-            <a:endParaRPr lang="en-US" sz="1100" dirty="0"/>
-          </a:p>
-        </p:txBody>
-      </p:sp>
-      <p:sp>
-        <p:nvSpPr>
-          <p:cNvPr id="46" name="Text 43"/>
-          <p:cNvSpPr/>
-          <p:nvPr/>
-        </p:nvSpPr>
-        <p:spPr>
-          <a:xfrm>
-            <a:off x="4480560" y="4800600"/>
-            <a:ext cx="2103120" cy="548640"/>
-          </a:xfrm>
-          <a:prstGeom prst="rect">
-            <a:avLst/>
-          </a:prstGeom>
-          <a:noFill/>
-          <a:ln/>
-        </p:spPr>
-        <p:txBody>
-          <a:bodyPr wrap="square" lIns="0" tIns="0" rIns="0" bIns="0" rtlCol="0" anchor="ctr"/>
-          <a:lstStyle/>
-          <a:p>
-            <a:pPr indent="0" marL="0">
-              <a:buNone/>
-            </a:pPr>
-            <a:r>
-              <a:rPr lang="en-US" sz="2800" b="1" dirty="0">
-                <a:solidFill>
-                  <a:srgbClr val="A99BFF"/>
+              <a:lnSpc>
+                <a:spcPct val="110000"/>
+              </a:lnSpc>
+              <a:spcAft>
+                <a:spcPts val="300"/>
+              </a:spcAft>
+              <a:buNone/>
+            </a:pPr>
+            <a:r>
+              <a:rPr lang="en-US" sz="1500" b="1" dirty="0">
+                <a:solidFill>
+                  <a:srgbClr val="F4F0E8"/>
                 </a:solidFill>
                 <a:latin typeface="Georgia" pitchFamily="34" charset="0"/>
                 <a:ea typeface="Georgia" pitchFamily="34" charset="-122"/>
                 <a:cs typeface="Georgia" pitchFamily="34" charset="-120"/>
               </a:rPr>
-              <a:t>75%</a:t>
-            </a:r>
-            <a:endParaRPr lang="en-US" sz="2800" dirty="0"/>
-          </a:p>
-        </p:txBody>
-      </p:sp>
-      <p:sp>
-        <p:nvSpPr>
-          <p:cNvPr id="47" name="Text 44"/>
-          <p:cNvSpPr/>
-          <p:nvPr/>
-        </p:nvSpPr>
-        <p:spPr>
-          <a:xfrm>
-            <a:off x="4480560" y="5367528"/>
-            <a:ext cx="2103120" cy="256032"/>
-          </a:xfrm>
-          <a:prstGeom prst="rect">
-            <a:avLst/>
-          </a:prstGeom>
-          <a:noFill/>
-          <a:ln/>
-        </p:spPr>
-        <p:txBody>
-          <a:bodyPr wrap="square" lIns="0" tIns="0" rIns="0" bIns="0" rtlCol="0" anchor="ctr"/>
-          <a:lstStyle/>
-          <a:p>
-            <a:pPr indent="0" marL="0">
-              <a:buNone/>
-            </a:pPr>
-            <a:r>
-              <a:rPr lang="en-US" sz="1100" dirty="0">
+              <a:t>Can patients turn off SMS reminders and keep email only?</a:t>
+            </a:r>
+            <a:endParaRPr lang="en-US" sz="1500" dirty="0"/>
+          </a:p>
+          <a:p>
+            <a:pPr indent="0" marL="0">
+              <a:lnSpc>
+                <a:spcPct val="110000"/>
+              </a:lnSpc>
+              <a:spcAft>
+                <a:spcPts val="300"/>
+              </a:spcAft>
+              <a:buNone/>
+            </a:pPr>
+            <a:r>
+              <a:rPr lang="en-US" sz="1200" dirty="0">
                 <a:solidFill>
                   <a:srgbClr val="B9BFC9"/>
                 </a:solidFill>
-                <a:latin typeface="Arial" pitchFamily="34" charset="0"/>
-                <a:ea typeface="Arial" pitchFamily="34" charset="-122"/>
-                <a:cs typeface="Arial" pitchFamily="34" charset="-120"/>
-              </a:rPr>
-              <a:t>5 done, 1 open</a:t>
-            </a:r>
-            <a:endParaRPr lang="en-US" sz="1100" dirty="0"/>
-          </a:p>
-        </p:txBody>
-      </p:sp>
-      <p:sp>
-        <p:nvSpPr>
-          <p:cNvPr id="48" name="Shape 45"/>
-          <p:cNvSpPr/>
-          <p:nvPr/>
-        </p:nvSpPr>
-        <p:spPr>
-          <a:xfrm>
-            <a:off x="4480560" y="5715000"/>
-            <a:ext cx="2103120" cy="73152"/>
-          </a:xfrm>
-          <a:prstGeom prst="rect">
-            <a:avLst/>
-          </a:prstGeom>
-          <a:solidFill>
-            <a:srgbClr val="36393E"/>
-          </a:solidFill>
-          <a:ln/>
-        </p:spPr>
-      </p:sp>
-      <p:sp>
-        <p:nvSpPr>
-          <p:cNvPr id="49" name="Shape 46"/>
-          <p:cNvSpPr/>
-          <p:nvPr/>
-        </p:nvSpPr>
-        <p:spPr>
-          <a:xfrm>
-            <a:off x="4480560" y="5715000"/>
-            <a:ext cx="1577340" cy="73152"/>
-          </a:xfrm>
-          <a:prstGeom prst="rect">
-            <a:avLst/>
-          </a:prstGeom>
-          <a:solidFill>
-            <a:srgbClr val="A99BFF"/>
-          </a:solidFill>
-          <a:ln/>
-        </p:spPr>
-      </p:sp>
-      <p:sp>
-        <p:nvSpPr>
-          <p:cNvPr id="50" name="Shape 47"/>
-          <p:cNvSpPr/>
-          <p:nvPr/>
-        </p:nvSpPr>
-        <p:spPr>
-          <a:xfrm>
-            <a:off x="6903720" y="4910328"/>
-            <a:ext cx="109728" cy="109728"/>
-          </a:xfrm>
-          <a:prstGeom prst="rect">
-            <a:avLst/>
-          </a:prstGeom>
-          <a:solidFill>
-            <a:srgbClr val="A99BFF"/>
-          </a:solidFill>
-          <a:ln/>
-        </p:spPr>
-      </p:sp>
-      <p:sp>
-        <p:nvSpPr>
-          <p:cNvPr id="51" name="Text 48"/>
-          <p:cNvSpPr/>
-          <p:nvPr/>
-        </p:nvSpPr>
-        <p:spPr>
-          <a:xfrm>
-            <a:off x="7104888" y="4846320"/>
-            <a:ext cx="1888236" cy="365760"/>
-          </a:xfrm>
-          <a:prstGeom prst="rect">
-            <a:avLst/>
-          </a:prstGeom>
-          <a:noFill/>
-          <a:ln/>
-        </p:spPr>
-        <p:txBody>
-          <a:bodyPr wrap="square" lIns="0" tIns="0" rIns="0" bIns="0" rtlCol="0" anchor="t"/>
-          <a:lstStyle/>
-          <a:p>
-            <a:pPr indent="0" marL="0">
-              <a:buNone/>
-            </a:pPr>
-            <a:r>
-              <a:rPr lang="en-US" sz="1100" dirty="0">
-                <a:solidFill>
-                  <a:srgbClr val="F4F0E8"/>
-                </a:solidFill>
-                <a:latin typeface="Arial" pitchFamily="34" charset="0"/>
-                <a:ea typeface="Arial" pitchFamily="34" charset="-122"/>
-                <a:cs typeface="Arial" pitchFamily="34" charset="-120"/>
-              </a:rPr>
-              <a:t>Data transfer to new system</a:t>
-            </a:r>
-            <a:endParaRPr lang="en-US" sz="1100" dirty="0"/>
-          </a:p>
-        </p:txBody>
-      </p:sp>
-      <p:sp>
-        <p:nvSpPr>
-          <p:cNvPr id="52" name="Shape 49"/>
-          <p:cNvSpPr/>
-          <p:nvPr/>
-        </p:nvSpPr>
-        <p:spPr>
-          <a:xfrm>
-            <a:off x="6903720" y="5276088"/>
-            <a:ext cx="109728" cy="109728"/>
-          </a:xfrm>
-          <a:prstGeom prst="rect">
-            <a:avLst/>
-          </a:prstGeom>
-          <a:solidFill>
-            <a:srgbClr val="A99BFF"/>
-          </a:solidFill>
-          <a:ln/>
-        </p:spPr>
-      </p:sp>
-      <p:sp>
-        <p:nvSpPr>
-          <p:cNvPr id="53" name="Text 50"/>
-          <p:cNvSpPr/>
-          <p:nvPr/>
-        </p:nvSpPr>
-        <p:spPr>
-          <a:xfrm>
-            <a:off x="7104888" y="5212080"/>
-            <a:ext cx="1888236" cy="365760"/>
-          </a:xfrm>
-          <a:prstGeom prst="rect">
-            <a:avLst/>
-          </a:prstGeom>
-          <a:noFill/>
-          <a:ln/>
-        </p:spPr>
-        <p:txBody>
-          <a:bodyPr wrap="square" lIns="0" tIns="0" rIns="0" bIns="0" rtlCol="0" anchor="t"/>
-          <a:lstStyle/>
-          <a:p>
-            <a:pPr indent="0" marL="0">
-              <a:buNone/>
-            </a:pPr>
-            <a:r>
-              <a:rPr lang="en-US" sz="1100" dirty="0">
-                <a:solidFill>
-                  <a:srgbClr val="F4F0E8"/>
-                </a:solidFill>
-                <a:latin typeface="Arial" pitchFamily="34" charset="0"/>
-                <a:ea typeface="Arial" pitchFamily="34" charset="-122"/>
-                <a:cs typeface="Arial" pitchFamily="34" charset="-120"/>
-              </a:rPr>
-              <a:t>Event plan agreed</a:t>
-            </a:r>
-            <a:endParaRPr lang="en-US" sz="1100" dirty="0"/>
-          </a:p>
-        </p:txBody>
-      </p:sp>
-      <p:sp>
-        <p:nvSpPr>
-          <p:cNvPr id="54" name="Shape 51"/>
-          <p:cNvSpPr/>
-          <p:nvPr/>
-        </p:nvSpPr>
-        <p:spPr>
-          <a:xfrm>
-            <a:off x="9111996" y="4910328"/>
-            <a:ext cx="109728" cy="109728"/>
-          </a:xfrm>
-          <a:prstGeom prst="rect">
-            <a:avLst/>
-          </a:prstGeom>
-          <a:ln w="15875">
-            <a:solidFill>
-              <a:srgbClr val="A99BFF"/>
-            </a:solidFill>
-            <a:prstDash val="solid"/>
-          </a:ln>
-        </p:spPr>
-      </p:sp>
-      <p:sp>
-        <p:nvSpPr>
-          <p:cNvPr id="55" name="Text 52"/>
-          <p:cNvSpPr/>
-          <p:nvPr/>
-        </p:nvSpPr>
-        <p:spPr>
-          <a:xfrm>
-            <a:off x="9313164" y="4846320"/>
-            <a:ext cx="1888236" cy="365760"/>
-          </a:xfrm>
-          <a:prstGeom prst="rect">
-            <a:avLst/>
-          </a:prstGeom>
-          <a:noFill/>
-          <a:ln/>
-        </p:spPr>
-        <p:txBody>
-          <a:bodyPr wrap="square" lIns="0" tIns="0" rIns="0" bIns="0" rtlCol="0" anchor="t"/>
-          <a:lstStyle/>
-          <a:p>
-            <a:pPr indent="0" marL="0">
-              <a:buNone/>
-            </a:pPr>
-            <a:r>
-              <a:rPr lang="en-US" sz="1100" dirty="0">
-                <a:solidFill>
-                  <a:srgbClr val="F4F0E8"/>
-                </a:solidFill>
-                <a:latin typeface="Arial" pitchFamily="34" charset="0"/>
-                <a:ea typeface="Arial" pitchFamily="34" charset="-122"/>
-                <a:cs typeface="Arial" pitchFamily="34" charset="-120"/>
-              </a:rPr>
-              <a:t>Usage tracking rollout</a:t>
-            </a:r>
-            <a:endParaRPr lang="en-US" sz="1100" dirty="0"/>
-          </a:p>
-        </p:txBody>
-      </p:sp>
-      <p:sp>
-        <p:nvSpPr>
-          <p:cNvPr id="56" name="Shape 53"/>
-          <p:cNvSpPr/>
-          <p:nvPr/>
-        </p:nvSpPr>
-        <p:spPr>
-          <a:xfrm>
-            <a:off x="9111996" y="5276088"/>
-            <a:ext cx="109728" cy="109728"/>
-          </a:xfrm>
-          <a:prstGeom prst="rect">
-            <a:avLst/>
-          </a:prstGeom>
-          <a:solidFill>
-            <a:srgbClr val="A99BFF"/>
-          </a:solidFill>
-          <a:ln/>
-        </p:spPr>
-      </p:sp>
-      <p:sp>
-        <p:nvSpPr>
-          <p:cNvPr id="57" name="Text 54"/>
-          <p:cNvSpPr/>
-          <p:nvPr/>
-        </p:nvSpPr>
-        <p:spPr>
-          <a:xfrm>
-            <a:off x="9313164" y="5212080"/>
-            <a:ext cx="1888236" cy="365760"/>
-          </a:xfrm>
-          <a:prstGeom prst="rect">
-            <a:avLst/>
-          </a:prstGeom>
-          <a:noFill/>
-          <a:ln/>
-        </p:spPr>
-        <p:txBody>
-          <a:bodyPr wrap="square" lIns="0" tIns="0" rIns="0" bIns="0" rtlCol="0" anchor="t"/>
-          <a:lstStyle/>
-          <a:p>
-            <a:pPr indent="0" marL="0">
-              <a:buNone/>
-            </a:pPr>
-            <a:r>
-              <a:rPr lang="en-US" sz="1100" dirty="0">
-                <a:solidFill>
-                  <a:srgbClr val="F4F0E8"/>
-                </a:solidFill>
-                <a:latin typeface="Arial" pitchFamily="34" charset="0"/>
-                <a:ea typeface="Arial" pitchFamily="34" charset="-122"/>
-                <a:cs typeface="Arial" pitchFamily="34" charset="-120"/>
-              </a:rPr>
-              <a:t>Code reviews, 3 features</a:t>
-            </a:r>
-            <a:endParaRPr lang="en-US" sz="1100" dirty="0"/>
-          </a:p>
-        </p:txBody>
-      </p:sp>
-      <p:sp>
-        <p:nvSpPr>
-          <p:cNvPr id="58" name="Text 55"/>
-          <p:cNvSpPr/>
-          <p:nvPr/>
-        </p:nvSpPr>
-        <p:spPr>
-          <a:xfrm>
-            <a:off x="640080" y="6053328"/>
-            <a:ext cx="10908792" cy="256032"/>
-          </a:xfrm>
-          <a:prstGeom prst="rect">
-            <a:avLst/>
-          </a:prstGeom>
-          <a:noFill/>
-          <a:ln/>
-        </p:spPr>
-        <p:txBody>
-          <a:bodyPr wrap="square" lIns="0" tIns="0" rIns="0" bIns="0" rtlCol="0" anchor="ctr"/>
-          <a:lstStyle/>
-          <a:p>
-            <a:pPr indent="0" marL="0">
+                <a:latin typeface="Georgia" pitchFamily="34" charset="0"/>
+                <a:ea typeface="Georgia" pitchFamily="34" charset="-122"/>
+                <a:cs typeface="Georgia" pitchFamily="34" charset="-120"/>
+              </a:rPr>
+              <a:t>Today every patient with a phone number receives SMS reminders; some clinics report complaints.</a:t>
+            </a:r>
+            <a:endParaRPr lang="en-US" sz="1500" dirty="0"/>
+          </a:p>
+          <a:p>
+            <a:pPr indent="0" marL="0">
+              <a:lnSpc>
+                <a:spcPct val="110000"/>
+              </a:lnSpc>
+              <a:spcAft>
+                <a:spcPts val="300"/>
+              </a:spcAft>
               <a:buNone/>
             </a:pPr>
             <a:r>
@@ -13465,13 +14159,13 @@
                 <a:solidFill>
                   <a:srgbClr val="929AA8"/>
                 </a:solidFill>
-                <a:latin typeface="Arial" pitchFamily="34" charset="0"/>
-                <a:ea typeface="Arial" pitchFamily="34" charset="-122"/>
-                <a:cs typeface="Arial" pitchFamily="34" charset="-120"/>
-              </a:rPr>
-              <a:t>Done/Open = planned tasks this week; work in review stays open until approved.</a:t>
-            </a:r>
-            <a:endParaRPr lang="en-US" sz="1100" dirty="0"/>
+                <a:latin typeface="Georgia" pitchFamily="34" charset="0"/>
+                <a:ea typeface="Georgia" pitchFamily="34" charset="-122"/>
+                <a:cs typeface="Georgia" pitchFamily="34" charset="-120"/>
+              </a:rPr>
+              <a:t>Options: allow opt-out · clinic decides per patient · keep as today</a:t>
+            </a:r>
+            <a:endParaRPr lang="en-US" sz="1500" dirty="0"/>
           </a:p>
         </p:txBody>
       </p:sp>
@@ -13580,7 +14274,7 @@
                 <a:ea typeface="Arial" pitchFamily="34" charset="-122"/>
                 <a:cs typeface="Arial" pitchFamily="34" charset="-120"/>
               </a:rPr>
-              <a:t>Engineering Activity · GitHub</a:t>
+              <a:t>Team · Task Tracker</a:t>
             </a:r>
             <a:endParaRPr lang="en-US" sz="1200" dirty="0"/>
           </a:p>
@@ -13660,7 +14354,7 @@
                 <a:ea typeface="Georgia" pitchFamily="34" charset="-122"/>
                 <a:cs typeface="Georgia" pitchFamily="34" charset="-120"/>
               </a:rPr>
-              <a:t>Team Delivery Activity This Week</a:t>
+              <a:t>Developer Task Track</a:t>
             </a:r>
             <a:endParaRPr lang="en-US" sz="2600" dirty="0"/>
           </a:p>
@@ -13707,7 +14401,7 @@
       </p:sp>
       <p:pic>
         <p:nvPicPr>
-          <p:cNvPr id="8" name="Image 0" descr="/var/folders/lw/rmylcyvd5rjfxk9g1z9rrm8w0000gq/T/showship-deck-oVNQqv/paper_mark.png">    </p:cNvPr>
+          <p:cNvPr id="8" name="Image 0" descr="/var/folders/lw/rmylcyvd5rjfxk9g1z9rrm8w0000gq/T/showship-deck-EGIwvT/paper_mark.png">    </p:cNvPr>
           <p:cNvPicPr>
             <a:picLocks noChangeAspect="1"/>
           </p:cNvPicPr>
@@ -13791,7 +14485,7 @@
         <p:spPr>
           <a:xfrm>
             <a:off x="640080" y="1783080"/>
-            <a:ext cx="3514344" cy="1051560"/>
+            <a:ext cx="10908792" cy="1280160"/>
           </a:xfrm>
           <a:prstGeom prst="rect">
             <a:avLst/>
@@ -13810,34 +14504,34 @@
         </p:nvSpPr>
         <p:spPr>
           <a:xfrm>
-            <a:off x="868680" y="1856232"/>
-            <a:ext cx="3057144" cy="594360"/>
-          </a:xfrm>
-          <a:prstGeom prst="rect">
-            <a:avLst/>
-          </a:prstGeom>
-          <a:noFill/>
-          <a:ln/>
-        </p:spPr>
-        <p:txBody>
-          <a:bodyPr wrap="square" lIns="0" tIns="0" rIns="0" bIns="0" rtlCol="0" anchor="ctr"/>
-          <a:lstStyle/>
-          <a:p>
-            <a:pPr indent="0" marL="0">
-              <a:buNone/>
-            </a:pPr>
-            <a:r>
-              <a:rPr lang="en-US" sz="3400" b="1" dirty="0">
-                <a:solidFill>
-                  <a:srgbClr val="F2B134"/>
+            <a:off x="868680" y="1874520"/>
+            <a:ext cx="3291840" cy="292608"/>
+          </a:xfrm>
+          <a:prstGeom prst="rect">
+            <a:avLst/>
+          </a:prstGeom>
+          <a:noFill/>
+          <a:ln/>
+        </p:spPr>
+        <p:txBody>
+          <a:bodyPr wrap="square" lIns="0" tIns="0" rIns="0" bIns="0" rtlCol="0" anchor="t"/>
+          <a:lstStyle/>
+          <a:p>
+            <a:pPr indent="0" marL="0">
+              <a:buNone/>
+            </a:pPr>
+            <a:r>
+              <a:rPr lang="en-US" sz="1500" b="1" dirty="0">
+                <a:solidFill>
+                  <a:srgbClr val="F4F0E8"/>
                 </a:solidFill>
                 <a:latin typeface="Georgia" pitchFamily="34" charset="0"/>
                 <a:ea typeface="Georgia" pitchFamily="34" charset="-122"/>
                 <a:cs typeface="Georgia" pitchFamily="34" charset="-120"/>
               </a:rPr>
-              <a:t>3</a:t>
-            </a:r>
-            <a:endParaRPr lang="en-US" sz="3400" dirty="0"/>
+              <a:t>Leo Park @Leo</a:t>
+            </a:r>
+            <a:endParaRPr lang="en-US" sz="1500" dirty="0"/>
           </a:p>
         </p:txBody>
       </p:sp>
@@ -13849,47 +14543,446 @@
         </p:nvSpPr>
         <p:spPr>
           <a:xfrm>
-            <a:off x="868680" y="2459736"/>
-            <a:ext cx="3057144" cy="274320"/>
-          </a:xfrm>
-          <a:prstGeom prst="rect">
-            <a:avLst/>
-          </a:prstGeom>
-          <a:noFill/>
-          <a:ln/>
-        </p:spPr>
-        <p:txBody>
-          <a:bodyPr wrap="square" lIns="0" tIns="0" rIns="0" bIns="0" rtlCol="0" anchor="ctr"/>
-          <a:lstStyle/>
-          <a:p>
-            <a:pPr indent="0" marL="0">
-              <a:buNone/>
-            </a:pPr>
-            <a:r>
-              <a:rPr lang="en-US" sz="1200" dirty="0">
-                <a:solidFill>
-                  <a:srgbClr val="B9BFC9"/>
+            <a:off x="868680" y="2185416"/>
+            <a:ext cx="3291840" cy="219456"/>
+          </a:xfrm>
+          <a:prstGeom prst="rect">
+            <a:avLst/>
+          </a:prstGeom>
+          <a:noFill/>
+          <a:ln/>
+        </p:spPr>
+        <p:txBody>
+          <a:bodyPr wrap="square" lIns="0" tIns="0" rIns="0" bIns="0" rtlCol="0" anchor="ctr">
+            <a:normAutofit/>
+          </a:bodyPr>
+          <a:lstStyle/>
+          <a:p>
+            <a:pPr indent="0" marL="0">
+              <a:buNone/>
+            </a:pPr>
+            <a:r>
+              <a:rPr lang="en-US" sz="1100" b="1" dirty="0">
+                <a:solidFill>
+                  <a:srgbClr val="5CC8D7"/>
                 </a:solidFill>
                 <a:latin typeface="Arial" pitchFamily="34" charset="0"/>
                 <a:ea typeface="Arial" pitchFamily="34" charset="-122"/>
                 <a:cs typeface="Arial" pitchFamily="34" charset="-120"/>
               </a:rPr>
-              <a:t>Features approved</a:t>
-            </a:r>
-            <a:endParaRPr lang="en-US" sz="1200" dirty="0"/>
-          </a:p>
-        </p:txBody>
-      </p:sp>
-      <p:sp>
-        <p:nvSpPr>
-          <p:cNvPr id="13" name="Shape 10"/>
-          <p:cNvSpPr/>
-          <p:nvPr/>
-        </p:nvSpPr>
-        <p:spPr>
-          <a:xfrm>
-            <a:off x="4337304" y="1783080"/>
-            <a:ext cx="3514344" cy="1051560"/>
+              <a:t>ClinicBook · Patient App</a:t>
+            </a:r>
+            <a:endParaRPr lang="en-US" sz="1100" dirty="0"/>
+          </a:p>
+        </p:txBody>
+      </p:sp>
+      <p:sp>
+        <p:nvSpPr>
+          <p:cNvPr id="13" name="Text 10"/>
+          <p:cNvSpPr/>
+          <p:nvPr/>
+        </p:nvSpPr>
+        <p:spPr>
+          <a:xfrm>
+            <a:off x="868680" y="2441448"/>
+            <a:ext cx="3291840" cy="576072"/>
+          </a:xfrm>
+          <a:prstGeom prst="rect">
+            <a:avLst/>
+          </a:prstGeom>
+          <a:noFill/>
+          <a:ln/>
+        </p:spPr>
+        <p:txBody>
+          <a:bodyPr wrap="square" lIns="0" tIns="0" rIns="0" bIns="0" rtlCol="0" anchor="t"/>
+          <a:lstStyle/>
+          <a:p>
+            <a:pPr indent="0" marL="0">
+              <a:buNone/>
+            </a:pPr>
+            <a:r>
+              <a:rPr lang="en-US" sz="1100" i="1" dirty="0">
+                <a:solidFill>
+                  <a:srgbClr val="B9BFC9"/>
+                </a:solidFill>
+                <a:latin typeface="Arial" pitchFamily="34" charset="0"/>
+                <a:ea typeface="Arial" pitchFamily="34" charset="-122"/>
+                <a:cs typeface="Arial" pitchFamily="34" charset="-120"/>
+              </a:rPr>
+              <a:t>Sign-in and clinic search done; booking calendar in progress.</a:t>
+            </a:r>
+            <a:endParaRPr lang="en-US" sz="1100" dirty="0"/>
+          </a:p>
+        </p:txBody>
+      </p:sp>
+      <p:sp>
+        <p:nvSpPr>
+          <p:cNvPr id="14" name="Text 11"/>
+          <p:cNvSpPr/>
+          <p:nvPr/>
+        </p:nvSpPr>
+        <p:spPr>
+          <a:xfrm>
+            <a:off x="4480560" y="1874520"/>
+            <a:ext cx="2103120" cy="548640"/>
+          </a:xfrm>
+          <a:prstGeom prst="rect">
+            <a:avLst/>
+          </a:prstGeom>
+          <a:noFill/>
+          <a:ln/>
+        </p:spPr>
+        <p:txBody>
+          <a:bodyPr wrap="square" lIns="0" tIns="0" rIns="0" bIns="0" rtlCol="0" anchor="ctr"/>
+          <a:lstStyle/>
+          <a:p>
+            <a:pPr indent="0" marL="0">
+              <a:buNone/>
+            </a:pPr>
+            <a:r>
+              <a:rPr lang="en-US" sz="2800" b="1" dirty="0">
+                <a:solidFill>
+                  <a:srgbClr val="5CC8D7"/>
+                </a:solidFill>
+                <a:latin typeface="Georgia" pitchFamily="34" charset="0"/>
+                <a:ea typeface="Georgia" pitchFamily="34" charset="-122"/>
+                <a:cs typeface="Georgia" pitchFamily="34" charset="-120"/>
+              </a:rPr>
+              <a:t>60%</a:t>
+            </a:r>
+            <a:endParaRPr lang="en-US" sz="2800" dirty="0"/>
+          </a:p>
+        </p:txBody>
+      </p:sp>
+      <p:sp>
+        <p:nvSpPr>
+          <p:cNvPr id="15" name="Text 12"/>
+          <p:cNvSpPr/>
+          <p:nvPr/>
+        </p:nvSpPr>
+        <p:spPr>
+          <a:xfrm>
+            <a:off x="4480560" y="2441448"/>
+            <a:ext cx="2103120" cy="256032"/>
+          </a:xfrm>
+          <a:prstGeom prst="rect">
+            <a:avLst/>
+          </a:prstGeom>
+          <a:noFill/>
+          <a:ln/>
+        </p:spPr>
+        <p:txBody>
+          <a:bodyPr wrap="square" lIns="0" tIns="0" rIns="0" bIns="0" rtlCol="0" anchor="ctr"/>
+          <a:lstStyle/>
+          <a:p>
+            <a:pPr indent="0" marL="0">
+              <a:buNone/>
+            </a:pPr>
+            <a:r>
+              <a:rPr lang="en-US" sz="1100" dirty="0">
+                <a:solidFill>
+                  <a:srgbClr val="B9BFC9"/>
+                </a:solidFill>
+                <a:latin typeface="Arial" pitchFamily="34" charset="0"/>
+                <a:ea typeface="Arial" pitchFamily="34" charset="-122"/>
+                <a:cs typeface="Arial" pitchFamily="34" charset="-120"/>
+              </a:rPr>
+              <a:t>3 done, 2 open</a:t>
+            </a:r>
+            <a:endParaRPr lang="en-US" sz="1100" dirty="0"/>
+          </a:p>
+        </p:txBody>
+      </p:sp>
+      <p:sp>
+        <p:nvSpPr>
+          <p:cNvPr id="16" name="Shape 13"/>
+          <p:cNvSpPr/>
+          <p:nvPr/>
+        </p:nvSpPr>
+        <p:spPr>
+          <a:xfrm>
+            <a:off x="4480560" y="2788920"/>
+            <a:ext cx="2103120" cy="73152"/>
+          </a:xfrm>
+          <a:prstGeom prst="rect">
+            <a:avLst/>
+          </a:prstGeom>
+          <a:solidFill>
+            <a:srgbClr val="36393E"/>
+          </a:solidFill>
+          <a:ln/>
+        </p:spPr>
+      </p:sp>
+      <p:sp>
+        <p:nvSpPr>
+          <p:cNvPr id="17" name="Shape 14"/>
+          <p:cNvSpPr/>
+          <p:nvPr/>
+        </p:nvSpPr>
+        <p:spPr>
+          <a:xfrm>
+            <a:off x="4480560" y="2788920"/>
+            <a:ext cx="1261872" cy="73152"/>
+          </a:xfrm>
+          <a:prstGeom prst="rect">
+            <a:avLst/>
+          </a:prstGeom>
+          <a:solidFill>
+            <a:srgbClr val="5CC8D7"/>
+          </a:solidFill>
+          <a:ln/>
+        </p:spPr>
+      </p:sp>
+      <p:sp>
+        <p:nvSpPr>
+          <p:cNvPr id="18" name="Shape 15"/>
+          <p:cNvSpPr/>
+          <p:nvPr/>
+        </p:nvSpPr>
+        <p:spPr>
+          <a:xfrm>
+            <a:off x="6903720" y="1984248"/>
+            <a:ext cx="109728" cy="109728"/>
+          </a:xfrm>
+          <a:prstGeom prst="rect">
+            <a:avLst/>
+          </a:prstGeom>
+          <a:solidFill>
+            <a:srgbClr val="5CC8D7"/>
+          </a:solidFill>
+          <a:ln/>
+        </p:spPr>
+      </p:sp>
+      <p:sp>
+        <p:nvSpPr>
+          <p:cNvPr id="19" name="Text 16"/>
+          <p:cNvSpPr/>
+          <p:nvPr/>
+        </p:nvSpPr>
+        <p:spPr>
+          <a:xfrm>
+            <a:off x="7104888" y="1920240"/>
+            <a:ext cx="1888236" cy="365760"/>
+          </a:xfrm>
+          <a:prstGeom prst="rect">
+            <a:avLst/>
+          </a:prstGeom>
+          <a:noFill/>
+          <a:ln/>
+        </p:spPr>
+        <p:txBody>
+          <a:bodyPr wrap="square" lIns="0" tIns="0" rIns="0" bIns="0" rtlCol="0" anchor="t"/>
+          <a:lstStyle/>
+          <a:p>
+            <a:pPr indent="0" marL="0">
+              <a:buNone/>
+            </a:pPr>
+            <a:r>
+              <a:rPr lang="en-US" sz="1100" dirty="0">
+                <a:solidFill>
+                  <a:srgbClr val="F4F0E8"/>
+                </a:solidFill>
+                <a:latin typeface="Arial" pitchFamily="34" charset="0"/>
+                <a:ea typeface="Arial" pitchFamily="34" charset="-122"/>
+                <a:cs typeface="Arial" pitchFamily="34" charset="-120"/>
+              </a:rPr>
+              <a:t>P1 · Accounts &amp; Sign-in (3/3)</a:t>
+            </a:r>
+            <a:endParaRPr lang="en-US" sz="1100" dirty="0"/>
+          </a:p>
+        </p:txBody>
+      </p:sp>
+      <p:sp>
+        <p:nvSpPr>
+          <p:cNvPr id="20" name="Shape 17"/>
+          <p:cNvSpPr/>
+          <p:nvPr/>
+        </p:nvSpPr>
+        <p:spPr>
+          <a:xfrm>
+            <a:off x="6903720" y="2350008"/>
+            <a:ext cx="109728" cy="109728"/>
+          </a:xfrm>
+          <a:prstGeom prst="rect">
+            <a:avLst/>
+          </a:prstGeom>
+          <a:solidFill>
+            <a:srgbClr val="5CC8D7"/>
+          </a:solidFill>
+          <a:ln/>
+        </p:spPr>
+      </p:sp>
+      <p:sp>
+        <p:nvSpPr>
+          <p:cNvPr id="21" name="Text 18"/>
+          <p:cNvSpPr/>
+          <p:nvPr/>
+        </p:nvSpPr>
+        <p:spPr>
+          <a:xfrm>
+            <a:off x="7104888" y="2286000"/>
+            <a:ext cx="1888236" cy="365760"/>
+          </a:xfrm>
+          <a:prstGeom prst="rect">
+            <a:avLst/>
+          </a:prstGeom>
+          <a:noFill/>
+          <a:ln/>
+        </p:spPr>
+        <p:txBody>
+          <a:bodyPr wrap="square" lIns="0" tIns="0" rIns="0" bIns="0" rtlCol="0" anchor="t"/>
+          <a:lstStyle/>
+          <a:p>
+            <a:pPr indent="0" marL="0">
+              <a:buNone/>
+            </a:pPr>
+            <a:r>
+              <a:rPr lang="en-US" sz="1100" dirty="0">
+                <a:solidFill>
+                  <a:srgbClr val="F4F0E8"/>
+                </a:solidFill>
+                <a:latin typeface="Arial" pitchFamily="34" charset="0"/>
+                <a:ea typeface="Arial" pitchFamily="34" charset="-122"/>
+                <a:cs typeface="Arial" pitchFamily="34" charset="-120"/>
+              </a:rPr>
+              <a:t>P2 · Clinic Search &amp; Maps (5/5)</a:t>
+            </a:r>
+            <a:endParaRPr lang="en-US" sz="1100" dirty="0"/>
+          </a:p>
+        </p:txBody>
+      </p:sp>
+      <p:sp>
+        <p:nvSpPr>
+          <p:cNvPr id="22" name="Shape 19"/>
+          <p:cNvSpPr/>
+          <p:nvPr/>
+        </p:nvSpPr>
+        <p:spPr>
+          <a:xfrm>
+            <a:off x="9111996" y="1984248"/>
+            <a:ext cx="109728" cy="109728"/>
+          </a:xfrm>
+          <a:prstGeom prst="rect">
+            <a:avLst/>
+          </a:prstGeom>
+          <a:ln w="15875">
+            <a:solidFill>
+              <a:srgbClr val="5CC8D7"/>
+            </a:solidFill>
+            <a:prstDash val="solid"/>
+          </a:ln>
+        </p:spPr>
+      </p:sp>
+      <p:sp>
+        <p:nvSpPr>
+          <p:cNvPr id="23" name="Text 20"/>
+          <p:cNvSpPr/>
+          <p:nvPr/>
+        </p:nvSpPr>
+        <p:spPr>
+          <a:xfrm>
+            <a:off x="9313164" y="1920240"/>
+            <a:ext cx="1888236" cy="365760"/>
+          </a:xfrm>
+          <a:prstGeom prst="rect">
+            <a:avLst/>
+          </a:prstGeom>
+          <a:noFill/>
+          <a:ln/>
+        </p:spPr>
+        <p:txBody>
+          <a:bodyPr wrap="square" lIns="0" tIns="0" rIns="0" bIns="0" rtlCol="0" anchor="t"/>
+          <a:lstStyle/>
+          <a:p>
+            <a:pPr indent="0" marL="0">
+              <a:buNone/>
+            </a:pPr>
+            <a:r>
+              <a:rPr lang="en-US" sz="1100" dirty="0">
+                <a:solidFill>
+                  <a:srgbClr val="F4F0E8"/>
+                </a:solidFill>
+                <a:latin typeface="Arial" pitchFamily="34" charset="0"/>
+                <a:ea typeface="Arial" pitchFamily="34" charset="-122"/>
+                <a:cs typeface="Arial" pitchFamily="34" charset="-120"/>
+              </a:rPr>
+              <a:t>P3 · Booking Calendar (2/5)</a:t>
+            </a:r>
+            <a:endParaRPr lang="en-US" sz="1100" dirty="0"/>
+          </a:p>
+        </p:txBody>
+      </p:sp>
+      <p:sp>
+        <p:nvSpPr>
+          <p:cNvPr id="24" name="Shape 21"/>
+          <p:cNvSpPr/>
+          <p:nvPr/>
+        </p:nvSpPr>
+        <p:spPr>
+          <a:xfrm>
+            <a:off x="9111996" y="2350008"/>
+            <a:ext cx="109728" cy="109728"/>
+          </a:xfrm>
+          <a:prstGeom prst="rect">
+            <a:avLst/>
+          </a:prstGeom>
+          <a:ln w="15875">
+            <a:solidFill>
+              <a:srgbClr val="929AA8"/>
+            </a:solidFill>
+            <a:prstDash val="solid"/>
+          </a:ln>
+        </p:spPr>
+      </p:sp>
+      <p:sp>
+        <p:nvSpPr>
+          <p:cNvPr id="25" name="Text 22"/>
+          <p:cNvSpPr/>
+          <p:nvPr/>
+        </p:nvSpPr>
+        <p:spPr>
+          <a:xfrm>
+            <a:off x="9313164" y="2286000"/>
+            <a:ext cx="1888236" cy="365760"/>
+          </a:xfrm>
+          <a:prstGeom prst="rect">
+            <a:avLst/>
+          </a:prstGeom>
+          <a:noFill/>
+          <a:ln/>
+        </p:spPr>
+        <p:txBody>
+          <a:bodyPr wrap="square" lIns="0" tIns="0" rIns="0" bIns="0" rtlCol="0" anchor="t"/>
+          <a:lstStyle/>
+          <a:p>
+            <a:pPr indent="0" marL="0">
+              <a:buNone/>
+            </a:pPr>
+            <a:r>
+              <a:rPr lang="en-US" sz="1100" dirty="0">
+                <a:solidFill>
+                  <a:srgbClr val="929AA8"/>
+                </a:solidFill>
+                <a:latin typeface="Arial" pitchFamily="34" charset="0"/>
+                <a:ea typeface="Arial" pitchFamily="34" charset="-122"/>
+                <a:cs typeface="Arial" pitchFamily="34" charset="-120"/>
+              </a:rPr>
+              <a:t>P4 · Payments &amp; Receipts (0/4)</a:t>
+            </a:r>
+            <a:endParaRPr lang="en-US" sz="1100" dirty="0"/>
+          </a:p>
+        </p:txBody>
+      </p:sp>
+      <p:sp>
+        <p:nvSpPr>
+          <p:cNvPr id="26" name="Shape 23"/>
+          <p:cNvSpPr/>
+          <p:nvPr/>
+        </p:nvSpPr>
+        <p:spPr>
+          <a:xfrm>
+            <a:off x="640080" y="3246120"/>
+            <a:ext cx="10908792" cy="1280160"/>
           </a:xfrm>
           <a:prstGeom prst="rect">
             <a:avLst/>
@@ -13902,30 +14995,30 @@
       </p:sp>
       <p:sp>
         <p:nvSpPr>
-          <p:cNvPr id="14" name="Text 11"/>
-          <p:cNvSpPr/>
-          <p:nvPr/>
-        </p:nvSpPr>
-        <p:spPr>
-          <a:xfrm>
-            <a:off x="4565904" y="1856232"/>
-            <a:ext cx="3057144" cy="594360"/>
-          </a:xfrm>
-          <a:prstGeom prst="rect">
-            <a:avLst/>
-          </a:prstGeom>
-          <a:noFill/>
-          <a:ln/>
-        </p:spPr>
-        <p:txBody>
-          <a:bodyPr wrap="square" lIns="0" tIns="0" rIns="0" bIns="0" rtlCol="0" anchor="ctr"/>
-          <a:lstStyle/>
-          <a:p>
-            <a:pPr indent="0" marL="0">
-              <a:buNone/>
-            </a:pPr>
-            <a:r>
-              <a:rPr lang="en-US" sz="3400" b="1" dirty="0">
+          <p:cNvPr id="27" name="Text 24"/>
+          <p:cNvSpPr/>
+          <p:nvPr/>
+        </p:nvSpPr>
+        <p:spPr>
+          <a:xfrm>
+            <a:off x="868680" y="3337560"/>
+            <a:ext cx="3291840" cy="292608"/>
+          </a:xfrm>
+          <a:prstGeom prst="rect">
+            <a:avLst/>
+          </a:prstGeom>
+          <a:noFill/>
+          <a:ln/>
+        </p:spPr>
+        <p:txBody>
+          <a:bodyPr wrap="square" lIns="0" tIns="0" rIns="0" bIns="0" rtlCol="0" anchor="t"/>
+          <a:lstStyle/>
+          <a:p>
+            <a:pPr indent="0" marL="0">
+              <a:buNone/>
+            </a:pPr>
+            <a:r>
+              <a:rPr lang="en-US" sz="1500" b="1" dirty="0">
                 <a:solidFill>
                   <a:srgbClr val="F4F0E8"/>
                 </a:solidFill>
@@ -13933,61 +15026,460 @@
                 <a:ea typeface="Georgia" pitchFamily="34" charset="-122"/>
                 <a:cs typeface="Georgia" pitchFamily="34" charset="-120"/>
               </a:rPr>
-              <a:t>2</a:t>
-            </a:r>
-            <a:endParaRPr lang="en-US" sz="3400" dirty="0"/>
-          </a:p>
-        </p:txBody>
-      </p:sp>
-      <p:sp>
-        <p:nvSpPr>
-          <p:cNvPr id="15" name="Text 12"/>
-          <p:cNvSpPr/>
-          <p:nvPr/>
-        </p:nvSpPr>
-        <p:spPr>
-          <a:xfrm>
-            <a:off x="4565904" y="2459736"/>
-            <a:ext cx="3057144" cy="274320"/>
-          </a:xfrm>
-          <a:prstGeom prst="rect">
-            <a:avLst/>
-          </a:prstGeom>
-          <a:noFill/>
-          <a:ln/>
-        </p:spPr>
-        <p:txBody>
-          <a:bodyPr wrap="square" lIns="0" tIns="0" rIns="0" bIns="0" rtlCol="0" anchor="ctr"/>
-          <a:lstStyle/>
-          <a:p>
-            <a:pPr indent="0" marL="0">
-              <a:buNone/>
-            </a:pPr>
-            <a:r>
-              <a:rPr lang="en-US" sz="1200" dirty="0">
-                <a:solidFill>
-                  <a:srgbClr val="B9BFC9"/>
+              <a:t>Nina Rao @Nina</a:t>
+            </a:r>
+            <a:endParaRPr lang="en-US" sz="1500" dirty="0"/>
+          </a:p>
+        </p:txBody>
+      </p:sp>
+      <p:sp>
+        <p:nvSpPr>
+          <p:cNvPr id="28" name="Text 25"/>
+          <p:cNvSpPr/>
+          <p:nvPr/>
+        </p:nvSpPr>
+        <p:spPr>
+          <a:xfrm>
+            <a:off x="868680" y="3648456"/>
+            <a:ext cx="3291840" cy="219456"/>
+          </a:xfrm>
+          <a:prstGeom prst="rect">
+            <a:avLst/>
+          </a:prstGeom>
+          <a:noFill/>
+          <a:ln/>
+        </p:spPr>
+        <p:txBody>
+          <a:bodyPr wrap="square" lIns="0" tIns="0" rIns="0" bIns="0" rtlCol="0" anchor="ctr">
+            <a:normAutofit/>
+          </a:bodyPr>
+          <a:lstStyle/>
+          <a:p>
+            <a:pPr indent="0" marL="0">
+              <a:buNone/>
+            </a:pPr>
+            <a:r>
+              <a:rPr lang="en-US" sz="1100" b="1" dirty="0">
+                <a:solidFill>
+                  <a:srgbClr val="5CC8D7"/>
                 </a:solidFill>
                 <a:latin typeface="Arial" pitchFamily="34" charset="0"/>
                 <a:ea typeface="Arial" pitchFamily="34" charset="-122"/>
                 <a:cs typeface="Arial" pitchFamily="34" charset="-120"/>
               </a:rPr>
-              <a:t>In final review</a:t>
-            </a:r>
-            <a:endParaRPr lang="en-US" sz="1200" dirty="0"/>
-          </a:p>
-        </p:txBody>
-      </p:sp>
-      <p:sp>
-        <p:nvSpPr>
-          <p:cNvPr id="16" name="Shape 13"/>
-          <p:cNvSpPr/>
-          <p:nvPr/>
-        </p:nvSpPr>
-        <p:spPr>
-          <a:xfrm>
-            <a:off x="8034528" y="1783080"/>
-            <a:ext cx="3514344" cy="1051560"/>
+              <a:t>ClinicBook · Clinic Dashboard</a:t>
+            </a:r>
+            <a:endParaRPr lang="en-US" sz="1100" dirty="0"/>
+          </a:p>
+        </p:txBody>
+      </p:sp>
+      <p:sp>
+        <p:nvSpPr>
+          <p:cNvPr id="29" name="Text 26"/>
+          <p:cNvSpPr/>
+          <p:nvPr/>
+        </p:nvSpPr>
+        <p:spPr>
+          <a:xfrm>
+            <a:off x="868680" y="3904488"/>
+            <a:ext cx="3291840" cy="576072"/>
+          </a:xfrm>
+          <a:prstGeom prst="rect">
+            <a:avLst/>
+          </a:prstGeom>
+          <a:noFill/>
+          <a:ln/>
+        </p:spPr>
+        <p:txBody>
+          <a:bodyPr wrap="square" lIns="0" tIns="0" rIns="0" bIns="0" rtlCol="0" anchor="t"/>
+          <a:lstStyle/>
+          <a:p>
+            <a:pPr indent="0" marL="0">
+              <a:buNone/>
+            </a:pPr>
+            <a:r>
+              <a:rPr lang="en-US" sz="1100" i="1" dirty="0">
+                <a:solidFill>
+                  <a:srgbClr val="B9BFC9"/>
+                </a:solidFill>
+                <a:latin typeface="Arial" pitchFamily="34" charset="0"/>
+                <a:ea typeface="Arial" pitchFamily="34" charset="-122"/>
+                <a:cs typeface="Arial" pitchFamily="34" charset="-120"/>
+              </a:rPr>
+              <a:t>Onboarding and schedules done; reminders in final review.</a:t>
+            </a:r>
+            <a:endParaRPr lang="en-US" sz="1100" dirty="0"/>
+          </a:p>
+        </p:txBody>
+      </p:sp>
+      <p:sp>
+        <p:nvSpPr>
+          <p:cNvPr id="30" name="Text 27"/>
+          <p:cNvSpPr/>
+          <p:nvPr/>
+        </p:nvSpPr>
+        <p:spPr>
+          <a:xfrm>
+            <a:off x="4480560" y="3337560"/>
+            <a:ext cx="2103120" cy="548640"/>
+          </a:xfrm>
+          <a:prstGeom prst="rect">
+            <a:avLst/>
+          </a:prstGeom>
+          <a:noFill/>
+          <a:ln/>
+        </p:spPr>
+        <p:txBody>
+          <a:bodyPr wrap="square" lIns="0" tIns="0" rIns="0" bIns="0" rtlCol="0" anchor="ctr"/>
+          <a:lstStyle/>
+          <a:p>
+            <a:pPr indent="0" marL="0">
+              <a:buNone/>
+            </a:pPr>
+            <a:r>
+              <a:rPr lang="en-US" sz="2800" b="1" dirty="0">
+                <a:solidFill>
+                  <a:srgbClr val="5CC8D7"/>
+                </a:solidFill>
+                <a:latin typeface="Georgia" pitchFamily="34" charset="0"/>
+                <a:ea typeface="Georgia" pitchFamily="34" charset="-122"/>
+                <a:cs typeface="Georgia" pitchFamily="34" charset="-120"/>
+              </a:rPr>
+              <a:t>70%</a:t>
+            </a:r>
+            <a:endParaRPr lang="en-US" sz="2800" dirty="0"/>
+          </a:p>
+        </p:txBody>
+      </p:sp>
+      <p:sp>
+        <p:nvSpPr>
+          <p:cNvPr id="31" name="Text 28"/>
+          <p:cNvSpPr/>
+          <p:nvPr/>
+        </p:nvSpPr>
+        <p:spPr>
+          <a:xfrm>
+            <a:off x="4480560" y="3904488"/>
+            <a:ext cx="2103120" cy="256032"/>
+          </a:xfrm>
+          <a:prstGeom prst="rect">
+            <a:avLst/>
+          </a:prstGeom>
+          <a:noFill/>
+          <a:ln/>
+        </p:spPr>
+        <p:txBody>
+          <a:bodyPr wrap="square" lIns="0" tIns="0" rIns="0" bIns="0" rtlCol="0" anchor="ctr"/>
+          <a:lstStyle/>
+          <a:p>
+            <a:pPr indent="0" marL="0">
+              <a:buNone/>
+            </a:pPr>
+            <a:r>
+              <a:rPr lang="en-US" sz="1100" dirty="0">
+                <a:solidFill>
+                  <a:srgbClr val="B9BFC9"/>
+                </a:solidFill>
+                <a:latin typeface="Arial" pitchFamily="34" charset="0"/>
+                <a:ea typeface="Arial" pitchFamily="34" charset="-122"/>
+                <a:cs typeface="Arial" pitchFamily="34" charset="-120"/>
+              </a:rPr>
+              <a:t>4 done, 1 open</a:t>
+            </a:r>
+            <a:endParaRPr lang="en-US" sz="1100" dirty="0"/>
+          </a:p>
+        </p:txBody>
+      </p:sp>
+      <p:sp>
+        <p:nvSpPr>
+          <p:cNvPr id="32" name="Shape 29"/>
+          <p:cNvSpPr/>
+          <p:nvPr/>
+        </p:nvSpPr>
+        <p:spPr>
+          <a:xfrm>
+            <a:off x="4480560" y="4251960"/>
+            <a:ext cx="2103120" cy="73152"/>
+          </a:xfrm>
+          <a:prstGeom prst="rect">
+            <a:avLst/>
+          </a:prstGeom>
+          <a:solidFill>
+            <a:srgbClr val="36393E"/>
+          </a:solidFill>
+          <a:ln/>
+        </p:spPr>
+      </p:sp>
+      <p:sp>
+        <p:nvSpPr>
+          <p:cNvPr id="33" name="Shape 30"/>
+          <p:cNvSpPr/>
+          <p:nvPr/>
+        </p:nvSpPr>
+        <p:spPr>
+          <a:xfrm>
+            <a:off x="4480560" y="4251960"/>
+            <a:ext cx="1472184" cy="73152"/>
+          </a:xfrm>
+          <a:prstGeom prst="rect">
+            <a:avLst/>
+          </a:prstGeom>
+          <a:solidFill>
+            <a:srgbClr val="5CC8D7"/>
+          </a:solidFill>
+          <a:ln/>
+        </p:spPr>
+      </p:sp>
+      <p:sp>
+        <p:nvSpPr>
+          <p:cNvPr id="34" name="Shape 31"/>
+          <p:cNvSpPr/>
+          <p:nvPr/>
+        </p:nvSpPr>
+        <p:spPr>
+          <a:xfrm>
+            <a:off x="6903720" y="3447288"/>
+            <a:ext cx="109728" cy="109728"/>
+          </a:xfrm>
+          <a:prstGeom prst="rect">
+            <a:avLst/>
+          </a:prstGeom>
+          <a:solidFill>
+            <a:srgbClr val="5CC8D7"/>
+          </a:solidFill>
+          <a:ln/>
+        </p:spPr>
+      </p:sp>
+      <p:sp>
+        <p:nvSpPr>
+          <p:cNvPr id="35" name="Text 32"/>
+          <p:cNvSpPr/>
+          <p:nvPr/>
+        </p:nvSpPr>
+        <p:spPr>
+          <a:xfrm>
+            <a:off x="7104888" y="3383280"/>
+            <a:ext cx="1888236" cy="365760"/>
+          </a:xfrm>
+          <a:prstGeom prst="rect">
+            <a:avLst/>
+          </a:prstGeom>
+          <a:noFill/>
+          <a:ln/>
+        </p:spPr>
+        <p:txBody>
+          <a:bodyPr wrap="square" lIns="0" tIns="0" rIns="0" bIns="0" rtlCol="0" anchor="t"/>
+          <a:lstStyle/>
+          <a:p>
+            <a:pPr indent="0" marL="0">
+              <a:buNone/>
+            </a:pPr>
+            <a:r>
+              <a:rPr lang="en-US" sz="1100" dirty="0">
+                <a:solidFill>
+                  <a:srgbClr val="F4F0E8"/>
+                </a:solidFill>
+                <a:latin typeface="Arial" pitchFamily="34" charset="0"/>
+                <a:ea typeface="Arial" pitchFamily="34" charset="-122"/>
+                <a:cs typeface="Arial" pitchFamily="34" charset="-120"/>
+              </a:rPr>
+              <a:t>P1 · Clinic Onboarding (3/3)</a:t>
+            </a:r>
+            <a:endParaRPr lang="en-US" sz="1100" dirty="0"/>
+          </a:p>
+        </p:txBody>
+      </p:sp>
+      <p:sp>
+        <p:nvSpPr>
+          <p:cNvPr id="36" name="Shape 33"/>
+          <p:cNvSpPr/>
+          <p:nvPr/>
+        </p:nvSpPr>
+        <p:spPr>
+          <a:xfrm>
+            <a:off x="6903720" y="3813048"/>
+            <a:ext cx="109728" cy="109728"/>
+          </a:xfrm>
+          <a:prstGeom prst="rect">
+            <a:avLst/>
+          </a:prstGeom>
+          <a:solidFill>
+            <a:srgbClr val="5CC8D7"/>
+          </a:solidFill>
+          <a:ln/>
+        </p:spPr>
+      </p:sp>
+      <p:sp>
+        <p:nvSpPr>
+          <p:cNvPr id="37" name="Text 34"/>
+          <p:cNvSpPr/>
+          <p:nvPr/>
+        </p:nvSpPr>
+        <p:spPr>
+          <a:xfrm>
+            <a:off x="7104888" y="3749040"/>
+            <a:ext cx="1888236" cy="365760"/>
+          </a:xfrm>
+          <a:prstGeom prst="rect">
+            <a:avLst/>
+          </a:prstGeom>
+          <a:noFill/>
+          <a:ln/>
+        </p:spPr>
+        <p:txBody>
+          <a:bodyPr wrap="square" lIns="0" tIns="0" rIns="0" bIns="0" rtlCol="0" anchor="t"/>
+          <a:lstStyle/>
+          <a:p>
+            <a:pPr indent="0" marL="0">
+              <a:buNone/>
+            </a:pPr>
+            <a:r>
+              <a:rPr lang="en-US" sz="1100" dirty="0">
+                <a:solidFill>
+                  <a:srgbClr val="F4F0E8"/>
+                </a:solidFill>
+                <a:latin typeface="Arial" pitchFamily="34" charset="0"/>
+                <a:ea typeface="Arial" pitchFamily="34" charset="-122"/>
+                <a:cs typeface="Arial" pitchFamily="34" charset="-120"/>
+              </a:rPr>
+              <a:t>P2 · Doctor Schedules (5/5)</a:t>
+            </a:r>
+            <a:endParaRPr lang="en-US" sz="1100" dirty="0"/>
+          </a:p>
+        </p:txBody>
+      </p:sp>
+      <p:sp>
+        <p:nvSpPr>
+          <p:cNvPr id="38" name="Shape 35"/>
+          <p:cNvSpPr/>
+          <p:nvPr/>
+        </p:nvSpPr>
+        <p:spPr>
+          <a:xfrm>
+            <a:off x="9111996" y="3447288"/>
+            <a:ext cx="109728" cy="109728"/>
+          </a:xfrm>
+          <a:prstGeom prst="rect">
+            <a:avLst/>
+          </a:prstGeom>
+          <a:ln w="15875">
+            <a:solidFill>
+              <a:srgbClr val="5CC8D7"/>
+            </a:solidFill>
+            <a:prstDash val="solid"/>
+          </a:ln>
+        </p:spPr>
+      </p:sp>
+      <p:sp>
+        <p:nvSpPr>
+          <p:cNvPr id="39" name="Text 36"/>
+          <p:cNvSpPr/>
+          <p:nvPr/>
+        </p:nvSpPr>
+        <p:spPr>
+          <a:xfrm>
+            <a:off x="9313164" y="3383280"/>
+            <a:ext cx="1888236" cy="365760"/>
+          </a:xfrm>
+          <a:prstGeom prst="rect">
+            <a:avLst/>
+          </a:prstGeom>
+          <a:noFill/>
+          <a:ln/>
+        </p:spPr>
+        <p:txBody>
+          <a:bodyPr wrap="square" lIns="0" tIns="0" rIns="0" bIns="0" rtlCol="0" anchor="t"/>
+          <a:lstStyle/>
+          <a:p>
+            <a:pPr indent="0" marL="0">
+              <a:buNone/>
+            </a:pPr>
+            <a:r>
+              <a:rPr lang="en-US" sz="1100" dirty="0">
+                <a:solidFill>
+                  <a:srgbClr val="F4F0E8"/>
+                </a:solidFill>
+                <a:latin typeface="Arial" pitchFamily="34" charset="0"/>
+                <a:ea typeface="Arial" pitchFamily="34" charset="-122"/>
+                <a:cs typeface="Arial" pitchFamily="34" charset="-120"/>
+              </a:rPr>
+              <a:t>P4 · Reminders, in review (5/5)</a:t>
+            </a:r>
+            <a:endParaRPr lang="en-US" sz="1100" dirty="0"/>
+          </a:p>
+        </p:txBody>
+      </p:sp>
+      <p:sp>
+        <p:nvSpPr>
+          <p:cNvPr id="40" name="Shape 37"/>
+          <p:cNvSpPr/>
+          <p:nvPr/>
+        </p:nvSpPr>
+        <p:spPr>
+          <a:xfrm>
+            <a:off x="9111996" y="3813048"/>
+            <a:ext cx="109728" cy="109728"/>
+          </a:xfrm>
+          <a:prstGeom prst="rect">
+            <a:avLst/>
+          </a:prstGeom>
+          <a:ln w="15875">
+            <a:solidFill>
+              <a:srgbClr val="929AA8"/>
+            </a:solidFill>
+            <a:prstDash val="solid"/>
+          </a:ln>
+        </p:spPr>
+      </p:sp>
+      <p:sp>
+        <p:nvSpPr>
+          <p:cNvPr id="41" name="Text 38"/>
+          <p:cNvSpPr/>
+          <p:nvPr/>
+        </p:nvSpPr>
+        <p:spPr>
+          <a:xfrm>
+            <a:off x="9313164" y="3749040"/>
+            <a:ext cx="1888236" cy="365760"/>
+          </a:xfrm>
+          <a:prstGeom prst="rect">
+            <a:avLst/>
+          </a:prstGeom>
+          <a:noFill/>
+          <a:ln/>
+        </p:spPr>
+        <p:txBody>
+          <a:bodyPr wrap="square" lIns="0" tIns="0" rIns="0" bIns="0" rtlCol="0" anchor="t"/>
+          <a:lstStyle/>
+          <a:p>
+            <a:pPr indent="0" marL="0">
+              <a:buNone/>
+            </a:pPr>
+            <a:r>
+              <a:rPr lang="en-US" sz="1100" dirty="0">
+                <a:solidFill>
+                  <a:srgbClr val="929AA8"/>
+                </a:solidFill>
+                <a:latin typeface="Arial" pitchFamily="34" charset="0"/>
+                <a:ea typeface="Arial" pitchFamily="34" charset="-122"/>
+                <a:cs typeface="Arial" pitchFamily="34" charset="-120"/>
+              </a:rPr>
+              <a:t>P3 · Reports &amp; Exports (0/3)</a:t>
+            </a:r>
+            <a:endParaRPr lang="en-US" sz="1100" dirty="0"/>
+          </a:p>
+        </p:txBody>
+      </p:sp>
+      <p:sp>
+        <p:nvSpPr>
+          <p:cNvPr id="42" name="Shape 39"/>
+          <p:cNvSpPr/>
+          <p:nvPr/>
+        </p:nvSpPr>
+        <p:spPr>
+          <a:xfrm>
+            <a:off x="640080" y="4709160"/>
+            <a:ext cx="10908792" cy="1280160"/>
           </a:xfrm>
           <a:prstGeom prst="rect">
             <a:avLst/>
@@ -14000,30 +15492,30 @@
       </p:sp>
       <p:sp>
         <p:nvSpPr>
-          <p:cNvPr id="17" name="Text 14"/>
-          <p:cNvSpPr/>
-          <p:nvPr/>
-        </p:nvSpPr>
-        <p:spPr>
-          <a:xfrm>
-            <a:off x="8263128" y="1856232"/>
-            <a:ext cx="3057144" cy="594360"/>
-          </a:xfrm>
-          <a:prstGeom prst="rect">
-            <a:avLst/>
-          </a:prstGeom>
-          <a:noFill/>
-          <a:ln/>
-        </p:spPr>
-        <p:txBody>
-          <a:bodyPr wrap="square" lIns="0" tIns="0" rIns="0" bIns="0" rtlCol="0" anchor="ctr"/>
-          <a:lstStyle/>
-          <a:p>
-            <a:pPr indent="0" marL="0">
-              <a:buNone/>
-            </a:pPr>
-            <a:r>
-              <a:rPr lang="en-US" sz="3400" b="1" dirty="0">
+          <p:cNvPr id="43" name="Text 40"/>
+          <p:cNvSpPr/>
+          <p:nvPr/>
+        </p:nvSpPr>
+        <p:spPr>
+          <a:xfrm>
+            <a:off x="868680" y="4800600"/>
+            <a:ext cx="3291840" cy="292608"/>
+          </a:xfrm>
+          <a:prstGeom prst="rect">
+            <a:avLst/>
+          </a:prstGeom>
+          <a:noFill/>
+          <a:ln/>
+        </p:spPr>
+        <p:txBody>
+          <a:bodyPr wrap="square" lIns="0" tIns="0" rIns="0" bIns="0" rtlCol="0" anchor="t"/>
+          <a:lstStyle/>
+          <a:p>
+            <a:pPr indent="0" marL="0">
+              <a:buNone/>
+            </a:pPr>
+            <a:r>
+              <a:rPr lang="en-US" sz="1500" b="1" dirty="0">
                 <a:solidFill>
                   <a:srgbClr val="F4F0E8"/>
                 </a:solidFill>
@@ -14031,86 +15523,72 @@
                 <a:ea typeface="Georgia" pitchFamily="34" charset="-122"/>
                 <a:cs typeface="Georgia" pitchFamily="34" charset="-120"/>
               </a:rPr>
-              <a:t>7</a:t>
-            </a:r>
-            <a:endParaRPr lang="en-US" sz="3400" dirty="0"/>
-          </a:p>
-        </p:txBody>
-      </p:sp>
-      <p:sp>
-        <p:nvSpPr>
-          <p:cNvPr id="18" name="Text 15"/>
-          <p:cNvSpPr/>
-          <p:nvPr/>
-        </p:nvSpPr>
-        <p:spPr>
-          <a:xfrm>
-            <a:off x="8263128" y="2459736"/>
-            <a:ext cx="3057144" cy="274320"/>
-          </a:xfrm>
-          <a:prstGeom prst="rect">
-            <a:avLst/>
-          </a:prstGeom>
-          <a:noFill/>
-          <a:ln/>
-        </p:spPr>
-        <p:txBody>
-          <a:bodyPr wrap="square" lIns="0" tIns="0" rIns="0" bIns="0" rtlCol="0" anchor="ctr"/>
-          <a:lstStyle/>
-          <a:p>
-            <a:pPr indent="0" marL="0">
-              <a:buNone/>
-            </a:pPr>
-            <a:r>
-              <a:rPr lang="en-US" sz="1200" dirty="0">
-                <a:solidFill>
-                  <a:srgbClr val="B9BFC9"/>
+              <a:t>Maya Lin @Maya</a:t>
+            </a:r>
+            <a:endParaRPr lang="en-US" sz="1500" dirty="0"/>
+          </a:p>
+        </p:txBody>
+      </p:sp>
+      <p:sp>
+        <p:nvSpPr>
+          <p:cNvPr id="44" name="Text 41"/>
+          <p:cNvSpPr/>
+          <p:nvPr/>
+        </p:nvSpPr>
+        <p:spPr>
+          <a:xfrm>
+            <a:off x="868680" y="5111496"/>
+            <a:ext cx="3291840" cy="219456"/>
+          </a:xfrm>
+          <a:prstGeom prst="rect">
+            <a:avLst/>
+          </a:prstGeom>
+          <a:noFill/>
+          <a:ln/>
+        </p:spPr>
+        <p:txBody>
+          <a:bodyPr wrap="square" lIns="0" tIns="0" rIns="0" bIns="0" rtlCol="0" anchor="ctr">
+            <a:normAutofit/>
+          </a:bodyPr>
+          <a:lstStyle/>
+          <a:p>
+            <a:pPr indent="0" marL="0">
+              <a:buNone/>
+            </a:pPr>
+            <a:r>
+              <a:rPr lang="en-US" sz="1100" b="1" dirty="0">
+                <a:solidFill>
+                  <a:srgbClr val="A99BFF"/>
                 </a:solidFill>
                 <a:latin typeface="Arial" pitchFamily="34" charset="0"/>
                 <a:ea typeface="Arial" pitchFamily="34" charset="-122"/>
                 <a:cs typeface="Arial" pitchFamily="34" charset="-120"/>
               </a:rPr>
-              <a:t>Code reviews completed</a:t>
-            </a:r>
-            <a:endParaRPr lang="en-US" sz="1200" dirty="0"/>
-          </a:p>
-        </p:txBody>
-      </p:sp>
-      <p:graphicFrame>
-        <p:nvGraphicFramePr>
-          <p:cNvPr id="19" name="Chart 0" descr=""/>
-          <p:cNvGraphicFramePr/>
-          <p:nvPr/>
-        </p:nvGraphicFramePr>
-        <p:xfrm>
-          <a:off x="640080" y="3017520"/>
-          <a:ext cx="10908792" cy="2880360"/>
-        </p:xfrm>
-        <a:graphic xmlns:a="http://schemas.openxmlformats.org/drawingml/2006/main">
-          <a:graphicData uri="http://schemas.openxmlformats.org/drawingml/2006/chart">
-            <c:chart xmlns:c="http://schemas.openxmlformats.org/drawingml/2006/chart" r:id="rId2"/>
-          </a:graphicData>
-        </a:graphic>
-      </p:graphicFrame>
-      <p:sp>
-        <p:nvSpPr>
-          <p:cNvPr id="20" name="Text 16"/>
-          <p:cNvSpPr/>
-          <p:nvPr/>
-        </p:nvSpPr>
-        <p:spPr>
-          <a:xfrm>
-            <a:off x="640080" y="5943600"/>
-            <a:ext cx="10908792" cy="274320"/>
-          </a:xfrm>
-          <a:prstGeom prst="rect">
-            <a:avLst/>
-          </a:prstGeom>
-          <a:noFill/>
-          <a:ln/>
-        </p:spPr>
-        <p:txBody>
-          <a:bodyPr wrap="square" lIns="0" tIns="0" rIns="0" bIns="0" rtlCol="0" anchor="ctr"/>
+              <a:t>PulseBoard · Analytics</a:t>
+            </a:r>
+            <a:endParaRPr lang="en-US" sz="1100" dirty="0"/>
+          </a:p>
+        </p:txBody>
+      </p:sp>
+      <p:sp>
+        <p:nvSpPr>
+          <p:cNvPr id="45" name="Text 42"/>
+          <p:cNvSpPr/>
+          <p:nvPr/>
+        </p:nvSpPr>
+        <p:spPr>
+          <a:xfrm>
+            <a:off x="868680" y="5367528"/>
+            <a:ext cx="3291840" cy="576072"/>
+          </a:xfrm>
+          <a:prstGeom prst="rect">
+            <a:avLst/>
+          </a:prstGeom>
+          <a:noFill/>
+          <a:ln/>
+        </p:spPr>
+        <p:txBody>
+          <a:bodyPr wrap="square" lIns="0" tIns="0" rIns="0" bIns="0" rtlCol="0" anchor="t"/>
           <a:lstStyle/>
           <a:p>
             <a:pPr indent="0" marL="0">
@@ -14119,13 +15597,408 @@
             <a:r>
               <a:rPr lang="en-US" sz="1100" i="1" dirty="0">
                 <a:solidFill>
-                  <a:srgbClr val="929AA8"/>
+                  <a:srgbClr val="B9BFC9"/>
                 </a:solidFill>
                 <a:latin typeface="Arial" pitchFamily="34" charset="0"/>
                 <a:ea typeface="Arial" pitchFamily="34" charset="-122"/>
                 <a:cs typeface="Arial" pitchFamily="34" charset="-120"/>
               </a:rPr>
-              <a:t>Source: GitHub activity this week.</a:t>
+              <a:t>Data transfer done; usage tracking rolling out.</a:t>
+            </a:r>
+            <a:endParaRPr lang="en-US" sz="1100" dirty="0"/>
+          </a:p>
+        </p:txBody>
+      </p:sp>
+      <p:sp>
+        <p:nvSpPr>
+          <p:cNvPr id="46" name="Text 43"/>
+          <p:cNvSpPr/>
+          <p:nvPr/>
+        </p:nvSpPr>
+        <p:spPr>
+          <a:xfrm>
+            <a:off x="4480560" y="4800600"/>
+            <a:ext cx="2103120" cy="548640"/>
+          </a:xfrm>
+          <a:prstGeom prst="rect">
+            <a:avLst/>
+          </a:prstGeom>
+          <a:noFill/>
+          <a:ln/>
+        </p:spPr>
+        <p:txBody>
+          <a:bodyPr wrap="square" lIns="0" tIns="0" rIns="0" bIns="0" rtlCol="0" anchor="ctr"/>
+          <a:lstStyle/>
+          <a:p>
+            <a:pPr indent="0" marL="0">
+              <a:buNone/>
+            </a:pPr>
+            <a:r>
+              <a:rPr lang="en-US" sz="2800" b="1" dirty="0">
+                <a:solidFill>
+                  <a:srgbClr val="A99BFF"/>
+                </a:solidFill>
+                <a:latin typeface="Georgia" pitchFamily="34" charset="0"/>
+                <a:ea typeface="Georgia" pitchFamily="34" charset="-122"/>
+                <a:cs typeface="Georgia" pitchFamily="34" charset="-120"/>
+              </a:rPr>
+              <a:t>75%</a:t>
+            </a:r>
+            <a:endParaRPr lang="en-US" sz="2800" dirty="0"/>
+          </a:p>
+        </p:txBody>
+      </p:sp>
+      <p:sp>
+        <p:nvSpPr>
+          <p:cNvPr id="47" name="Text 44"/>
+          <p:cNvSpPr/>
+          <p:nvPr/>
+        </p:nvSpPr>
+        <p:spPr>
+          <a:xfrm>
+            <a:off x="4480560" y="5367528"/>
+            <a:ext cx="2103120" cy="256032"/>
+          </a:xfrm>
+          <a:prstGeom prst="rect">
+            <a:avLst/>
+          </a:prstGeom>
+          <a:noFill/>
+          <a:ln/>
+        </p:spPr>
+        <p:txBody>
+          <a:bodyPr wrap="square" lIns="0" tIns="0" rIns="0" bIns="0" rtlCol="0" anchor="ctr"/>
+          <a:lstStyle/>
+          <a:p>
+            <a:pPr indent="0" marL="0">
+              <a:buNone/>
+            </a:pPr>
+            <a:r>
+              <a:rPr lang="en-US" sz="1100" dirty="0">
+                <a:solidFill>
+                  <a:srgbClr val="B9BFC9"/>
+                </a:solidFill>
+                <a:latin typeface="Arial" pitchFamily="34" charset="0"/>
+                <a:ea typeface="Arial" pitchFamily="34" charset="-122"/>
+                <a:cs typeface="Arial" pitchFamily="34" charset="-120"/>
+              </a:rPr>
+              <a:t>5 done, 1 open</a:t>
+            </a:r>
+            <a:endParaRPr lang="en-US" sz="1100" dirty="0"/>
+          </a:p>
+        </p:txBody>
+      </p:sp>
+      <p:sp>
+        <p:nvSpPr>
+          <p:cNvPr id="48" name="Shape 45"/>
+          <p:cNvSpPr/>
+          <p:nvPr/>
+        </p:nvSpPr>
+        <p:spPr>
+          <a:xfrm>
+            <a:off x="4480560" y="5715000"/>
+            <a:ext cx="2103120" cy="73152"/>
+          </a:xfrm>
+          <a:prstGeom prst="rect">
+            <a:avLst/>
+          </a:prstGeom>
+          <a:solidFill>
+            <a:srgbClr val="36393E"/>
+          </a:solidFill>
+          <a:ln/>
+        </p:spPr>
+      </p:sp>
+      <p:sp>
+        <p:nvSpPr>
+          <p:cNvPr id="49" name="Shape 46"/>
+          <p:cNvSpPr/>
+          <p:nvPr/>
+        </p:nvSpPr>
+        <p:spPr>
+          <a:xfrm>
+            <a:off x="4480560" y="5715000"/>
+            <a:ext cx="1577340" cy="73152"/>
+          </a:xfrm>
+          <a:prstGeom prst="rect">
+            <a:avLst/>
+          </a:prstGeom>
+          <a:solidFill>
+            <a:srgbClr val="A99BFF"/>
+          </a:solidFill>
+          <a:ln/>
+        </p:spPr>
+      </p:sp>
+      <p:sp>
+        <p:nvSpPr>
+          <p:cNvPr id="50" name="Shape 47"/>
+          <p:cNvSpPr/>
+          <p:nvPr/>
+        </p:nvSpPr>
+        <p:spPr>
+          <a:xfrm>
+            <a:off x="6903720" y="4910328"/>
+            <a:ext cx="109728" cy="109728"/>
+          </a:xfrm>
+          <a:prstGeom prst="rect">
+            <a:avLst/>
+          </a:prstGeom>
+          <a:solidFill>
+            <a:srgbClr val="A99BFF"/>
+          </a:solidFill>
+          <a:ln/>
+        </p:spPr>
+      </p:sp>
+      <p:sp>
+        <p:nvSpPr>
+          <p:cNvPr id="51" name="Text 48"/>
+          <p:cNvSpPr/>
+          <p:nvPr/>
+        </p:nvSpPr>
+        <p:spPr>
+          <a:xfrm>
+            <a:off x="7104888" y="4846320"/>
+            <a:ext cx="1888236" cy="365760"/>
+          </a:xfrm>
+          <a:prstGeom prst="rect">
+            <a:avLst/>
+          </a:prstGeom>
+          <a:noFill/>
+          <a:ln/>
+        </p:spPr>
+        <p:txBody>
+          <a:bodyPr wrap="square" lIns="0" tIns="0" rIns="0" bIns="0" rtlCol="0" anchor="t"/>
+          <a:lstStyle/>
+          <a:p>
+            <a:pPr indent="0" marL="0">
+              <a:buNone/>
+            </a:pPr>
+            <a:r>
+              <a:rPr lang="en-US" sz="1100" dirty="0">
+                <a:solidFill>
+                  <a:srgbClr val="F4F0E8"/>
+                </a:solidFill>
+                <a:latin typeface="Arial" pitchFamily="34" charset="0"/>
+                <a:ea typeface="Arial" pitchFamily="34" charset="-122"/>
+                <a:cs typeface="Arial" pitchFamily="34" charset="-120"/>
+              </a:rPr>
+              <a:t>Data transfer to new system</a:t>
+            </a:r>
+            <a:endParaRPr lang="en-US" sz="1100" dirty="0"/>
+          </a:p>
+        </p:txBody>
+      </p:sp>
+      <p:sp>
+        <p:nvSpPr>
+          <p:cNvPr id="52" name="Shape 49"/>
+          <p:cNvSpPr/>
+          <p:nvPr/>
+        </p:nvSpPr>
+        <p:spPr>
+          <a:xfrm>
+            <a:off x="6903720" y="5276088"/>
+            <a:ext cx="109728" cy="109728"/>
+          </a:xfrm>
+          <a:prstGeom prst="rect">
+            <a:avLst/>
+          </a:prstGeom>
+          <a:solidFill>
+            <a:srgbClr val="A99BFF"/>
+          </a:solidFill>
+          <a:ln/>
+        </p:spPr>
+      </p:sp>
+      <p:sp>
+        <p:nvSpPr>
+          <p:cNvPr id="53" name="Text 50"/>
+          <p:cNvSpPr/>
+          <p:nvPr/>
+        </p:nvSpPr>
+        <p:spPr>
+          <a:xfrm>
+            <a:off x="7104888" y="5212080"/>
+            <a:ext cx="1888236" cy="365760"/>
+          </a:xfrm>
+          <a:prstGeom prst="rect">
+            <a:avLst/>
+          </a:prstGeom>
+          <a:noFill/>
+          <a:ln/>
+        </p:spPr>
+        <p:txBody>
+          <a:bodyPr wrap="square" lIns="0" tIns="0" rIns="0" bIns="0" rtlCol="0" anchor="t"/>
+          <a:lstStyle/>
+          <a:p>
+            <a:pPr indent="0" marL="0">
+              <a:buNone/>
+            </a:pPr>
+            <a:r>
+              <a:rPr lang="en-US" sz="1100" dirty="0">
+                <a:solidFill>
+                  <a:srgbClr val="F4F0E8"/>
+                </a:solidFill>
+                <a:latin typeface="Arial" pitchFamily="34" charset="0"/>
+                <a:ea typeface="Arial" pitchFamily="34" charset="-122"/>
+                <a:cs typeface="Arial" pitchFamily="34" charset="-120"/>
+              </a:rPr>
+              <a:t>Event plan agreed</a:t>
+            </a:r>
+            <a:endParaRPr lang="en-US" sz="1100" dirty="0"/>
+          </a:p>
+        </p:txBody>
+      </p:sp>
+      <p:sp>
+        <p:nvSpPr>
+          <p:cNvPr id="54" name="Shape 51"/>
+          <p:cNvSpPr/>
+          <p:nvPr/>
+        </p:nvSpPr>
+        <p:spPr>
+          <a:xfrm>
+            <a:off x="9111996" y="4910328"/>
+            <a:ext cx="109728" cy="109728"/>
+          </a:xfrm>
+          <a:prstGeom prst="rect">
+            <a:avLst/>
+          </a:prstGeom>
+          <a:ln w="15875">
+            <a:solidFill>
+              <a:srgbClr val="A99BFF"/>
+            </a:solidFill>
+            <a:prstDash val="solid"/>
+          </a:ln>
+        </p:spPr>
+      </p:sp>
+      <p:sp>
+        <p:nvSpPr>
+          <p:cNvPr id="55" name="Text 52"/>
+          <p:cNvSpPr/>
+          <p:nvPr/>
+        </p:nvSpPr>
+        <p:spPr>
+          <a:xfrm>
+            <a:off x="9313164" y="4846320"/>
+            <a:ext cx="1888236" cy="365760"/>
+          </a:xfrm>
+          <a:prstGeom prst="rect">
+            <a:avLst/>
+          </a:prstGeom>
+          <a:noFill/>
+          <a:ln/>
+        </p:spPr>
+        <p:txBody>
+          <a:bodyPr wrap="square" lIns="0" tIns="0" rIns="0" bIns="0" rtlCol="0" anchor="t"/>
+          <a:lstStyle/>
+          <a:p>
+            <a:pPr indent="0" marL="0">
+              <a:buNone/>
+            </a:pPr>
+            <a:r>
+              <a:rPr lang="en-US" sz="1100" dirty="0">
+                <a:solidFill>
+                  <a:srgbClr val="F4F0E8"/>
+                </a:solidFill>
+                <a:latin typeface="Arial" pitchFamily="34" charset="0"/>
+                <a:ea typeface="Arial" pitchFamily="34" charset="-122"/>
+                <a:cs typeface="Arial" pitchFamily="34" charset="-120"/>
+              </a:rPr>
+              <a:t>Usage tracking rollout</a:t>
+            </a:r>
+            <a:endParaRPr lang="en-US" sz="1100" dirty="0"/>
+          </a:p>
+        </p:txBody>
+      </p:sp>
+      <p:sp>
+        <p:nvSpPr>
+          <p:cNvPr id="56" name="Shape 53"/>
+          <p:cNvSpPr/>
+          <p:nvPr/>
+        </p:nvSpPr>
+        <p:spPr>
+          <a:xfrm>
+            <a:off x="9111996" y="5276088"/>
+            <a:ext cx="109728" cy="109728"/>
+          </a:xfrm>
+          <a:prstGeom prst="rect">
+            <a:avLst/>
+          </a:prstGeom>
+          <a:solidFill>
+            <a:srgbClr val="A99BFF"/>
+          </a:solidFill>
+          <a:ln/>
+        </p:spPr>
+      </p:sp>
+      <p:sp>
+        <p:nvSpPr>
+          <p:cNvPr id="57" name="Text 54"/>
+          <p:cNvSpPr/>
+          <p:nvPr/>
+        </p:nvSpPr>
+        <p:spPr>
+          <a:xfrm>
+            <a:off x="9313164" y="5212080"/>
+            <a:ext cx="1888236" cy="365760"/>
+          </a:xfrm>
+          <a:prstGeom prst="rect">
+            <a:avLst/>
+          </a:prstGeom>
+          <a:noFill/>
+          <a:ln/>
+        </p:spPr>
+        <p:txBody>
+          <a:bodyPr wrap="square" lIns="0" tIns="0" rIns="0" bIns="0" rtlCol="0" anchor="t"/>
+          <a:lstStyle/>
+          <a:p>
+            <a:pPr indent="0" marL="0">
+              <a:buNone/>
+            </a:pPr>
+            <a:r>
+              <a:rPr lang="en-US" sz="1100" dirty="0">
+                <a:solidFill>
+                  <a:srgbClr val="F4F0E8"/>
+                </a:solidFill>
+                <a:latin typeface="Arial" pitchFamily="34" charset="0"/>
+                <a:ea typeface="Arial" pitchFamily="34" charset="-122"/>
+                <a:cs typeface="Arial" pitchFamily="34" charset="-120"/>
+              </a:rPr>
+              <a:t>Code reviews, 3 features</a:t>
+            </a:r>
+            <a:endParaRPr lang="en-US" sz="1100" dirty="0"/>
+          </a:p>
+        </p:txBody>
+      </p:sp>
+      <p:sp>
+        <p:nvSpPr>
+          <p:cNvPr id="58" name="Text 55"/>
+          <p:cNvSpPr/>
+          <p:nvPr/>
+        </p:nvSpPr>
+        <p:spPr>
+          <a:xfrm>
+            <a:off x="640080" y="6053328"/>
+            <a:ext cx="10908792" cy="256032"/>
+          </a:xfrm>
+          <a:prstGeom prst="rect">
+            <a:avLst/>
+          </a:prstGeom>
+          <a:noFill/>
+          <a:ln/>
+        </p:spPr>
+        <p:txBody>
+          <a:bodyPr wrap="square" lIns="0" tIns="0" rIns="0" bIns="0" rtlCol="0" anchor="ctr"/>
+          <a:lstStyle/>
+          <a:p>
+            <a:pPr indent="0" marL="0">
+              <a:buNone/>
+            </a:pPr>
+            <a:r>
+              <a:rPr lang="en-US" sz="1100" i="1" dirty="0">
+                <a:solidFill>
+                  <a:srgbClr val="929AA8"/>
+                </a:solidFill>
+                <a:latin typeface="Arial" pitchFamily="34" charset="0"/>
+                <a:ea typeface="Arial" pitchFamily="34" charset="-122"/>
+                <a:cs typeface="Arial" pitchFamily="34" charset="-120"/>
+              </a:rPr>
+              <a:t>Done/Open = planned tasks this week; work in review stays open until approved.</a:t>
             </a:r>
             <a:endParaRPr lang="en-US" sz="1100" dirty="0"/>
           </a:p>

--- a/src/assets/downloads/example-deck-ember.pptx
+++ b/src/assets/downloads/example-deck-ember.pptx
@@ -2594,7 +2594,7 @@
       </p:sp>
       <p:pic>
         <p:nvPicPr>
-          <p:cNvPr id="14" name="Image 0" descr="/var/folders/lw/rmylcyvd5rjfxk9g1z9rrm8w0000gq/T/showship-deck-EGIwvT/logo_trimmed.png">    </p:cNvPr>
+          <p:cNvPr id="14" name="Image 0" descr="/var/folders/lw/rmylcyvd5rjfxk9g1z9rrm8w0000gq/T/showship-deck-NYX43H/logo_trimmed.png">    </p:cNvPr>
           <p:cNvPicPr>
             <a:picLocks noChangeAspect="1"/>
           </p:cNvPicPr>
@@ -3211,7 +3211,7 @@
       </p:sp>
       <p:pic>
         <p:nvPicPr>
-          <p:cNvPr id="8" name="Image 0" descr="/var/folders/lw/rmylcyvd5rjfxk9g1z9rrm8w0000gq/T/showship-deck-EGIwvT/paper_mark.png">    </p:cNvPr>
+          <p:cNvPr id="8" name="Image 0" descr="/var/folders/lw/rmylcyvd5rjfxk9g1z9rrm8w0000gq/T/showship-deck-NYX43H/paper_mark.png">    </p:cNvPr>
           <p:cNvPicPr>
             <a:picLocks noChangeAspect="1"/>
           </p:cNvPicPr>
@@ -3867,7 +3867,7 @@
       </p:sp>
       <p:pic>
         <p:nvPicPr>
-          <p:cNvPr id="8" name="Image 0" descr="/var/folders/lw/rmylcyvd5rjfxk9g1z9rrm8w0000gq/T/showship-deck-EGIwvT/paper_mark.png">    </p:cNvPr>
+          <p:cNvPr id="8" name="Image 0" descr="/var/folders/lw/rmylcyvd5rjfxk9g1z9rrm8w0000gq/T/showship-deck-NYX43H/paper_mark.png">    </p:cNvPr>
           <p:cNvPicPr>
             <a:picLocks noChangeAspect="1"/>
           </p:cNvPicPr>
@@ -5182,7 +5182,7 @@
       </p:sp>
       <p:pic>
         <p:nvPicPr>
-          <p:cNvPr id="14" name="Image 0" descr="/var/folders/lw/rmylcyvd5rjfxk9g1z9rrm8w0000gq/T/showship-deck-EGIwvT/logo_trimmed.png">    </p:cNvPr>
+          <p:cNvPr id="14" name="Image 0" descr="/var/folders/lw/rmylcyvd5rjfxk9g1z9rrm8w0000gq/T/showship-deck-NYX43H/logo_trimmed.png">    </p:cNvPr>
           <p:cNvPicPr>
             <a:picLocks noChangeAspect="1"/>
           </p:cNvPicPr>
@@ -5721,7 +5721,7 @@
       </p:sp>
       <p:pic>
         <p:nvPicPr>
-          <p:cNvPr id="8" name="Image 0" descr="/var/folders/lw/rmylcyvd5rjfxk9g1z9rrm8w0000gq/T/showship-deck-EGIwvT/paper_mark.png">    </p:cNvPr>
+          <p:cNvPr id="8" name="Image 0" descr="/var/folders/lw/rmylcyvd5rjfxk9g1z9rrm8w0000gq/T/showship-deck-NYX43H/paper_mark.png">    </p:cNvPr>
           <p:cNvPicPr>
             <a:picLocks noChangeAspect="1"/>
           </p:cNvPicPr>
@@ -6864,7 +6864,7 @@
       </p:sp>
       <p:pic>
         <p:nvPicPr>
-          <p:cNvPr id="8" name="Image 0" descr="/var/folders/lw/rmylcyvd5rjfxk9g1z9rrm8w0000gq/T/showship-deck-EGIwvT/paper_mark.png">    </p:cNvPr>
+          <p:cNvPr id="8" name="Image 0" descr="/var/folders/lw/rmylcyvd5rjfxk9g1z9rrm8w0000gq/T/showship-deck-NYX43H/paper_mark.png">    </p:cNvPr>
           <p:cNvPicPr>
             <a:picLocks noChangeAspect="1"/>
           </p:cNvPicPr>
@@ -7970,7 +7970,7 @@
       </p:sp>
       <p:pic>
         <p:nvPicPr>
-          <p:cNvPr id="8" name="Image 0" descr="/var/folders/lw/rmylcyvd5rjfxk9g1z9rrm8w0000gq/T/showship-deck-EGIwvT/paper_mark.png">    </p:cNvPr>
+          <p:cNvPr id="8" name="Image 0" descr="/var/folders/lw/rmylcyvd5rjfxk9g1z9rrm8w0000gq/T/showship-deck-NYX43H/paper_mark.png">    </p:cNvPr>
           <p:cNvPicPr>
             <a:picLocks noChangeAspect="1"/>
           </p:cNvPicPr>
@@ -9151,7 +9151,7 @@
       </p:sp>
       <p:pic>
         <p:nvPicPr>
-          <p:cNvPr id="8" name="Image 0" descr="/var/folders/lw/rmylcyvd5rjfxk9g1z9rrm8w0000gq/T/showship-deck-EGIwvT/paper_mark.png">    </p:cNvPr>
+          <p:cNvPr id="8" name="Image 0" descr="/var/folders/lw/rmylcyvd5rjfxk9g1z9rrm8w0000gq/T/showship-deck-NYX43H/paper_mark.png">    </p:cNvPr>
           <p:cNvPicPr>
             <a:picLocks noChangeAspect="1"/>
           </p:cNvPicPr>
@@ -10742,7 +10742,7 @@
       </p:sp>
       <p:pic>
         <p:nvPicPr>
-          <p:cNvPr id="8" name="Image 0" descr="/var/folders/lw/rmylcyvd5rjfxk9g1z9rrm8w0000gq/T/showship-deck-EGIwvT/paper_mark.png">    </p:cNvPr>
+          <p:cNvPr id="8" name="Image 0" descr="/var/folders/lw/rmylcyvd5rjfxk9g1z9rrm8w0000gq/T/showship-deck-NYX43H/paper_mark.png">    </p:cNvPr>
           <p:cNvPicPr>
             <a:picLocks noChangeAspect="1"/>
           </p:cNvPicPr>
@@ -10826,7 +10826,7 @@
         <p:spPr>
           <a:xfrm>
             <a:off x="640080" y="1783080"/>
-            <a:ext cx="3453384" cy="4160520"/>
+            <a:ext cx="3453384" cy="3694938"/>
           </a:xfrm>
           <a:prstGeom prst="rect">
             <a:avLst/>
@@ -11367,7 +11367,7 @@
         <p:spPr>
           <a:xfrm>
             <a:off x="4367784" y="1783080"/>
-            <a:ext cx="3453384" cy="4160520"/>
+            <a:ext cx="3453384" cy="3694938"/>
           </a:xfrm>
           <a:prstGeom prst="rect">
             <a:avLst/>
@@ -11684,7 +11684,7 @@
         <p:spPr>
           <a:xfrm>
             <a:off x="4843272" y="4536186"/>
-            <a:ext cx="2749296" cy="390144"/>
+            <a:ext cx="2749296" cy="222504"/>
           </a:xfrm>
           <a:prstGeom prst="rect">
             <a:avLst/>
@@ -11722,7 +11722,7 @@
         </p:nvSpPr>
         <p:spPr>
           <a:xfrm>
-            <a:off x="4596384" y="4981194"/>
+            <a:off x="4596384" y="4813554"/>
             <a:ext cx="118872" cy="118872"/>
           </a:xfrm>
           <a:prstGeom prst="ellipse">
@@ -11742,7 +11742,7 @@
         </p:nvSpPr>
         <p:spPr>
           <a:xfrm>
-            <a:off x="4843272" y="4926330"/>
+            <a:off x="4843272" y="4758690"/>
             <a:ext cx="2749296" cy="222504"/>
           </a:xfrm>
           <a:prstGeom prst="rect">
@@ -11781,7 +11781,7 @@
         </p:nvSpPr>
         <p:spPr>
           <a:xfrm>
-            <a:off x="4596384" y="5203698"/>
+            <a:off x="4596384" y="5036058"/>
             <a:ext cx="118872" cy="118872"/>
           </a:xfrm>
           <a:prstGeom prst="ellipse">
@@ -11801,7 +11801,7 @@
         </p:nvSpPr>
         <p:spPr>
           <a:xfrm>
-            <a:off x="4843272" y="5148834"/>
+            <a:off x="4843272" y="4981194"/>
             <a:ext cx="2749296" cy="222504"/>
           </a:xfrm>
           <a:prstGeom prst="rect">
@@ -11841,7 +11841,7 @@
         <p:spPr>
           <a:xfrm>
             <a:off x="8095488" y="1783080"/>
-            <a:ext cx="3453384" cy="4160520"/>
+            <a:ext cx="3453384" cy="3694938"/>
           </a:xfrm>
           <a:prstGeom prst="rect">
             <a:avLst/>
@@ -12000,7 +12000,7 @@
         <p:spPr>
           <a:xfrm>
             <a:off x="8324088" y="2871597"/>
-            <a:ext cx="2996184" cy="792480"/>
+            <a:ext cx="2996184" cy="594360"/>
           </a:xfrm>
           <a:prstGeom prst="rect">
             <a:avLst/>
@@ -12041,7 +12041,7 @@
         </p:nvSpPr>
         <p:spPr>
           <a:xfrm>
-            <a:off x="8324088" y="3801237"/>
+            <a:off x="8324088" y="3603117"/>
             <a:ext cx="2996184" cy="228600"/>
           </a:xfrm>
           <a:prstGeom prst="rect">
@@ -12080,7 +12080,7 @@
         </p:nvSpPr>
         <p:spPr>
           <a:xfrm>
-            <a:off x="8324088" y="4130421"/>
+            <a:off x="8324088" y="3932301"/>
             <a:ext cx="118872" cy="118872"/>
           </a:xfrm>
           <a:prstGeom prst="ellipse">
@@ -12102,7 +12102,7 @@
         </p:nvSpPr>
         <p:spPr>
           <a:xfrm>
-            <a:off x="8570976" y="4075557"/>
+            <a:off x="8570976" y="3877437"/>
             <a:ext cx="2749296" cy="222504"/>
           </a:xfrm>
           <a:prstGeom prst="rect">
@@ -12141,7 +12141,7 @@
         </p:nvSpPr>
         <p:spPr>
           <a:xfrm>
-            <a:off x="8324088" y="4352925"/>
+            <a:off x="8324088" y="4154805"/>
             <a:ext cx="118872" cy="118872"/>
           </a:xfrm>
           <a:prstGeom prst="ellipse">
@@ -12163,7 +12163,7 @@
         </p:nvSpPr>
         <p:spPr>
           <a:xfrm>
-            <a:off x="8570976" y="4298061"/>
+            <a:off x="8570976" y="4099941"/>
             <a:ext cx="2749296" cy="222504"/>
           </a:xfrm>
           <a:prstGeom prst="rect">
@@ -12202,7 +12202,7 @@
         </p:nvSpPr>
         <p:spPr>
           <a:xfrm>
-            <a:off x="8324088" y="4575429"/>
+            <a:off x="8324088" y="4377309"/>
             <a:ext cx="118872" cy="118872"/>
           </a:xfrm>
           <a:prstGeom prst="ellipse">
@@ -12224,7 +12224,7 @@
         </p:nvSpPr>
         <p:spPr>
           <a:xfrm>
-            <a:off x="8570976" y="4520565"/>
+            <a:off x="8570976" y="4322445"/>
             <a:ext cx="2749296" cy="222504"/>
           </a:xfrm>
           <a:prstGeom prst="rect">
@@ -12263,7 +12263,7 @@
         </p:nvSpPr>
         <p:spPr>
           <a:xfrm>
-            <a:off x="640080" y="5989320"/>
+            <a:off x="640080" y="5615178"/>
             <a:ext cx="10908792" cy="274320"/>
           </a:xfrm>
           <a:prstGeom prst="rect">
@@ -12526,7 +12526,7 @@
       </p:sp>
       <p:pic>
         <p:nvPicPr>
-          <p:cNvPr id="8" name="Image 0" descr="/var/folders/lw/rmylcyvd5rjfxk9g1z9rrm8w0000gq/T/showship-deck-EGIwvT/paper_mark.png">    </p:cNvPr>
+          <p:cNvPr id="8" name="Image 0" descr="/var/folders/lw/rmylcyvd5rjfxk9g1z9rrm8w0000gq/T/showship-deck-NYX43H/paper_mark.png">    </p:cNvPr>
           <p:cNvPicPr>
             <a:picLocks noChangeAspect="1"/>
           </p:cNvPicPr>
@@ -13648,7 +13648,7 @@
       </p:sp>
       <p:pic>
         <p:nvPicPr>
-          <p:cNvPr id="8" name="Image 0" descr="/var/folders/lw/rmylcyvd5rjfxk9g1z9rrm8w0000gq/T/showship-deck-EGIwvT/paper_mark.png">    </p:cNvPr>
+          <p:cNvPr id="8" name="Image 0" descr="/var/folders/lw/rmylcyvd5rjfxk9g1z9rrm8w0000gq/T/showship-deck-NYX43H/paper_mark.png">    </p:cNvPr>
           <p:cNvPicPr>
             <a:picLocks noChangeAspect="1"/>
           </p:cNvPicPr>
@@ -14401,7 +14401,7 @@
       </p:sp>
       <p:pic>
         <p:nvPicPr>
-          <p:cNvPr id="8" name="Image 0" descr="/var/folders/lw/rmylcyvd5rjfxk9g1z9rrm8w0000gq/T/showship-deck-EGIwvT/paper_mark.png">    </p:cNvPr>
+          <p:cNvPr id="8" name="Image 0" descr="/var/folders/lw/rmylcyvd5rjfxk9g1z9rrm8w0000gq/T/showship-deck-NYX43H/paper_mark.png">    </p:cNvPr>
           <p:cNvPicPr>
             <a:picLocks noChangeAspect="1"/>
           </p:cNvPicPr>

--- a/src/assets/downloads/example-deck-ember.pptx
+++ b/src/assets/downloads/example-deck-ember.pptx
@@ -2594,7 +2594,7 @@
       </p:sp>
       <p:pic>
         <p:nvPicPr>
-          <p:cNvPr id="14" name="Image 0" descr="/var/folders/lw/rmylcyvd5rjfxk9g1z9rrm8w0000gq/T/showship-deck-NYX43H/logo_trimmed.png">    </p:cNvPr>
+          <p:cNvPr id="14" name="Image 0" descr="/var/folders/lw/rmylcyvd5rjfxk9g1z9rrm8w0000gq/T/showship-deck-4BUm0H/logo_trimmed.png">    </p:cNvPr>
           <p:cNvPicPr>
             <a:picLocks noChangeAspect="1"/>
           </p:cNvPicPr>
@@ -3211,7 +3211,7 @@
       </p:sp>
       <p:pic>
         <p:nvPicPr>
-          <p:cNvPr id="8" name="Image 0" descr="/var/folders/lw/rmylcyvd5rjfxk9g1z9rrm8w0000gq/T/showship-deck-NYX43H/paper_mark.png">    </p:cNvPr>
+          <p:cNvPr id="8" name="Image 0" descr="/var/folders/lw/rmylcyvd5rjfxk9g1z9rrm8w0000gq/T/showship-deck-4BUm0H/paper_mark.png">    </p:cNvPr>
           <p:cNvPicPr>
             <a:picLocks noChangeAspect="1"/>
           </p:cNvPicPr>
@@ -3867,7 +3867,7 @@
       </p:sp>
       <p:pic>
         <p:nvPicPr>
-          <p:cNvPr id="8" name="Image 0" descr="/var/folders/lw/rmylcyvd5rjfxk9g1z9rrm8w0000gq/T/showship-deck-NYX43H/paper_mark.png">    </p:cNvPr>
+          <p:cNvPr id="8" name="Image 0" descr="/var/folders/lw/rmylcyvd5rjfxk9g1z9rrm8w0000gq/T/showship-deck-4BUm0H/paper_mark.png">    </p:cNvPr>
           <p:cNvPicPr>
             <a:picLocks noChangeAspect="1"/>
           </p:cNvPicPr>
@@ -4857,16 +4857,18 @@
         </p:nvSpPr>
         <p:spPr>
           <a:xfrm>
-            <a:off x="10769803" y="5303520"/>
-            <a:ext cx="596189" cy="274320"/>
-          </a:xfrm>
-          <a:prstGeom prst="rect">
-            <a:avLst/>
-          </a:prstGeom>
-          <a:solidFill>
-            <a:srgbClr val="F2B134"/>
-          </a:solidFill>
-          <a:ln/>
+            <a:off x="10206533" y="5303520"/>
+            <a:ext cx="1159459" cy="274320"/>
+          </a:xfrm>
+          <a:prstGeom prst="rect">
+            <a:avLst/>
+          </a:prstGeom>
+          <a:ln w="12700">
+            <a:solidFill>
+              <a:srgbClr val="929AA8"/>
+            </a:solidFill>
+            <a:prstDash val="solid"/>
+          </a:ln>
         </p:spPr>
       </p:sp>
       <p:sp>
@@ -4877,8 +4879,8 @@
         </p:nvSpPr>
         <p:spPr>
           <a:xfrm>
-            <a:off x="10769803" y="5303520"/>
-            <a:ext cx="596189" cy="274320"/>
+            <a:off x="10206533" y="5303520"/>
+            <a:ext cx="1159459" cy="274320"/>
           </a:xfrm>
           <a:prstGeom prst="rect">
             <a:avLst/>
@@ -4896,13 +4898,13 @@
             <a:r>
               <a:rPr lang="en-US" sz="1100" b="1" dirty="0">
                 <a:solidFill>
-                  <a:srgbClr val="12161C"/>
+                  <a:srgbClr val="929AA8"/>
                 </a:solidFill>
                 <a:latin typeface="Arial" pitchFamily="34" charset="0"/>
                 <a:ea typeface="Arial" pitchFamily="34" charset="-122"/>
                 <a:cs typeface="Arial" pitchFamily="34" charset="-120"/>
               </a:rPr>
-              <a:t>Done</a:t>
+              <a:t>Not started</a:t>
             </a:r>
             <a:endParaRPr lang="en-US" sz="1100" dirty="0"/>
           </a:p>
@@ -5182,7 +5184,7 @@
       </p:sp>
       <p:pic>
         <p:nvPicPr>
-          <p:cNvPr id="14" name="Image 0" descr="/var/folders/lw/rmylcyvd5rjfxk9g1z9rrm8w0000gq/T/showship-deck-NYX43H/logo_trimmed.png">    </p:cNvPr>
+          <p:cNvPr id="14" name="Image 0" descr="/var/folders/lw/rmylcyvd5rjfxk9g1z9rrm8w0000gq/T/showship-deck-4BUm0H/logo_trimmed.png">    </p:cNvPr>
           <p:cNvPicPr>
             <a:picLocks noChangeAspect="1"/>
           </p:cNvPicPr>
@@ -5721,7 +5723,7 @@
       </p:sp>
       <p:pic>
         <p:nvPicPr>
-          <p:cNvPr id="8" name="Image 0" descr="/var/folders/lw/rmylcyvd5rjfxk9g1z9rrm8w0000gq/T/showship-deck-NYX43H/paper_mark.png">    </p:cNvPr>
+          <p:cNvPr id="8" name="Image 0" descr="/var/folders/lw/rmylcyvd5rjfxk9g1z9rrm8w0000gq/T/showship-deck-4BUm0H/paper_mark.png">    </p:cNvPr>
           <p:cNvPicPr>
             <a:picLocks noChangeAspect="1"/>
           </p:cNvPicPr>
@@ -6864,7 +6866,7 @@
       </p:sp>
       <p:pic>
         <p:nvPicPr>
-          <p:cNvPr id="8" name="Image 0" descr="/var/folders/lw/rmylcyvd5rjfxk9g1z9rrm8w0000gq/T/showship-deck-NYX43H/paper_mark.png">    </p:cNvPr>
+          <p:cNvPr id="8" name="Image 0" descr="/var/folders/lw/rmylcyvd5rjfxk9g1z9rrm8w0000gq/T/showship-deck-4BUm0H/paper_mark.png">    </p:cNvPr>
           <p:cNvPicPr>
             <a:picLocks noChangeAspect="1"/>
           </p:cNvPicPr>
@@ -7970,7 +7972,7 @@
       </p:sp>
       <p:pic>
         <p:nvPicPr>
-          <p:cNvPr id="8" name="Image 0" descr="/var/folders/lw/rmylcyvd5rjfxk9g1z9rrm8w0000gq/T/showship-deck-NYX43H/paper_mark.png">    </p:cNvPr>
+          <p:cNvPr id="8" name="Image 0" descr="/var/folders/lw/rmylcyvd5rjfxk9g1z9rrm8w0000gq/T/showship-deck-4BUm0H/paper_mark.png">    </p:cNvPr>
           <p:cNvPicPr>
             <a:picLocks noChangeAspect="1"/>
           </p:cNvPicPr>
@@ -9151,7 +9153,7 @@
       </p:sp>
       <p:pic>
         <p:nvPicPr>
-          <p:cNvPr id="8" name="Image 0" descr="/var/folders/lw/rmylcyvd5rjfxk9g1z9rrm8w0000gq/T/showship-deck-NYX43H/paper_mark.png">    </p:cNvPr>
+          <p:cNvPr id="8" name="Image 0" descr="/var/folders/lw/rmylcyvd5rjfxk9g1z9rrm8w0000gq/T/showship-deck-4BUm0H/paper_mark.png">    </p:cNvPr>
           <p:cNvPicPr>
             <a:picLocks noChangeAspect="1"/>
           </p:cNvPicPr>
@@ -10742,7 +10744,7 @@
       </p:sp>
       <p:pic>
         <p:nvPicPr>
-          <p:cNvPr id="8" name="Image 0" descr="/var/folders/lw/rmylcyvd5rjfxk9g1z9rrm8w0000gq/T/showship-deck-NYX43H/paper_mark.png">    </p:cNvPr>
+          <p:cNvPr id="8" name="Image 0" descr="/var/folders/lw/rmylcyvd5rjfxk9g1z9rrm8w0000gq/T/showship-deck-4BUm0H/paper_mark.png">    </p:cNvPr>
           <p:cNvPicPr>
             <a:picLocks noChangeAspect="1"/>
           </p:cNvPicPr>
@@ -12526,7 +12528,7 @@
       </p:sp>
       <p:pic>
         <p:nvPicPr>
-          <p:cNvPr id="8" name="Image 0" descr="/var/folders/lw/rmylcyvd5rjfxk9g1z9rrm8w0000gq/T/showship-deck-NYX43H/paper_mark.png">    </p:cNvPr>
+          <p:cNvPr id="8" name="Image 0" descr="/var/folders/lw/rmylcyvd5rjfxk9g1z9rrm8w0000gq/T/showship-deck-4BUm0H/paper_mark.png">    </p:cNvPr>
           <p:cNvPicPr>
             <a:picLocks noChangeAspect="1"/>
           </p:cNvPicPr>
@@ -13648,7 +13650,7 @@
       </p:sp>
       <p:pic>
         <p:nvPicPr>
-          <p:cNvPr id="8" name="Image 0" descr="/var/folders/lw/rmylcyvd5rjfxk9g1z9rrm8w0000gq/T/showship-deck-NYX43H/paper_mark.png">    </p:cNvPr>
+          <p:cNvPr id="8" name="Image 0" descr="/var/folders/lw/rmylcyvd5rjfxk9g1z9rrm8w0000gq/T/showship-deck-4BUm0H/paper_mark.png">    </p:cNvPr>
           <p:cNvPicPr>
             <a:picLocks noChangeAspect="1"/>
           </p:cNvPicPr>
@@ -14401,7 +14403,7 @@
       </p:sp>
       <p:pic>
         <p:nvPicPr>
-          <p:cNvPr id="8" name="Image 0" descr="/var/folders/lw/rmylcyvd5rjfxk9g1z9rrm8w0000gq/T/showship-deck-NYX43H/paper_mark.png">    </p:cNvPr>
+          <p:cNvPr id="8" name="Image 0" descr="/var/folders/lw/rmylcyvd5rjfxk9g1z9rrm8w0000gq/T/showship-deck-4BUm0H/paper_mark.png">    </p:cNvPr>
           <p:cNvPicPr>
             <a:picLocks noChangeAspect="1"/>
           </p:cNvPicPr>

--- a/src/assets/downloads/example-deck-ember.pptx
+++ b/src/assets/downloads/example-deck-ember.pptx
@@ -2594,7 +2594,7 @@
       </p:sp>
       <p:pic>
         <p:nvPicPr>
-          <p:cNvPr id="14" name="Image 0" descr="/var/folders/lw/rmylcyvd5rjfxk9g1z9rrm8w0000gq/T/showship-deck-4BUm0H/logo_trimmed.png">    </p:cNvPr>
+          <p:cNvPr id="14" name="Image 0" descr="/var/folders/lw/rmylcyvd5rjfxk9g1z9rrm8w0000gq/T/showship-deck-E3ulIe/logo_trimmed.png">    </p:cNvPr>
           <p:cNvPicPr>
             <a:picLocks noChangeAspect="1"/>
           </p:cNvPicPr>
@@ -3211,7 +3211,7 @@
       </p:sp>
       <p:pic>
         <p:nvPicPr>
-          <p:cNvPr id="8" name="Image 0" descr="/var/folders/lw/rmylcyvd5rjfxk9g1z9rrm8w0000gq/T/showship-deck-4BUm0H/paper_mark.png">    </p:cNvPr>
+          <p:cNvPr id="8" name="Image 0" descr="/var/folders/lw/rmylcyvd5rjfxk9g1z9rrm8w0000gq/T/showship-deck-E3ulIe/paper_mark.png">    </p:cNvPr>
           <p:cNvPicPr>
             <a:picLocks noChangeAspect="1"/>
           </p:cNvPicPr>
@@ -3867,7 +3867,7 @@
       </p:sp>
       <p:pic>
         <p:nvPicPr>
-          <p:cNvPr id="8" name="Image 0" descr="/var/folders/lw/rmylcyvd5rjfxk9g1z9rrm8w0000gq/T/showship-deck-4BUm0H/paper_mark.png">    </p:cNvPr>
+          <p:cNvPr id="8" name="Image 0" descr="/var/folders/lw/rmylcyvd5rjfxk9g1z9rrm8w0000gq/T/showship-deck-E3ulIe/paper_mark.png">    </p:cNvPr>
           <p:cNvPicPr>
             <a:picLocks noChangeAspect="1"/>
           </p:cNvPicPr>
@@ -5184,7 +5184,7 @@
       </p:sp>
       <p:pic>
         <p:nvPicPr>
-          <p:cNvPr id="14" name="Image 0" descr="/var/folders/lw/rmylcyvd5rjfxk9g1z9rrm8w0000gq/T/showship-deck-4BUm0H/logo_trimmed.png">    </p:cNvPr>
+          <p:cNvPr id="14" name="Image 0" descr="/var/folders/lw/rmylcyvd5rjfxk9g1z9rrm8w0000gq/T/showship-deck-E3ulIe/logo_trimmed.png">    </p:cNvPr>
           <p:cNvPicPr>
             <a:picLocks noChangeAspect="1"/>
           </p:cNvPicPr>
@@ -5723,7 +5723,7 @@
       </p:sp>
       <p:pic>
         <p:nvPicPr>
-          <p:cNvPr id="8" name="Image 0" descr="/var/folders/lw/rmylcyvd5rjfxk9g1z9rrm8w0000gq/T/showship-deck-4BUm0H/paper_mark.png">    </p:cNvPr>
+          <p:cNvPr id="8" name="Image 0" descr="/var/folders/lw/rmylcyvd5rjfxk9g1z9rrm8w0000gq/T/showship-deck-E3ulIe/paper_mark.png">    </p:cNvPr>
           <p:cNvPicPr>
             <a:picLocks noChangeAspect="1"/>
           </p:cNvPicPr>
@@ -6866,7 +6866,7 @@
       </p:sp>
       <p:pic>
         <p:nvPicPr>
-          <p:cNvPr id="8" name="Image 0" descr="/var/folders/lw/rmylcyvd5rjfxk9g1z9rrm8w0000gq/T/showship-deck-4BUm0H/paper_mark.png">    </p:cNvPr>
+          <p:cNvPr id="8" name="Image 0" descr="/var/folders/lw/rmylcyvd5rjfxk9g1z9rrm8w0000gq/T/showship-deck-E3ulIe/paper_mark.png">    </p:cNvPr>
           <p:cNvPicPr>
             <a:picLocks noChangeAspect="1"/>
           </p:cNvPicPr>
@@ -7972,7 +7972,7 @@
       </p:sp>
       <p:pic>
         <p:nvPicPr>
-          <p:cNvPr id="8" name="Image 0" descr="/var/folders/lw/rmylcyvd5rjfxk9g1z9rrm8w0000gq/T/showship-deck-4BUm0H/paper_mark.png">    </p:cNvPr>
+          <p:cNvPr id="8" name="Image 0" descr="/var/folders/lw/rmylcyvd5rjfxk9g1z9rrm8w0000gq/T/showship-deck-E3ulIe/paper_mark.png">    </p:cNvPr>
           <p:cNvPicPr>
             <a:picLocks noChangeAspect="1"/>
           </p:cNvPicPr>
@@ -9153,7 +9153,7 @@
       </p:sp>
       <p:pic>
         <p:nvPicPr>
-          <p:cNvPr id="8" name="Image 0" descr="/var/folders/lw/rmylcyvd5rjfxk9g1z9rrm8w0000gq/T/showship-deck-4BUm0H/paper_mark.png">    </p:cNvPr>
+          <p:cNvPr id="8" name="Image 0" descr="/var/folders/lw/rmylcyvd5rjfxk9g1z9rrm8w0000gq/T/showship-deck-E3ulIe/paper_mark.png">    </p:cNvPr>
           <p:cNvPicPr>
             <a:picLocks noChangeAspect="1"/>
           </p:cNvPicPr>
@@ -10744,7 +10744,7 @@
       </p:sp>
       <p:pic>
         <p:nvPicPr>
-          <p:cNvPr id="8" name="Image 0" descr="/var/folders/lw/rmylcyvd5rjfxk9g1z9rrm8w0000gq/T/showship-deck-4BUm0H/paper_mark.png">    </p:cNvPr>
+          <p:cNvPr id="8" name="Image 0" descr="/var/folders/lw/rmylcyvd5rjfxk9g1z9rrm8w0000gq/T/showship-deck-E3ulIe/paper_mark.png">    </p:cNvPr>
           <p:cNvPicPr>
             <a:picLocks noChangeAspect="1"/>
           </p:cNvPicPr>
@@ -12528,7 +12528,7 @@
       </p:sp>
       <p:pic>
         <p:nvPicPr>
-          <p:cNvPr id="8" name="Image 0" descr="/var/folders/lw/rmylcyvd5rjfxk9g1z9rrm8w0000gq/T/showship-deck-4BUm0H/paper_mark.png">    </p:cNvPr>
+          <p:cNvPr id="8" name="Image 0" descr="/var/folders/lw/rmylcyvd5rjfxk9g1z9rrm8w0000gq/T/showship-deck-E3ulIe/paper_mark.png">    </p:cNvPr>
           <p:cNvPicPr>
             <a:picLocks noChangeAspect="1"/>
           </p:cNvPicPr>
@@ -13650,7 +13650,7 @@
       </p:sp>
       <p:pic>
         <p:nvPicPr>
-          <p:cNvPr id="8" name="Image 0" descr="/var/folders/lw/rmylcyvd5rjfxk9g1z9rrm8w0000gq/T/showship-deck-4BUm0H/paper_mark.png">    </p:cNvPr>
+          <p:cNvPr id="8" name="Image 0" descr="/var/folders/lw/rmylcyvd5rjfxk9g1z9rrm8w0000gq/T/showship-deck-E3ulIe/paper_mark.png">    </p:cNvPr>
           <p:cNvPicPr>
             <a:picLocks noChangeAspect="1"/>
           </p:cNvPicPr>
@@ -14403,7 +14403,7 @@
       </p:sp>
       <p:pic>
         <p:nvPicPr>
-          <p:cNvPr id="8" name="Image 0" descr="/var/folders/lw/rmylcyvd5rjfxk9g1z9rrm8w0000gq/T/showship-deck-4BUm0H/paper_mark.png">    </p:cNvPr>
+          <p:cNvPr id="8" name="Image 0" descr="/var/folders/lw/rmylcyvd5rjfxk9g1z9rrm8w0000gq/T/showship-deck-E3ulIe/paper_mark.png">    </p:cNvPr>
           <p:cNvPicPr>
             <a:picLocks noChangeAspect="1"/>
           </p:cNvPicPr>

--- a/src/assets/downloads/example-deck-ember.pptx
+++ b/src/assets/downloads/example-deck-ember.pptx
@@ -2594,7 +2594,7 @@
       </p:sp>
       <p:pic>
         <p:nvPicPr>
-          <p:cNvPr id="14" name="Image 0" descr="/var/folders/lw/rmylcyvd5rjfxk9g1z9rrm8w0000gq/T/showship-deck-E3ulIe/logo_trimmed.png">    </p:cNvPr>
+          <p:cNvPr id="14" name="Image 0" descr="/var/folders/lw/rmylcyvd5rjfxk9g1z9rrm8w0000gq/T/showship-deck-Rt4SFu/logo_trimmed.png">    </p:cNvPr>
           <p:cNvPicPr>
             <a:picLocks noChangeAspect="1"/>
           </p:cNvPicPr>
@@ -3211,7 +3211,7 @@
       </p:sp>
       <p:pic>
         <p:nvPicPr>
-          <p:cNvPr id="8" name="Image 0" descr="/var/folders/lw/rmylcyvd5rjfxk9g1z9rrm8w0000gq/T/showship-deck-E3ulIe/paper_mark.png">    </p:cNvPr>
+          <p:cNvPr id="8" name="Image 0" descr="/var/folders/lw/rmylcyvd5rjfxk9g1z9rrm8w0000gq/T/showship-deck-Rt4SFu/paper_mark.png">    </p:cNvPr>
           <p:cNvPicPr>
             <a:picLocks noChangeAspect="1"/>
           </p:cNvPicPr>
@@ -3867,7 +3867,7 @@
       </p:sp>
       <p:pic>
         <p:nvPicPr>
-          <p:cNvPr id="8" name="Image 0" descr="/var/folders/lw/rmylcyvd5rjfxk9g1z9rrm8w0000gq/T/showship-deck-E3ulIe/paper_mark.png">    </p:cNvPr>
+          <p:cNvPr id="8" name="Image 0" descr="/var/folders/lw/rmylcyvd5rjfxk9g1z9rrm8w0000gq/T/showship-deck-Rt4SFu/paper_mark.png">    </p:cNvPr>
           <p:cNvPicPr>
             <a:picLocks noChangeAspect="1"/>
           </p:cNvPicPr>
@@ -5184,7 +5184,7 @@
       </p:sp>
       <p:pic>
         <p:nvPicPr>
-          <p:cNvPr id="14" name="Image 0" descr="/var/folders/lw/rmylcyvd5rjfxk9g1z9rrm8w0000gq/T/showship-deck-E3ulIe/logo_trimmed.png">    </p:cNvPr>
+          <p:cNvPr id="14" name="Image 0" descr="/var/folders/lw/rmylcyvd5rjfxk9g1z9rrm8w0000gq/T/showship-deck-Rt4SFu/logo_trimmed.png">    </p:cNvPr>
           <p:cNvPicPr>
             <a:picLocks noChangeAspect="1"/>
           </p:cNvPicPr>
@@ -5723,7 +5723,7 @@
       </p:sp>
       <p:pic>
         <p:nvPicPr>
-          <p:cNvPr id="8" name="Image 0" descr="/var/folders/lw/rmylcyvd5rjfxk9g1z9rrm8w0000gq/T/showship-deck-E3ulIe/paper_mark.png">    </p:cNvPr>
+          <p:cNvPr id="8" name="Image 0" descr="/var/folders/lw/rmylcyvd5rjfxk9g1z9rrm8w0000gq/T/showship-deck-Rt4SFu/paper_mark.png">    </p:cNvPr>
           <p:cNvPicPr>
             <a:picLocks noChangeAspect="1"/>
           </p:cNvPicPr>
@@ -6866,7 +6866,7 @@
       </p:sp>
       <p:pic>
         <p:nvPicPr>
-          <p:cNvPr id="8" name="Image 0" descr="/var/folders/lw/rmylcyvd5rjfxk9g1z9rrm8w0000gq/T/showship-deck-E3ulIe/paper_mark.png">    </p:cNvPr>
+          <p:cNvPr id="8" name="Image 0" descr="/var/folders/lw/rmylcyvd5rjfxk9g1z9rrm8w0000gq/T/showship-deck-Rt4SFu/paper_mark.png">    </p:cNvPr>
           <p:cNvPicPr>
             <a:picLocks noChangeAspect="1"/>
           </p:cNvPicPr>
@@ -7972,7 +7972,7 @@
       </p:sp>
       <p:pic>
         <p:nvPicPr>
-          <p:cNvPr id="8" name="Image 0" descr="/var/folders/lw/rmylcyvd5rjfxk9g1z9rrm8w0000gq/T/showship-deck-E3ulIe/paper_mark.png">    </p:cNvPr>
+          <p:cNvPr id="8" name="Image 0" descr="/var/folders/lw/rmylcyvd5rjfxk9g1z9rrm8w0000gq/T/showship-deck-Rt4SFu/paper_mark.png">    </p:cNvPr>
           <p:cNvPicPr>
             <a:picLocks noChangeAspect="1"/>
           </p:cNvPicPr>
@@ -9153,7 +9153,7 @@
       </p:sp>
       <p:pic>
         <p:nvPicPr>
-          <p:cNvPr id="8" name="Image 0" descr="/var/folders/lw/rmylcyvd5rjfxk9g1z9rrm8w0000gq/T/showship-deck-E3ulIe/paper_mark.png">    </p:cNvPr>
+          <p:cNvPr id="8" name="Image 0" descr="/var/folders/lw/rmylcyvd5rjfxk9g1z9rrm8w0000gq/T/showship-deck-Rt4SFu/paper_mark.png">    </p:cNvPr>
           <p:cNvPicPr>
             <a:picLocks noChangeAspect="1"/>
           </p:cNvPicPr>
@@ -10744,7 +10744,7 @@
       </p:sp>
       <p:pic>
         <p:nvPicPr>
-          <p:cNvPr id="8" name="Image 0" descr="/var/folders/lw/rmylcyvd5rjfxk9g1z9rrm8w0000gq/T/showship-deck-E3ulIe/paper_mark.png">    </p:cNvPr>
+          <p:cNvPr id="8" name="Image 0" descr="/var/folders/lw/rmylcyvd5rjfxk9g1z9rrm8w0000gq/T/showship-deck-Rt4SFu/paper_mark.png">    </p:cNvPr>
           <p:cNvPicPr>
             <a:picLocks noChangeAspect="1"/>
           </p:cNvPicPr>
@@ -12528,7 +12528,7 @@
       </p:sp>
       <p:pic>
         <p:nvPicPr>
-          <p:cNvPr id="8" name="Image 0" descr="/var/folders/lw/rmylcyvd5rjfxk9g1z9rrm8w0000gq/T/showship-deck-E3ulIe/paper_mark.png">    </p:cNvPr>
+          <p:cNvPr id="8" name="Image 0" descr="/var/folders/lw/rmylcyvd5rjfxk9g1z9rrm8w0000gq/T/showship-deck-Rt4SFu/paper_mark.png">    </p:cNvPr>
           <p:cNvPicPr>
             <a:picLocks noChangeAspect="1"/>
           </p:cNvPicPr>
@@ -13650,7 +13650,7 @@
       </p:sp>
       <p:pic>
         <p:nvPicPr>
-          <p:cNvPr id="8" name="Image 0" descr="/var/folders/lw/rmylcyvd5rjfxk9g1z9rrm8w0000gq/T/showship-deck-E3ulIe/paper_mark.png">    </p:cNvPr>
+          <p:cNvPr id="8" name="Image 0" descr="/var/folders/lw/rmylcyvd5rjfxk9g1z9rrm8w0000gq/T/showship-deck-Rt4SFu/paper_mark.png">    </p:cNvPr>
           <p:cNvPicPr>
             <a:picLocks noChangeAspect="1"/>
           </p:cNvPicPr>
@@ -14403,7 +14403,7 @@
       </p:sp>
       <p:pic>
         <p:nvPicPr>
-          <p:cNvPr id="8" name="Image 0" descr="/var/folders/lw/rmylcyvd5rjfxk9g1z9rrm8w0000gq/T/showship-deck-E3ulIe/paper_mark.png">    </p:cNvPr>
+          <p:cNvPr id="8" name="Image 0" descr="/var/folders/lw/rmylcyvd5rjfxk9g1z9rrm8w0000gq/T/showship-deck-Rt4SFu/paper_mark.png">    </p:cNvPr>
           <p:cNvPicPr>
             <a:picLocks noChangeAspect="1"/>
           </p:cNvPicPr>
